--- a/deliverables/paper_overhead_tables.pptx
+++ b/deliverables/paper_overhead_tables.pptx
@@ -3109,7 +3109,7 @@
         </p:nvSpPr>
         <p:spPr>
           <a:xfrm>
-            <a:off x="731520" y="2011680"/>
+            <a:off x="731520" y="2103120"/>
             <a:ext cx="10698480" cy="1097280"/>
           </a:xfrm>
           <a:prstGeom prst="rect">
@@ -3144,8 +3144,8 @@
         </p:nvSpPr>
         <p:spPr>
           <a:xfrm>
-            <a:off x="731520" y="3200400"/>
-            <a:ext cx="10698480" cy="2377440"/>
+            <a:off x="731520" y="3291840"/>
+            <a:ext cx="10698480" cy="2194560"/>
           </a:xfrm>
           <a:prstGeom prst="rect">
             <a:avLst/>
@@ -3166,7 +3166,7 @@
                 </a:solidFill>
                 <a:latin typeface="Segoe UI"/>
               </a:rPr>
-              <a:t>Per-workload connector cost: Init, Per-push, Finalize, Total streaming overhead, and Wall time. Overlap-friendly regime; message service on its own node; Adaptive batching; median of streaming reps. Lossless delivery, fidelity EXACT (every streamed integer counter matches native). Darshan runtime 3.4.4, log format 3.41. cray-mpich 9.0.1, libfabric 2.2.0rc1. CXI (1 rank/node) for C/Python/ML; TCP (32 ranks/node) for MPI/DLIO (MPI is unsupported over CXI).</a:t>
+              <a:t>Per-workload table: events, send, push, init, finalize, walltime, overhead (all seconds). Batch size = Adaptive. Rows = baseline + 3 streaming reps. Overhead = streaming walltime - baseline walltime. Overlap-friendly regime; message service on its own node. Fidelity EXACT (every streamed integer counter matches native). Darshan 3.4.4, log format 3.41. CXI 1 rank/node (C/Python/ML); TCP 32 ranks/node (MPI/DLIO).</a:t>
             </a:r>
           </a:p>
         </p:txBody>
@@ -3205,8 +3205,8 @@
         </p:nvSpPr>
         <p:spPr>
           <a:xfrm>
-            <a:off x="731520" y="365760"/>
-            <a:ext cx="10881360" cy="822960"/>
+            <a:off x="457200" y="365760"/>
+            <a:ext cx="11247120" cy="822960"/>
           </a:xfrm>
           <a:prstGeom prst="rect">
             <a:avLst/>
@@ -3221,13 +3221,13 @@
           <a:p>
             <a:pPr algn="l"/>
             <a:r>
-              <a:rPr sz="2600" b="1">
+              <a:rPr sz="2400" b="1">
                 <a:solidFill>
                   <a:srgbClr val="4FC3F7"/>
                 </a:solidFill>
                 <a:latin typeface="Segoe UI"/>
               </a:rPr>
-              <a:t>io_bench (C)  -  CXI, 1 rank/node</a:t>
+              <a:t>io_bench (C)  -  CXI, 1 rank/node, Adaptive batching</a:t>
             </a:r>
           </a:p>
         </p:txBody>
@@ -3240,8 +3240,8 @@
         </p:nvSpPr>
         <p:spPr>
           <a:xfrm>
-            <a:off x="731520" y="1188720"/>
-            <a:ext cx="10881360" cy="640080"/>
+            <a:off x="457200" y="1143000"/>
+            <a:ext cx="11247120" cy="640080"/>
           </a:xfrm>
           <a:prstGeom prst="rect">
             <a:avLst/>
@@ -3256,13 +3256,13 @@
           <a:p>
             <a:pPr algn="l"/>
             <a:r>
-              <a:rPr sz="1400" b="0">
+              <a:rPr sz="1300" b="0">
                 <a:solidFill>
                   <a:srgbClr val="93A1AF"/>
                 </a:solidFill>
                 <a:latin typeface="Segoe UI"/>
               </a:rPr>
-              <a:t>Overlap-friendly POSIX write/read + sleep. 37,899 events. 3 reps. Fidelity EXACT.</a:t>
+              <a:t>Overlap-friendly POSIX write/read + sleep. Fidelity EXACT. walltime = WORK region.</a:t>
             </a:r>
           </a:p>
         </p:txBody>
@@ -3276,8 +3276,8 @@
           <p:nvPr/>
         </p:nvGraphicFramePr>
         <p:xfrm>
-          <a:off x="731520" y="2103120"/>
-          <a:ext cx="10698480" cy="4389120"/>
+          <a:off x="365760" y="2011680"/>
+          <a:ext cx="11429999" cy="3200400"/>
         </p:xfrm>
         <a:graphic>
           <a:graphicData uri="http://schemas.openxmlformats.org/drawingml/2006/table">
@@ -3286,10 +3286,202 @@
                 <a:tableStyleId>{5C22544A-7EE6-4342-B048-85BDC9FD1C3A}</a:tableStyleId>
               </a:tblPr>
               <a:tblGrid>
-                <a:gridCol w="6035040"/>
-                <a:gridCol w="4663440"/>
+                <a:gridCol w="1920240"/>
+                <a:gridCol w="1358537"/>
+                <a:gridCol w="1358537"/>
+                <a:gridCol w="1358537"/>
+                <a:gridCol w="1358537"/>
+                <a:gridCol w="1358537"/>
+                <a:gridCol w="1358537"/>
+                <a:gridCol w="1358537"/>
               </a:tblGrid>
-              <a:tr h="731520">
+              <a:tr h="640080">
+                <a:tc>
+                  <a:txBody>
+                    <a:bodyPr/>
+                    <a:lstStyle/>
+                    <a:p>
+                      <a:pPr algn="ctr"/>
+                      <a:r>
+                        <a:rPr sz="1300" b="1">
+                          <a:solidFill>
+                            <a:srgbClr val="4FC3F7"/>
+                          </a:solidFill>
+                          <a:latin typeface="Segoe UI"/>
+                        </a:rPr>
+                        <a:t>arm</a:t>
+                      </a:r>
+                    </a:p>
+                  </a:txBody>
+                  <a:tcPr marL="45720" marR="45720" marT="27432" marB="27432">
+                    <a:solidFill>
+                      <a:srgbClr val="141B23"/>
+                    </a:solidFill>
+                  </a:tcPr>
+                </a:tc>
+                <a:tc>
+                  <a:txBody>
+                    <a:bodyPr/>
+                    <a:lstStyle/>
+                    <a:p>
+                      <a:pPr algn="ctr"/>
+                      <a:r>
+                        <a:rPr sz="1300" b="1">
+                          <a:solidFill>
+                            <a:srgbClr val="4FC3F7"/>
+                          </a:solidFill>
+                          <a:latin typeface="Segoe UI"/>
+                        </a:rPr>
+                        <a:t>events</a:t>
+                      </a:r>
+                    </a:p>
+                  </a:txBody>
+                  <a:tcPr marL="45720" marR="45720" marT="27432" marB="27432">
+                    <a:solidFill>
+                      <a:srgbClr val="141B23"/>
+                    </a:solidFill>
+                  </a:tcPr>
+                </a:tc>
+                <a:tc>
+                  <a:txBody>
+                    <a:bodyPr/>
+                    <a:lstStyle/>
+                    <a:p>
+                      <a:pPr algn="ctr"/>
+                      <a:r>
+                        <a:rPr sz="1300" b="1">
+                          <a:solidFill>
+                            <a:srgbClr val="4FC3F7"/>
+                          </a:solidFill>
+                          <a:latin typeface="Segoe UI"/>
+                        </a:rPr>
+                        <a:t>send avg (us)</a:t>
+                      </a:r>
+                    </a:p>
+                  </a:txBody>
+                  <a:tcPr marL="45720" marR="45720" marT="27432" marB="27432">
+                    <a:solidFill>
+                      <a:srgbClr val="141B23"/>
+                    </a:solidFill>
+                  </a:tcPr>
+                </a:tc>
+                <a:tc>
+                  <a:txBody>
+                    <a:bodyPr/>
+                    <a:lstStyle/>
+                    <a:p>
+                      <a:pPr algn="ctr"/>
+                      <a:r>
+                        <a:rPr sz="1300" b="1">
+                          <a:solidFill>
+                            <a:srgbClr val="4FC3F7"/>
+                          </a:solidFill>
+                          <a:latin typeface="Segoe UI"/>
+                        </a:rPr>
+                        <a:t>push avg (us)</a:t>
+                      </a:r>
+                    </a:p>
+                  </a:txBody>
+                  <a:tcPr marL="45720" marR="45720" marT="27432" marB="27432">
+                    <a:solidFill>
+                      <a:srgbClr val="141B23"/>
+                    </a:solidFill>
+                  </a:tcPr>
+                </a:tc>
+                <a:tc>
+                  <a:txBody>
+                    <a:bodyPr/>
+                    <a:lstStyle/>
+                    <a:p>
+                      <a:pPr algn="ctr"/>
+                      <a:r>
+                        <a:rPr sz="1300" b="1">
+                          <a:solidFill>
+                            <a:srgbClr val="4FC3F7"/>
+                          </a:solidFill>
+                          <a:latin typeface="Segoe UI"/>
+                        </a:rPr>
+                        <a:t>init (s)</a:t>
+                      </a:r>
+                    </a:p>
+                  </a:txBody>
+                  <a:tcPr marL="45720" marR="45720" marT="27432" marB="27432">
+                    <a:solidFill>
+                      <a:srgbClr val="141B23"/>
+                    </a:solidFill>
+                  </a:tcPr>
+                </a:tc>
+                <a:tc>
+                  <a:txBody>
+                    <a:bodyPr/>
+                    <a:lstStyle/>
+                    <a:p>
+                      <a:pPr algn="ctr"/>
+                      <a:r>
+                        <a:rPr sz="1300" b="1">
+                          <a:solidFill>
+                            <a:srgbClr val="4FC3F7"/>
+                          </a:solidFill>
+                          <a:latin typeface="Segoe UI"/>
+                        </a:rPr>
+                        <a:t>finalize (s)</a:t>
+                      </a:r>
+                    </a:p>
+                  </a:txBody>
+                  <a:tcPr marL="45720" marR="45720" marT="27432" marB="27432">
+                    <a:solidFill>
+                      <a:srgbClr val="141B23"/>
+                    </a:solidFill>
+                  </a:tcPr>
+                </a:tc>
+                <a:tc>
+                  <a:txBody>
+                    <a:bodyPr/>
+                    <a:lstStyle/>
+                    <a:p>
+                      <a:pPr algn="ctr"/>
+                      <a:r>
+                        <a:rPr sz="1300" b="1">
+                          <a:solidFill>
+                            <a:srgbClr val="4FC3F7"/>
+                          </a:solidFill>
+                          <a:latin typeface="Segoe UI"/>
+                        </a:rPr>
+                        <a:t>walltime (s)</a:t>
+                      </a:r>
+                    </a:p>
+                  </a:txBody>
+                  <a:tcPr marL="45720" marR="45720" marT="27432" marB="27432">
+                    <a:solidFill>
+                      <a:srgbClr val="141B23"/>
+                    </a:solidFill>
+                  </a:tcPr>
+                </a:tc>
+                <a:tc>
+                  <a:txBody>
+                    <a:bodyPr/>
+                    <a:lstStyle/>
+                    <a:p>
+                      <a:pPr algn="ctr"/>
+                      <a:r>
+                        <a:rPr sz="1300" b="1">
+                          <a:solidFill>
+                            <a:srgbClr val="4FC3F7"/>
+                          </a:solidFill>
+                          <a:latin typeface="Segoe UI"/>
+                        </a:rPr>
+                        <a:t>overhead (s)</a:t>
+                      </a:r>
+                    </a:p>
+                  </a:txBody>
+                  <a:tcPr marL="45720" marR="45720" marT="27432" marB="27432">
+                    <a:solidFill>
+                      <a:srgbClr val="141B23"/>
+                    </a:solidFill>
+                  </a:tcPr>
+                </a:tc>
+              </a:tr>
+              <a:tr h="640080">
                 <a:tc>
                   <a:txBody>
                     <a:bodyPr/>
@@ -3297,47 +3489,371 @@
                     <a:p>
                       <a:pPr algn="l"/>
                       <a:r>
-                        <a:rPr sz="1600" b="1">
+                        <a:rPr sz="1400" b="1">
                           <a:solidFill>
                             <a:srgbClr val="4FC3F7"/>
                           </a:solidFill>
                           <a:latin typeface="Segoe UI"/>
                         </a:rPr>
-                        <a:t>Phase</a:t>
-                      </a:r>
-                    </a:p>
-                  </a:txBody>
-                  <a:tcPr marL="137160" marR="137160" marT="45720" marB="45720">
-                    <a:solidFill>
-                      <a:srgbClr val="141B23"/>
-                    </a:solidFill>
-                  </a:tcPr>
-                </a:tc>
-                <a:tc>
-                  <a:txBody>
-                    <a:bodyPr/>
-                    <a:lstStyle/>
-                    <a:p>
-                      <a:pPr algn="r"/>
-                      <a:r>
-                        <a:rPr sz="1600" b="1">
+                        <a:t>baseline</a:t>
+                      </a:r>
+                    </a:p>
+                  </a:txBody>
+                  <a:tcPr marL="45720" marR="45720" marT="27432" marB="27432">
+                    <a:solidFill>
+                      <a:srgbClr val="12202B"/>
+                    </a:solidFill>
+                  </a:tcPr>
+                </a:tc>
+                <a:tc>
+                  <a:txBody>
+                    <a:bodyPr/>
+                    <a:lstStyle/>
+                    <a:p>
+                      <a:pPr algn="ctr"/>
+                      <a:r>
+                        <a:rPr sz="1400" b="1">
+                          <a:solidFill>
+                            <a:srgbClr val="FFFFFF"/>
+                          </a:solidFill>
+                          <a:latin typeface="Segoe UI"/>
+                        </a:rPr>
+                        <a:t>-</a:t>
+                      </a:r>
+                    </a:p>
+                  </a:txBody>
+                  <a:tcPr marL="45720" marR="45720" marT="27432" marB="27432">
+                    <a:solidFill>
+                      <a:srgbClr val="12202B"/>
+                    </a:solidFill>
+                  </a:tcPr>
+                </a:tc>
+                <a:tc>
+                  <a:txBody>
+                    <a:bodyPr/>
+                    <a:lstStyle/>
+                    <a:p>
+                      <a:pPr algn="ctr"/>
+                      <a:r>
+                        <a:rPr sz="1400" b="1">
+                          <a:solidFill>
+                            <a:srgbClr val="FFFFFF"/>
+                          </a:solidFill>
+                          <a:latin typeface="Segoe UI"/>
+                        </a:rPr>
+                        <a:t>-</a:t>
+                      </a:r>
+                    </a:p>
+                  </a:txBody>
+                  <a:tcPr marL="45720" marR="45720" marT="27432" marB="27432">
+                    <a:solidFill>
+                      <a:srgbClr val="12202B"/>
+                    </a:solidFill>
+                  </a:tcPr>
+                </a:tc>
+                <a:tc>
+                  <a:txBody>
+                    <a:bodyPr/>
+                    <a:lstStyle/>
+                    <a:p>
+                      <a:pPr algn="ctr"/>
+                      <a:r>
+                        <a:rPr sz="1400" b="1">
+                          <a:solidFill>
+                            <a:srgbClr val="FFFFFF"/>
+                          </a:solidFill>
+                          <a:latin typeface="Segoe UI"/>
+                        </a:rPr>
+                        <a:t>-</a:t>
+                      </a:r>
+                    </a:p>
+                  </a:txBody>
+                  <a:tcPr marL="45720" marR="45720" marT="27432" marB="27432">
+                    <a:solidFill>
+                      <a:srgbClr val="12202B"/>
+                    </a:solidFill>
+                  </a:tcPr>
+                </a:tc>
+                <a:tc>
+                  <a:txBody>
+                    <a:bodyPr/>
+                    <a:lstStyle/>
+                    <a:p>
+                      <a:pPr algn="ctr"/>
+                      <a:r>
+                        <a:rPr sz="1400" b="1">
+                          <a:solidFill>
+                            <a:srgbClr val="FFFFFF"/>
+                          </a:solidFill>
+                          <a:latin typeface="Segoe UI"/>
+                        </a:rPr>
+                        <a:t>-</a:t>
+                      </a:r>
+                    </a:p>
+                  </a:txBody>
+                  <a:tcPr marL="45720" marR="45720" marT="27432" marB="27432">
+                    <a:solidFill>
+                      <a:srgbClr val="12202B"/>
+                    </a:solidFill>
+                  </a:tcPr>
+                </a:tc>
+                <a:tc>
+                  <a:txBody>
+                    <a:bodyPr/>
+                    <a:lstStyle/>
+                    <a:p>
+                      <a:pPr algn="ctr"/>
+                      <a:r>
+                        <a:rPr sz="1400" b="1">
+                          <a:solidFill>
+                            <a:srgbClr val="FFFFFF"/>
+                          </a:solidFill>
+                          <a:latin typeface="Segoe UI"/>
+                        </a:rPr>
+                        <a:t>-</a:t>
+                      </a:r>
+                    </a:p>
+                  </a:txBody>
+                  <a:tcPr marL="45720" marR="45720" marT="27432" marB="27432">
+                    <a:solidFill>
+                      <a:srgbClr val="12202B"/>
+                    </a:solidFill>
+                  </a:tcPr>
+                </a:tc>
+                <a:tc>
+                  <a:txBody>
+                    <a:bodyPr/>
+                    <a:lstStyle/>
+                    <a:p>
+                      <a:pPr algn="ctr"/>
+                      <a:r>
+                        <a:rPr sz="1400" b="1">
+                          <a:solidFill>
+                            <a:srgbClr val="FFFFFF"/>
+                          </a:solidFill>
+                          <a:latin typeface="Segoe UI"/>
+                        </a:rPr>
+                        <a:t>600.7</a:t>
+                      </a:r>
+                    </a:p>
+                  </a:txBody>
+                  <a:tcPr marL="45720" marR="45720" marT="27432" marB="27432">
+                    <a:solidFill>
+                      <a:srgbClr val="12202B"/>
+                    </a:solidFill>
+                  </a:tcPr>
+                </a:tc>
+                <a:tc>
+                  <a:txBody>
+                    <a:bodyPr/>
+                    <a:lstStyle/>
+                    <a:p>
+                      <a:pPr algn="ctr"/>
+                      <a:r>
+                        <a:rPr sz="1400" b="1">
+                          <a:solidFill>
+                            <a:srgbClr val="FFFFFF"/>
+                          </a:solidFill>
+                          <a:latin typeface="Segoe UI"/>
+                        </a:rPr>
+                        <a:t>0.0</a:t>
+                      </a:r>
+                    </a:p>
+                  </a:txBody>
+                  <a:tcPr marL="45720" marR="45720" marT="27432" marB="27432">
+                    <a:solidFill>
+                      <a:srgbClr val="12202B"/>
+                    </a:solidFill>
+                  </a:tcPr>
+                </a:tc>
+              </a:tr>
+              <a:tr h="640080">
+                <a:tc>
+                  <a:txBody>
+                    <a:bodyPr/>
+                    <a:lstStyle/>
+                    <a:p>
+                      <a:pPr algn="l"/>
+                      <a:r>
+                        <a:rPr sz="1400" b="0">
                           <a:solidFill>
                             <a:srgbClr val="4FC3F7"/>
                           </a:solidFill>
                           <a:latin typeface="Segoe UI"/>
                         </a:rPr>
-                        <a:t>Cost</a:t>
-                      </a:r>
-                    </a:p>
-                  </a:txBody>
-                  <a:tcPr marL="137160" marR="137160" marT="45720" marB="45720">
-                    <a:solidFill>
-                      <a:srgbClr val="141B23"/>
+                        <a:t>streaming r1</a:t>
+                      </a:r>
+                    </a:p>
+                  </a:txBody>
+                  <a:tcPr marL="45720" marR="45720" marT="27432" marB="27432">
+                    <a:solidFill>
+                      <a:srgbClr val="1A222C"/>
+                    </a:solidFill>
+                  </a:tcPr>
+                </a:tc>
+                <a:tc>
+                  <a:txBody>
+                    <a:bodyPr/>
+                    <a:lstStyle/>
+                    <a:p>
+                      <a:pPr algn="ctr"/>
+                      <a:r>
+                        <a:rPr sz="1400" b="0">
+                          <a:solidFill>
+                            <a:srgbClr val="E8EDF2"/>
+                          </a:solidFill>
+                          <a:latin typeface="Segoe UI"/>
+                        </a:rPr>
+                        <a:t>37,899</a:t>
+                      </a:r>
+                    </a:p>
+                  </a:txBody>
+                  <a:tcPr marL="45720" marR="45720" marT="27432" marB="27432">
+                    <a:solidFill>
+                      <a:srgbClr val="1A222C"/>
+                    </a:solidFill>
+                  </a:tcPr>
+                </a:tc>
+                <a:tc>
+                  <a:txBody>
+                    <a:bodyPr/>
+                    <a:lstStyle/>
+                    <a:p>
+                      <a:pPr algn="ctr"/>
+                      <a:r>
+                        <a:rPr sz="1400" b="0">
+                          <a:solidFill>
+                            <a:srgbClr val="E8EDF2"/>
+                          </a:solidFill>
+                          <a:latin typeface="Segoe UI"/>
+                        </a:rPr>
+                        <a:t>2.19</a:t>
+                      </a:r>
+                    </a:p>
+                  </a:txBody>
+                  <a:tcPr marL="45720" marR="45720" marT="27432" marB="27432">
+                    <a:solidFill>
+                      <a:srgbClr val="1A222C"/>
+                    </a:solidFill>
+                  </a:tcPr>
+                </a:tc>
+                <a:tc>
+                  <a:txBody>
+                    <a:bodyPr/>
+                    <a:lstStyle/>
+                    <a:p>
+                      <a:pPr algn="ctr"/>
+                      <a:r>
+                        <a:rPr sz="1400" b="0">
+                          <a:solidFill>
+                            <a:srgbClr val="E8EDF2"/>
+                          </a:solidFill>
+                          <a:latin typeface="Segoe UI"/>
+                        </a:rPr>
+                        <a:t>19.16</a:t>
+                      </a:r>
+                    </a:p>
+                  </a:txBody>
+                  <a:tcPr marL="45720" marR="45720" marT="27432" marB="27432">
+                    <a:solidFill>
+                      <a:srgbClr val="1A222C"/>
+                    </a:solidFill>
+                  </a:tcPr>
+                </a:tc>
+                <a:tc>
+                  <a:txBody>
+                    <a:bodyPr/>
+                    <a:lstStyle/>
+                    <a:p>
+                      <a:pPr algn="ctr"/>
+                      <a:r>
+                        <a:rPr sz="1400" b="0">
+                          <a:solidFill>
+                            <a:srgbClr val="E8EDF2"/>
+                          </a:solidFill>
+                          <a:latin typeface="Segoe UI"/>
+                        </a:rPr>
+                        <a:t>1.245</a:t>
+                      </a:r>
+                    </a:p>
+                  </a:txBody>
+                  <a:tcPr marL="45720" marR="45720" marT="27432" marB="27432">
+                    <a:solidFill>
+                      <a:srgbClr val="1A222C"/>
+                    </a:solidFill>
+                  </a:tcPr>
+                </a:tc>
+                <a:tc>
+                  <a:txBody>
+                    <a:bodyPr/>
+                    <a:lstStyle/>
+                    <a:p>
+                      <a:pPr algn="ctr"/>
+                      <a:r>
+                        <a:rPr sz="1400" b="0">
+                          <a:solidFill>
+                            <a:srgbClr val="E8EDF2"/>
+                          </a:solidFill>
+                          <a:latin typeface="Segoe UI"/>
+                        </a:rPr>
+                        <a:t>0.0001</a:t>
+                      </a:r>
+                    </a:p>
+                  </a:txBody>
+                  <a:tcPr marL="45720" marR="45720" marT="27432" marB="27432">
+                    <a:solidFill>
+                      <a:srgbClr val="1A222C"/>
+                    </a:solidFill>
+                  </a:tcPr>
+                </a:tc>
+                <a:tc>
+                  <a:txBody>
+                    <a:bodyPr/>
+                    <a:lstStyle/>
+                    <a:p>
+                      <a:pPr algn="ctr"/>
+                      <a:r>
+                        <a:rPr sz="1400" b="0">
+                          <a:solidFill>
+                            <a:srgbClr val="E8EDF2"/>
+                          </a:solidFill>
+                          <a:latin typeface="Segoe UI"/>
+                        </a:rPr>
+                        <a:t>602.0</a:t>
+                      </a:r>
+                    </a:p>
+                  </a:txBody>
+                  <a:tcPr marL="45720" marR="45720" marT="27432" marB="27432">
+                    <a:solidFill>
+                      <a:srgbClr val="1A222C"/>
+                    </a:solidFill>
+                  </a:tcPr>
+                </a:tc>
+                <a:tc>
+                  <a:txBody>
+                    <a:bodyPr/>
+                    <a:lstStyle/>
+                    <a:p>
+                      <a:pPr algn="ctr"/>
+                      <a:r>
+                        <a:rPr sz="1400" b="0">
+                          <a:solidFill>
+                            <a:srgbClr val="E8EDF2"/>
+                          </a:solidFill>
+                          <a:latin typeface="Segoe UI"/>
+                        </a:rPr>
+                        <a:t>+1.3</a:t>
+                      </a:r>
+                    </a:p>
+                  </a:txBody>
+                  <a:tcPr marL="45720" marR="45720" marT="27432" marB="27432">
+                    <a:solidFill>
+                      <a:srgbClr val="1A222C"/>
                     </a:solidFill>
                   </a:tcPr>
                 </a:tc>
               </a:tr>
-              <a:tr h="731520">
+              <a:tr h="640080">
                 <a:tc>
                   <a:txBody>
                     <a:bodyPr/>
@@ -3345,47 +3861,185 @@
                     <a:p>
                       <a:pPr algn="l"/>
                       <a:r>
-                        <a:rPr sz="1600" b="0">
-                          <a:solidFill>
-                            <a:srgbClr val="E8EDF2"/>
-                          </a:solidFill>
-                          <a:latin typeface="Segoe UI"/>
-                        </a:rPr>
-                        <a:t>Init (one-time)</a:t>
-                      </a:r>
-                    </a:p>
-                  </a:txBody>
-                  <a:tcPr marL="137160" marR="137160" marT="45720" marB="45720">
-                    <a:solidFill>
-                      <a:srgbClr val="1A222C"/>
-                    </a:solidFill>
-                  </a:tcPr>
-                </a:tc>
-                <a:tc>
-                  <a:txBody>
-                    <a:bodyPr/>
-                    <a:lstStyle/>
-                    <a:p>
-                      <a:pPr algn="r"/>
-                      <a:r>
-                        <a:rPr sz="1600" b="0">
-                          <a:solidFill>
-                            <a:srgbClr val="E8EDF2"/>
-                          </a:solidFill>
-                          <a:latin typeface="Segoe UI"/>
-                        </a:rPr>
-                        <a:t>0.19 s</a:t>
-                      </a:r>
-                    </a:p>
-                  </a:txBody>
-                  <a:tcPr marL="137160" marR="137160" marT="45720" marB="45720">
+                        <a:rPr sz="1400" b="0">
+                          <a:solidFill>
+                            <a:srgbClr val="4FC3F7"/>
+                          </a:solidFill>
+                          <a:latin typeface="Segoe UI"/>
+                        </a:rPr>
+                        <a:t>streaming r2</a:t>
+                      </a:r>
+                    </a:p>
+                  </a:txBody>
+                  <a:tcPr marL="45720" marR="45720" marT="27432" marB="27432">
+                    <a:solidFill>
+                      <a:srgbClr val="1A222C"/>
+                    </a:solidFill>
+                  </a:tcPr>
+                </a:tc>
+                <a:tc>
+                  <a:txBody>
+                    <a:bodyPr/>
+                    <a:lstStyle/>
+                    <a:p>
+                      <a:pPr algn="ctr"/>
+                      <a:r>
+                        <a:rPr sz="1400" b="0">
+                          <a:solidFill>
+                            <a:srgbClr val="E8EDF2"/>
+                          </a:solidFill>
+                          <a:latin typeface="Segoe UI"/>
+                        </a:rPr>
+                        <a:t>37,899</a:t>
+                      </a:r>
+                    </a:p>
+                  </a:txBody>
+                  <a:tcPr marL="45720" marR="45720" marT="27432" marB="27432">
+                    <a:solidFill>
+                      <a:srgbClr val="1A222C"/>
+                    </a:solidFill>
+                  </a:tcPr>
+                </a:tc>
+                <a:tc>
+                  <a:txBody>
+                    <a:bodyPr/>
+                    <a:lstStyle/>
+                    <a:p>
+                      <a:pPr algn="ctr"/>
+                      <a:r>
+                        <a:rPr sz="1400" b="0">
+                          <a:solidFill>
+                            <a:srgbClr val="E8EDF2"/>
+                          </a:solidFill>
+                          <a:latin typeface="Segoe UI"/>
+                        </a:rPr>
+                        <a:t>2.21</a:t>
+                      </a:r>
+                    </a:p>
+                  </a:txBody>
+                  <a:tcPr marL="45720" marR="45720" marT="27432" marB="27432">
+                    <a:solidFill>
+                      <a:srgbClr val="1A222C"/>
+                    </a:solidFill>
+                  </a:tcPr>
+                </a:tc>
+                <a:tc>
+                  <a:txBody>
+                    <a:bodyPr/>
+                    <a:lstStyle/>
+                    <a:p>
+                      <a:pPr algn="ctr"/>
+                      <a:r>
+                        <a:rPr sz="1400" b="0">
+                          <a:solidFill>
+                            <a:srgbClr val="E8EDF2"/>
+                          </a:solidFill>
+                          <a:latin typeface="Segoe UI"/>
+                        </a:rPr>
+                        <a:t>19.04</a:t>
+                      </a:r>
+                    </a:p>
+                  </a:txBody>
+                  <a:tcPr marL="45720" marR="45720" marT="27432" marB="27432">
+                    <a:solidFill>
+                      <a:srgbClr val="1A222C"/>
+                    </a:solidFill>
+                  </a:tcPr>
+                </a:tc>
+                <a:tc>
+                  <a:txBody>
+                    <a:bodyPr/>
+                    <a:lstStyle/>
+                    <a:p>
+                      <a:pPr algn="ctr"/>
+                      <a:r>
+                        <a:rPr sz="1400" b="0">
+                          <a:solidFill>
+                            <a:srgbClr val="E8EDF2"/>
+                          </a:solidFill>
+                          <a:latin typeface="Segoe UI"/>
+                        </a:rPr>
+                        <a:t>0.192</a:t>
+                      </a:r>
+                    </a:p>
+                  </a:txBody>
+                  <a:tcPr marL="45720" marR="45720" marT="27432" marB="27432">
+                    <a:solidFill>
+                      <a:srgbClr val="1A222C"/>
+                    </a:solidFill>
+                  </a:tcPr>
+                </a:tc>
+                <a:tc>
+                  <a:txBody>
+                    <a:bodyPr/>
+                    <a:lstStyle/>
+                    <a:p>
+                      <a:pPr algn="ctr"/>
+                      <a:r>
+                        <a:rPr sz="1400" b="0">
+                          <a:solidFill>
+                            <a:srgbClr val="E8EDF2"/>
+                          </a:solidFill>
+                          <a:latin typeface="Segoe UI"/>
+                        </a:rPr>
+                        <a:t>0.0001</a:t>
+                      </a:r>
+                    </a:p>
+                  </a:txBody>
+                  <a:tcPr marL="45720" marR="45720" marT="27432" marB="27432">
+                    <a:solidFill>
+                      <a:srgbClr val="1A222C"/>
+                    </a:solidFill>
+                  </a:tcPr>
+                </a:tc>
+                <a:tc>
+                  <a:txBody>
+                    <a:bodyPr/>
+                    <a:lstStyle/>
+                    <a:p>
+                      <a:pPr algn="ctr"/>
+                      <a:r>
+                        <a:rPr sz="1400" b="0">
+                          <a:solidFill>
+                            <a:srgbClr val="E8EDF2"/>
+                          </a:solidFill>
+                          <a:latin typeface="Segoe UI"/>
+                        </a:rPr>
+                        <a:t>601.8</a:t>
+                      </a:r>
+                    </a:p>
+                  </a:txBody>
+                  <a:tcPr marL="45720" marR="45720" marT="27432" marB="27432">
+                    <a:solidFill>
+                      <a:srgbClr val="1A222C"/>
+                    </a:solidFill>
+                  </a:tcPr>
+                </a:tc>
+                <a:tc>
+                  <a:txBody>
+                    <a:bodyPr/>
+                    <a:lstStyle/>
+                    <a:p>
+                      <a:pPr algn="ctr"/>
+                      <a:r>
+                        <a:rPr sz="1400" b="0">
+                          <a:solidFill>
+                            <a:srgbClr val="E8EDF2"/>
+                          </a:solidFill>
+                          <a:latin typeface="Segoe UI"/>
+                        </a:rPr>
+                        <a:t>+1.1</a:t>
+                      </a:r>
+                    </a:p>
+                  </a:txBody>
+                  <a:tcPr marL="45720" marR="45720" marT="27432" marB="27432">
                     <a:solidFill>
                       <a:srgbClr val="1A222C"/>
                     </a:solidFill>
                   </a:tcPr>
                 </a:tc>
               </a:tr>
-              <a:tr h="731520">
+              <a:tr h="640080">
                 <a:tc>
                   <a:txBody>
                     <a:bodyPr/>
@@ -3393,184 +4047,178 @@
                     <a:p>
                       <a:pPr algn="l"/>
                       <a:r>
-                        <a:rPr sz="1600" b="0">
-                          <a:solidFill>
-                            <a:srgbClr val="E8EDF2"/>
-                          </a:solidFill>
-                          <a:latin typeface="Segoe UI"/>
-                        </a:rPr>
-                        <a:t>Per-push cost (37,899 events)</a:t>
-                      </a:r>
-                    </a:p>
-                  </a:txBody>
-                  <a:tcPr marL="137160" marR="137160" marT="45720" marB="45720">
-                    <a:solidFill>
-                      <a:srgbClr val="1A222C"/>
-                    </a:solidFill>
-                  </a:tcPr>
-                </a:tc>
-                <a:tc>
-                  <a:txBody>
-                    <a:bodyPr/>
-                    <a:lstStyle/>
-                    <a:p>
-                      <a:pPr algn="r"/>
-                      <a:r>
-                        <a:rPr sz="1600" b="0">
-                          <a:solidFill>
-                            <a:srgbClr val="E8EDF2"/>
-                          </a:solidFill>
-                          <a:latin typeface="Segoe UI"/>
-                        </a:rPr>
-                        <a:t>19.0 us/event  (0.72 s total)</a:t>
-                      </a:r>
-                    </a:p>
-                  </a:txBody>
-                  <a:tcPr marL="137160" marR="137160" marT="45720" marB="45720">
-                    <a:solidFill>
-                      <a:srgbClr val="1A222C"/>
-                    </a:solidFill>
-                  </a:tcPr>
-                </a:tc>
-              </a:tr>
-              <a:tr h="731520">
-                <a:tc>
-                  <a:txBody>
-                    <a:bodyPr/>
-                    <a:lstStyle/>
-                    <a:p>
-                      <a:pPr algn="l"/>
-                      <a:r>
-                        <a:rPr sz="1600" b="0">
-                          <a:solidFill>
-                            <a:srgbClr val="E8EDF2"/>
-                          </a:solidFill>
-                          <a:latin typeface="Segoe UI"/>
-                        </a:rPr>
-                        <a:t>Finalize (drain + flush)</a:t>
-                      </a:r>
-                    </a:p>
-                  </a:txBody>
-                  <a:tcPr marL="137160" marR="137160" marT="45720" marB="45720">
-                    <a:solidFill>
-                      <a:srgbClr val="1A222C"/>
-                    </a:solidFill>
-                  </a:tcPr>
-                </a:tc>
-                <a:tc>
-                  <a:txBody>
-                    <a:bodyPr/>
-                    <a:lstStyle/>
-                    <a:p>
-                      <a:pPr algn="r"/>
-                      <a:r>
-                        <a:rPr sz="1600" b="0">
-                          <a:solidFill>
-                            <a:srgbClr val="E8EDF2"/>
-                          </a:solidFill>
-                          <a:latin typeface="Segoe UI"/>
-                        </a:rPr>
-                        <a:t>0.0001 s</a:t>
-                      </a:r>
-                    </a:p>
-                  </a:txBody>
-                  <a:tcPr marL="137160" marR="137160" marT="45720" marB="45720">
-                    <a:solidFill>
-                      <a:srgbClr val="1A222C"/>
-                    </a:solidFill>
-                  </a:tcPr>
-                </a:tc>
-              </a:tr>
-              <a:tr h="731520">
-                <a:tc>
-                  <a:txBody>
-                    <a:bodyPr/>
-                    <a:lstStyle/>
-                    <a:p>
-                      <a:pPr algn="l"/>
-                      <a:r>
-                        <a:rPr sz="1600" b="1">
-                          <a:solidFill>
-                            <a:srgbClr val="FFFFFF"/>
-                          </a:solidFill>
-                          <a:latin typeface="Segoe UI"/>
-                        </a:rPr>
-                        <a:t>Total streaming overhead (self-timed)</a:t>
-                      </a:r>
-                    </a:p>
-                  </a:txBody>
-                  <a:tcPr marL="137160" marR="137160" marT="45720" marB="45720">
-                    <a:solidFill>
-                      <a:srgbClr val="12202B"/>
-                    </a:solidFill>
-                  </a:tcPr>
-                </a:tc>
-                <a:tc>
-                  <a:txBody>
-                    <a:bodyPr/>
-                    <a:lstStyle/>
-                    <a:p>
-                      <a:pPr algn="r"/>
-                      <a:r>
-                        <a:rPr sz="1600" b="1">
-                          <a:solidFill>
-                            <a:srgbClr val="FFFFFF"/>
-                          </a:solidFill>
-                          <a:latin typeface="Segoe UI"/>
-                        </a:rPr>
-                        <a:t>0.98 s  =  0.16 % of run</a:t>
-                      </a:r>
-                    </a:p>
-                  </a:txBody>
-                  <a:tcPr marL="137160" marR="137160" marT="45720" marB="45720">
-                    <a:solidFill>
-                      <a:srgbClr val="12202B"/>
-                    </a:solidFill>
-                  </a:tcPr>
-                </a:tc>
-              </a:tr>
-              <a:tr h="731520">
-                <a:tc>
-                  <a:txBody>
-                    <a:bodyPr/>
-                    <a:lstStyle/>
-                    <a:p>
-                      <a:pPr algn="l"/>
-                      <a:r>
-                        <a:rPr sz="1600" b="0">
-                          <a:solidFill>
-                            <a:srgbClr val="E8EDF2"/>
-                          </a:solidFill>
-                          <a:latin typeface="Segoe UI"/>
-                        </a:rPr>
-                        <a:t>Wall time (baseline -&gt; streaming)</a:t>
-                      </a:r>
-                    </a:p>
-                  </a:txBody>
-                  <a:tcPr marL="137160" marR="137160" marT="45720" marB="45720">
-                    <a:solidFill>
-                      <a:srgbClr val="1A222C"/>
-                    </a:solidFill>
-                  </a:tcPr>
-                </a:tc>
-                <a:tc>
-                  <a:txBody>
-                    <a:bodyPr/>
-                    <a:lstStyle/>
-                    <a:p>
-                      <a:pPr algn="r"/>
-                      <a:r>
-                        <a:rPr sz="1600" b="0">
-                          <a:solidFill>
-                            <a:srgbClr val="E8EDF2"/>
-                          </a:solidFill>
-                          <a:latin typeface="Segoe UI"/>
-                        </a:rPr>
-                        <a:t>600.7 -&gt; 601.8 s</a:t>
-                      </a:r>
-                    </a:p>
-                  </a:txBody>
-                  <a:tcPr marL="137160" marR="137160" marT="45720" marB="45720">
+                        <a:rPr sz="1400" b="0">
+                          <a:solidFill>
+                            <a:srgbClr val="4FC3F7"/>
+                          </a:solidFill>
+                          <a:latin typeface="Segoe UI"/>
+                        </a:rPr>
+                        <a:t>streaming r3</a:t>
+                      </a:r>
+                    </a:p>
+                  </a:txBody>
+                  <a:tcPr marL="45720" marR="45720" marT="27432" marB="27432">
+                    <a:solidFill>
+                      <a:srgbClr val="1A222C"/>
+                    </a:solidFill>
+                  </a:tcPr>
+                </a:tc>
+                <a:tc>
+                  <a:txBody>
+                    <a:bodyPr/>
+                    <a:lstStyle/>
+                    <a:p>
+                      <a:pPr algn="ctr"/>
+                      <a:r>
+                        <a:rPr sz="1400" b="0">
+                          <a:solidFill>
+                            <a:srgbClr val="E8EDF2"/>
+                          </a:solidFill>
+                          <a:latin typeface="Segoe UI"/>
+                        </a:rPr>
+                        <a:t>37,899</a:t>
+                      </a:r>
+                    </a:p>
+                  </a:txBody>
+                  <a:tcPr marL="45720" marR="45720" marT="27432" marB="27432">
+                    <a:solidFill>
+                      <a:srgbClr val="1A222C"/>
+                    </a:solidFill>
+                  </a:tcPr>
+                </a:tc>
+                <a:tc>
+                  <a:txBody>
+                    <a:bodyPr/>
+                    <a:lstStyle/>
+                    <a:p>
+                      <a:pPr algn="ctr"/>
+                      <a:r>
+                        <a:rPr sz="1400" b="0">
+                          <a:solidFill>
+                            <a:srgbClr val="E8EDF2"/>
+                          </a:solidFill>
+                          <a:latin typeface="Segoe UI"/>
+                        </a:rPr>
+                        <a:t>2.23</a:t>
+                      </a:r>
+                    </a:p>
+                  </a:txBody>
+                  <a:tcPr marL="45720" marR="45720" marT="27432" marB="27432">
+                    <a:solidFill>
+                      <a:srgbClr val="1A222C"/>
+                    </a:solidFill>
+                  </a:tcPr>
+                </a:tc>
+                <a:tc>
+                  <a:txBody>
+                    <a:bodyPr/>
+                    <a:lstStyle/>
+                    <a:p>
+                      <a:pPr algn="ctr"/>
+                      <a:r>
+                        <a:rPr sz="1400" b="0">
+                          <a:solidFill>
+                            <a:srgbClr val="E8EDF2"/>
+                          </a:solidFill>
+                          <a:latin typeface="Segoe UI"/>
+                        </a:rPr>
+                        <a:t>18.76</a:t>
+                      </a:r>
+                    </a:p>
+                  </a:txBody>
+                  <a:tcPr marL="45720" marR="45720" marT="27432" marB="27432">
+                    <a:solidFill>
+                      <a:srgbClr val="1A222C"/>
+                    </a:solidFill>
+                  </a:tcPr>
+                </a:tc>
+                <a:tc>
+                  <a:txBody>
+                    <a:bodyPr/>
+                    <a:lstStyle/>
+                    <a:p>
+                      <a:pPr algn="ctr"/>
+                      <a:r>
+                        <a:rPr sz="1400" b="0">
+                          <a:solidFill>
+                            <a:srgbClr val="E8EDF2"/>
+                          </a:solidFill>
+                          <a:latin typeface="Segoe UI"/>
+                        </a:rPr>
+                        <a:t>0.183</a:t>
+                      </a:r>
+                    </a:p>
+                  </a:txBody>
+                  <a:tcPr marL="45720" marR="45720" marT="27432" marB="27432">
+                    <a:solidFill>
+                      <a:srgbClr val="1A222C"/>
+                    </a:solidFill>
+                  </a:tcPr>
+                </a:tc>
+                <a:tc>
+                  <a:txBody>
+                    <a:bodyPr/>
+                    <a:lstStyle/>
+                    <a:p>
+                      <a:pPr algn="ctr"/>
+                      <a:r>
+                        <a:rPr sz="1400" b="0">
+                          <a:solidFill>
+                            <a:srgbClr val="E8EDF2"/>
+                          </a:solidFill>
+                          <a:latin typeface="Segoe UI"/>
+                        </a:rPr>
+                        <a:t>0.0001</a:t>
+                      </a:r>
+                    </a:p>
+                  </a:txBody>
+                  <a:tcPr marL="45720" marR="45720" marT="27432" marB="27432">
+                    <a:solidFill>
+                      <a:srgbClr val="1A222C"/>
+                    </a:solidFill>
+                  </a:tcPr>
+                </a:tc>
+                <a:tc>
+                  <a:txBody>
+                    <a:bodyPr/>
+                    <a:lstStyle/>
+                    <a:p>
+                      <a:pPr algn="ctr"/>
+                      <a:r>
+                        <a:rPr sz="1400" b="0">
+                          <a:solidFill>
+                            <a:srgbClr val="E8EDF2"/>
+                          </a:solidFill>
+                          <a:latin typeface="Segoe UI"/>
+                        </a:rPr>
+                        <a:t>601.8</a:t>
+                      </a:r>
+                    </a:p>
+                  </a:txBody>
+                  <a:tcPr marL="45720" marR="45720" marT="27432" marB="27432">
+                    <a:solidFill>
+                      <a:srgbClr val="1A222C"/>
+                    </a:solidFill>
+                  </a:tcPr>
+                </a:tc>
+                <a:tc>
+                  <a:txBody>
+                    <a:bodyPr/>
+                    <a:lstStyle/>
+                    <a:p>
+                      <a:pPr algn="ctr"/>
+                      <a:r>
+                        <a:rPr sz="1400" b="0">
+                          <a:solidFill>
+                            <a:srgbClr val="E8EDF2"/>
+                          </a:solidFill>
+                          <a:latin typeface="Segoe UI"/>
+                        </a:rPr>
+                        <a:t>+1.1</a:t>
+                      </a:r>
+                    </a:p>
+                  </a:txBody>
+                  <a:tcPr marL="45720" marR="45720" marT="27432" marB="27432">
                     <a:solidFill>
                       <a:srgbClr val="1A222C"/>
                     </a:solidFill>
@@ -3589,8 +4237,8 @@
         </p:nvSpPr>
         <p:spPr>
           <a:xfrm>
-            <a:off x="731520" y="6309360"/>
-            <a:ext cx="10698480" cy="457200"/>
+            <a:off x="457200" y="6126480"/>
+            <a:ext cx="11247120" cy="548640"/>
           </a:xfrm>
           <a:prstGeom prst="rect">
             <a:avLst/>
@@ -3611,7 +4259,7 @@
                 </a:solidFill>
                 <a:latin typeface="Segoe UI"/>
               </a:rPr>
-              <a:t>Self-timed overhead = Init + Push + Send + Finalize, measured inside the process. Per-push runs off the app critical path (drain thread); app pays only a ~2 us enqueue.</a:t>
+              <a:t>send = app-critical-path enqueue (total s). push/init/finalize = drain-thread + one-time connector cost (total s). Baseline has no connector (-). overhead in seconds vs baseline.</a:t>
             </a:r>
           </a:p>
         </p:txBody>
@@ -3650,8 +4298,8 @@
         </p:nvSpPr>
         <p:spPr>
           <a:xfrm>
-            <a:off x="731520" y="365760"/>
-            <a:ext cx="10881360" cy="822960"/>
+            <a:off x="457200" y="365760"/>
+            <a:ext cx="11247120" cy="822960"/>
           </a:xfrm>
           <a:prstGeom prst="rect">
             <a:avLst/>
@@ -3666,13 +4314,13 @@
           <a:p>
             <a:pPr algn="l"/>
             <a:r>
-              <a:rPr sz="2600" b="1">
+              <a:rPr sz="2400" b="1">
                 <a:solidFill>
                   <a:srgbClr val="4FC3F7"/>
                 </a:solidFill>
                 <a:latin typeface="Segoe UI"/>
               </a:rPr>
-              <a:t>io_bench_py (Python)  -  CXI, 1 rank/node</a:t>
+              <a:t>io_bench_py (Python)  -  CXI, 1 rank/node, Adaptive batching</a:t>
             </a:r>
           </a:p>
         </p:txBody>
@@ -3685,8 +4333,8 @@
         </p:nvSpPr>
         <p:spPr>
           <a:xfrm>
-            <a:off x="731520" y="1188720"/>
-            <a:ext cx="10881360" cy="640080"/>
+            <a:off x="457200" y="1143000"/>
+            <a:ext cx="11247120" cy="640080"/>
           </a:xfrm>
           <a:prstGeom prst="rect">
             <a:avLst/>
@@ -3701,13 +4349,13 @@
           <a:p>
             <a:pPr algn="l"/>
             <a:r>
-              <a:rPr sz="1400" b="0">
+              <a:rPr sz="1300" b="0">
                 <a:solidFill>
                   <a:srgbClr val="93A1AF"/>
                 </a:solidFill>
                 <a:latin typeface="Segoe UI"/>
               </a:rPr>
-              <a:t>Overlap-friendly POSIX write/read + sleep. 36,851 events. 3 reps. Fidelity EXACT.</a:t>
+              <a:t>Overlap-friendly POSIX write/read + sleep. Fidelity EXACT. walltime = WORK region.</a:t>
             </a:r>
           </a:p>
         </p:txBody>
@@ -3721,8 +4369,8 @@
           <p:nvPr/>
         </p:nvGraphicFramePr>
         <p:xfrm>
-          <a:off x="731520" y="2103120"/>
-          <a:ext cx="10698480" cy="4389120"/>
+          <a:off x="365760" y="2011680"/>
+          <a:ext cx="11429999" cy="3200400"/>
         </p:xfrm>
         <a:graphic>
           <a:graphicData uri="http://schemas.openxmlformats.org/drawingml/2006/table">
@@ -3731,10 +4379,202 @@
                 <a:tableStyleId>{5C22544A-7EE6-4342-B048-85BDC9FD1C3A}</a:tableStyleId>
               </a:tblPr>
               <a:tblGrid>
-                <a:gridCol w="6035040"/>
-                <a:gridCol w="4663440"/>
+                <a:gridCol w="1920240"/>
+                <a:gridCol w="1358537"/>
+                <a:gridCol w="1358537"/>
+                <a:gridCol w="1358537"/>
+                <a:gridCol w="1358537"/>
+                <a:gridCol w="1358537"/>
+                <a:gridCol w="1358537"/>
+                <a:gridCol w="1358537"/>
               </a:tblGrid>
-              <a:tr h="731520">
+              <a:tr h="640080">
+                <a:tc>
+                  <a:txBody>
+                    <a:bodyPr/>
+                    <a:lstStyle/>
+                    <a:p>
+                      <a:pPr algn="ctr"/>
+                      <a:r>
+                        <a:rPr sz="1300" b="1">
+                          <a:solidFill>
+                            <a:srgbClr val="4FC3F7"/>
+                          </a:solidFill>
+                          <a:latin typeface="Segoe UI"/>
+                        </a:rPr>
+                        <a:t>arm</a:t>
+                      </a:r>
+                    </a:p>
+                  </a:txBody>
+                  <a:tcPr marL="45720" marR="45720" marT="27432" marB="27432">
+                    <a:solidFill>
+                      <a:srgbClr val="141B23"/>
+                    </a:solidFill>
+                  </a:tcPr>
+                </a:tc>
+                <a:tc>
+                  <a:txBody>
+                    <a:bodyPr/>
+                    <a:lstStyle/>
+                    <a:p>
+                      <a:pPr algn="ctr"/>
+                      <a:r>
+                        <a:rPr sz="1300" b="1">
+                          <a:solidFill>
+                            <a:srgbClr val="4FC3F7"/>
+                          </a:solidFill>
+                          <a:latin typeface="Segoe UI"/>
+                        </a:rPr>
+                        <a:t>events</a:t>
+                      </a:r>
+                    </a:p>
+                  </a:txBody>
+                  <a:tcPr marL="45720" marR="45720" marT="27432" marB="27432">
+                    <a:solidFill>
+                      <a:srgbClr val="141B23"/>
+                    </a:solidFill>
+                  </a:tcPr>
+                </a:tc>
+                <a:tc>
+                  <a:txBody>
+                    <a:bodyPr/>
+                    <a:lstStyle/>
+                    <a:p>
+                      <a:pPr algn="ctr"/>
+                      <a:r>
+                        <a:rPr sz="1300" b="1">
+                          <a:solidFill>
+                            <a:srgbClr val="4FC3F7"/>
+                          </a:solidFill>
+                          <a:latin typeface="Segoe UI"/>
+                        </a:rPr>
+                        <a:t>send avg (us)</a:t>
+                      </a:r>
+                    </a:p>
+                  </a:txBody>
+                  <a:tcPr marL="45720" marR="45720" marT="27432" marB="27432">
+                    <a:solidFill>
+                      <a:srgbClr val="141B23"/>
+                    </a:solidFill>
+                  </a:tcPr>
+                </a:tc>
+                <a:tc>
+                  <a:txBody>
+                    <a:bodyPr/>
+                    <a:lstStyle/>
+                    <a:p>
+                      <a:pPr algn="ctr"/>
+                      <a:r>
+                        <a:rPr sz="1300" b="1">
+                          <a:solidFill>
+                            <a:srgbClr val="4FC3F7"/>
+                          </a:solidFill>
+                          <a:latin typeface="Segoe UI"/>
+                        </a:rPr>
+                        <a:t>push avg (us)</a:t>
+                      </a:r>
+                    </a:p>
+                  </a:txBody>
+                  <a:tcPr marL="45720" marR="45720" marT="27432" marB="27432">
+                    <a:solidFill>
+                      <a:srgbClr val="141B23"/>
+                    </a:solidFill>
+                  </a:tcPr>
+                </a:tc>
+                <a:tc>
+                  <a:txBody>
+                    <a:bodyPr/>
+                    <a:lstStyle/>
+                    <a:p>
+                      <a:pPr algn="ctr"/>
+                      <a:r>
+                        <a:rPr sz="1300" b="1">
+                          <a:solidFill>
+                            <a:srgbClr val="4FC3F7"/>
+                          </a:solidFill>
+                          <a:latin typeface="Segoe UI"/>
+                        </a:rPr>
+                        <a:t>init (s)</a:t>
+                      </a:r>
+                    </a:p>
+                  </a:txBody>
+                  <a:tcPr marL="45720" marR="45720" marT="27432" marB="27432">
+                    <a:solidFill>
+                      <a:srgbClr val="141B23"/>
+                    </a:solidFill>
+                  </a:tcPr>
+                </a:tc>
+                <a:tc>
+                  <a:txBody>
+                    <a:bodyPr/>
+                    <a:lstStyle/>
+                    <a:p>
+                      <a:pPr algn="ctr"/>
+                      <a:r>
+                        <a:rPr sz="1300" b="1">
+                          <a:solidFill>
+                            <a:srgbClr val="4FC3F7"/>
+                          </a:solidFill>
+                          <a:latin typeface="Segoe UI"/>
+                        </a:rPr>
+                        <a:t>finalize (s)</a:t>
+                      </a:r>
+                    </a:p>
+                  </a:txBody>
+                  <a:tcPr marL="45720" marR="45720" marT="27432" marB="27432">
+                    <a:solidFill>
+                      <a:srgbClr val="141B23"/>
+                    </a:solidFill>
+                  </a:tcPr>
+                </a:tc>
+                <a:tc>
+                  <a:txBody>
+                    <a:bodyPr/>
+                    <a:lstStyle/>
+                    <a:p>
+                      <a:pPr algn="ctr"/>
+                      <a:r>
+                        <a:rPr sz="1300" b="1">
+                          <a:solidFill>
+                            <a:srgbClr val="4FC3F7"/>
+                          </a:solidFill>
+                          <a:latin typeface="Segoe UI"/>
+                        </a:rPr>
+                        <a:t>walltime (s)</a:t>
+                      </a:r>
+                    </a:p>
+                  </a:txBody>
+                  <a:tcPr marL="45720" marR="45720" marT="27432" marB="27432">
+                    <a:solidFill>
+                      <a:srgbClr val="141B23"/>
+                    </a:solidFill>
+                  </a:tcPr>
+                </a:tc>
+                <a:tc>
+                  <a:txBody>
+                    <a:bodyPr/>
+                    <a:lstStyle/>
+                    <a:p>
+                      <a:pPr algn="ctr"/>
+                      <a:r>
+                        <a:rPr sz="1300" b="1">
+                          <a:solidFill>
+                            <a:srgbClr val="4FC3F7"/>
+                          </a:solidFill>
+                          <a:latin typeface="Segoe UI"/>
+                        </a:rPr>
+                        <a:t>overhead (s)</a:t>
+                      </a:r>
+                    </a:p>
+                  </a:txBody>
+                  <a:tcPr marL="45720" marR="45720" marT="27432" marB="27432">
+                    <a:solidFill>
+                      <a:srgbClr val="141B23"/>
+                    </a:solidFill>
+                  </a:tcPr>
+                </a:tc>
+              </a:tr>
+              <a:tr h="640080">
                 <a:tc>
                   <a:txBody>
                     <a:bodyPr/>
@@ -3742,47 +4582,371 @@
                     <a:p>
                       <a:pPr algn="l"/>
                       <a:r>
-                        <a:rPr sz="1600" b="1">
+                        <a:rPr sz="1400" b="1">
                           <a:solidFill>
                             <a:srgbClr val="4FC3F7"/>
                           </a:solidFill>
                           <a:latin typeface="Segoe UI"/>
                         </a:rPr>
-                        <a:t>Phase</a:t>
-                      </a:r>
-                    </a:p>
-                  </a:txBody>
-                  <a:tcPr marL="137160" marR="137160" marT="45720" marB="45720">
-                    <a:solidFill>
-                      <a:srgbClr val="141B23"/>
-                    </a:solidFill>
-                  </a:tcPr>
-                </a:tc>
-                <a:tc>
-                  <a:txBody>
-                    <a:bodyPr/>
-                    <a:lstStyle/>
-                    <a:p>
-                      <a:pPr algn="r"/>
-                      <a:r>
-                        <a:rPr sz="1600" b="1">
+                        <a:t>baseline</a:t>
+                      </a:r>
+                    </a:p>
+                  </a:txBody>
+                  <a:tcPr marL="45720" marR="45720" marT="27432" marB="27432">
+                    <a:solidFill>
+                      <a:srgbClr val="12202B"/>
+                    </a:solidFill>
+                  </a:tcPr>
+                </a:tc>
+                <a:tc>
+                  <a:txBody>
+                    <a:bodyPr/>
+                    <a:lstStyle/>
+                    <a:p>
+                      <a:pPr algn="ctr"/>
+                      <a:r>
+                        <a:rPr sz="1400" b="1">
+                          <a:solidFill>
+                            <a:srgbClr val="FFFFFF"/>
+                          </a:solidFill>
+                          <a:latin typeface="Segoe UI"/>
+                        </a:rPr>
+                        <a:t>-</a:t>
+                      </a:r>
+                    </a:p>
+                  </a:txBody>
+                  <a:tcPr marL="45720" marR="45720" marT="27432" marB="27432">
+                    <a:solidFill>
+                      <a:srgbClr val="12202B"/>
+                    </a:solidFill>
+                  </a:tcPr>
+                </a:tc>
+                <a:tc>
+                  <a:txBody>
+                    <a:bodyPr/>
+                    <a:lstStyle/>
+                    <a:p>
+                      <a:pPr algn="ctr"/>
+                      <a:r>
+                        <a:rPr sz="1400" b="1">
+                          <a:solidFill>
+                            <a:srgbClr val="FFFFFF"/>
+                          </a:solidFill>
+                          <a:latin typeface="Segoe UI"/>
+                        </a:rPr>
+                        <a:t>-</a:t>
+                      </a:r>
+                    </a:p>
+                  </a:txBody>
+                  <a:tcPr marL="45720" marR="45720" marT="27432" marB="27432">
+                    <a:solidFill>
+                      <a:srgbClr val="12202B"/>
+                    </a:solidFill>
+                  </a:tcPr>
+                </a:tc>
+                <a:tc>
+                  <a:txBody>
+                    <a:bodyPr/>
+                    <a:lstStyle/>
+                    <a:p>
+                      <a:pPr algn="ctr"/>
+                      <a:r>
+                        <a:rPr sz="1400" b="1">
+                          <a:solidFill>
+                            <a:srgbClr val="FFFFFF"/>
+                          </a:solidFill>
+                          <a:latin typeface="Segoe UI"/>
+                        </a:rPr>
+                        <a:t>-</a:t>
+                      </a:r>
+                    </a:p>
+                  </a:txBody>
+                  <a:tcPr marL="45720" marR="45720" marT="27432" marB="27432">
+                    <a:solidFill>
+                      <a:srgbClr val="12202B"/>
+                    </a:solidFill>
+                  </a:tcPr>
+                </a:tc>
+                <a:tc>
+                  <a:txBody>
+                    <a:bodyPr/>
+                    <a:lstStyle/>
+                    <a:p>
+                      <a:pPr algn="ctr"/>
+                      <a:r>
+                        <a:rPr sz="1400" b="1">
+                          <a:solidFill>
+                            <a:srgbClr val="FFFFFF"/>
+                          </a:solidFill>
+                          <a:latin typeface="Segoe UI"/>
+                        </a:rPr>
+                        <a:t>-</a:t>
+                      </a:r>
+                    </a:p>
+                  </a:txBody>
+                  <a:tcPr marL="45720" marR="45720" marT="27432" marB="27432">
+                    <a:solidFill>
+                      <a:srgbClr val="12202B"/>
+                    </a:solidFill>
+                  </a:tcPr>
+                </a:tc>
+                <a:tc>
+                  <a:txBody>
+                    <a:bodyPr/>
+                    <a:lstStyle/>
+                    <a:p>
+                      <a:pPr algn="ctr"/>
+                      <a:r>
+                        <a:rPr sz="1400" b="1">
+                          <a:solidFill>
+                            <a:srgbClr val="FFFFFF"/>
+                          </a:solidFill>
+                          <a:latin typeface="Segoe UI"/>
+                        </a:rPr>
+                        <a:t>-</a:t>
+                      </a:r>
+                    </a:p>
+                  </a:txBody>
+                  <a:tcPr marL="45720" marR="45720" marT="27432" marB="27432">
+                    <a:solidFill>
+                      <a:srgbClr val="12202B"/>
+                    </a:solidFill>
+                  </a:tcPr>
+                </a:tc>
+                <a:tc>
+                  <a:txBody>
+                    <a:bodyPr/>
+                    <a:lstStyle/>
+                    <a:p>
+                      <a:pPr algn="ctr"/>
+                      <a:r>
+                        <a:rPr sz="1400" b="1">
+                          <a:solidFill>
+                            <a:srgbClr val="FFFFFF"/>
+                          </a:solidFill>
+                          <a:latin typeface="Segoe UI"/>
+                        </a:rPr>
+                        <a:t>558.4</a:t>
+                      </a:r>
+                    </a:p>
+                  </a:txBody>
+                  <a:tcPr marL="45720" marR="45720" marT="27432" marB="27432">
+                    <a:solidFill>
+                      <a:srgbClr val="12202B"/>
+                    </a:solidFill>
+                  </a:tcPr>
+                </a:tc>
+                <a:tc>
+                  <a:txBody>
+                    <a:bodyPr/>
+                    <a:lstStyle/>
+                    <a:p>
+                      <a:pPr algn="ctr"/>
+                      <a:r>
+                        <a:rPr sz="1400" b="1">
+                          <a:solidFill>
+                            <a:srgbClr val="FFFFFF"/>
+                          </a:solidFill>
+                          <a:latin typeface="Segoe UI"/>
+                        </a:rPr>
+                        <a:t>0.0</a:t>
+                      </a:r>
+                    </a:p>
+                  </a:txBody>
+                  <a:tcPr marL="45720" marR="45720" marT="27432" marB="27432">
+                    <a:solidFill>
+                      <a:srgbClr val="12202B"/>
+                    </a:solidFill>
+                  </a:tcPr>
+                </a:tc>
+              </a:tr>
+              <a:tr h="640080">
+                <a:tc>
+                  <a:txBody>
+                    <a:bodyPr/>
+                    <a:lstStyle/>
+                    <a:p>
+                      <a:pPr algn="l"/>
+                      <a:r>
+                        <a:rPr sz="1400" b="0">
                           <a:solidFill>
                             <a:srgbClr val="4FC3F7"/>
                           </a:solidFill>
                           <a:latin typeface="Segoe UI"/>
                         </a:rPr>
-                        <a:t>Cost</a:t>
-                      </a:r>
-                    </a:p>
-                  </a:txBody>
-                  <a:tcPr marL="137160" marR="137160" marT="45720" marB="45720">
-                    <a:solidFill>
-                      <a:srgbClr val="141B23"/>
+                        <a:t>streaming r1</a:t>
+                      </a:r>
+                    </a:p>
+                  </a:txBody>
+                  <a:tcPr marL="45720" marR="45720" marT="27432" marB="27432">
+                    <a:solidFill>
+                      <a:srgbClr val="1A222C"/>
+                    </a:solidFill>
+                  </a:tcPr>
+                </a:tc>
+                <a:tc>
+                  <a:txBody>
+                    <a:bodyPr/>
+                    <a:lstStyle/>
+                    <a:p>
+                      <a:pPr algn="ctr"/>
+                      <a:r>
+                        <a:rPr sz="1400" b="0">
+                          <a:solidFill>
+                            <a:srgbClr val="E8EDF2"/>
+                          </a:solidFill>
+                          <a:latin typeface="Segoe UI"/>
+                        </a:rPr>
+                        <a:t>36,851</a:t>
+                      </a:r>
+                    </a:p>
+                  </a:txBody>
+                  <a:tcPr marL="45720" marR="45720" marT="27432" marB="27432">
+                    <a:solidFill>
+                      <a:srgbClr val="1A222C"/>
+                    </a:solidFill>
+                  </a:tcPr>
+                </a:tc>
+                <a:tc>
+                  <a:txBody>
+                    <a:bodyPr/>
+                    <a:lstStyle/>
+                    <a:p>
+                      <a:pPr algn="ctr"/>
+                      <a:r>
+                        <a:rPr sz="1400" b="0">
+                          <a:solidFill>
+                            <a:srgbClr val="E8EDF2"/>
+                          </a:solidFill>
+                          <a:latin typeface="Segoe UI"/>
+                        </a:rPr>
+                        <a:t>2.14</a:t>
+                      </a:r>
+                    </a:p>
+                  </a:txBody>
+                  <a:tcPr marL="45720" marR="45720" marT="27432" marB="27432">
+                    <a:solidFill>
+                      <a:srgbClr val="1A222C"/>
+                    </a:solidFill>
+                  </a:tcPr>
+                </a:tc>
+                <a:tc>
+                  <a:txBody>
+                    <a:bodyPr/>
+                    <a:lstStyle/>
+                    <a:p>
+                      <a:pPr algn="ctr"/>
+                      <a:r>
+                        <a:rPr sz="1400" b="0">
+                          <a:solidFill>
+                            <a:srgbClr val="E8EDF2"/>
+                          </a:solidFill>
+                          <a:latin typeface="Segoe UI"/>
+                        </a:rPr>
+                        <a:t>21.55</a:t>
+                      </a:r>
+                    </a:p>
+                  </a:txBody>
+                  <a:tcPr marL="45720" marR="45720" marT="27432" marB="27432">
+                    <a:solidFill>
+                      <a:srgbClr val="1A222C"/>
+                    </a:solidFill>
+                  </a:tcPr>
+                </a:tc>
+                <a:tc>
+                  <a:txBody>
+                    <a:bodyPr/>
+                    <a:lstStyle/>
+                    <a:p>
+                      <a:pPr algn="ctr"/>
+                      <a:r>
+                        <a:rPr sz="1400" b="0">
+                          <a:solidFill>
+                            <a:srgbClr val="E8EDF2"/>
+                          </a:solidFill>
+                          <a:latin typeface="Segoe UI"/>
+                        </a:rPr>
+                        <a:t>0.223</a:t>
+                      </a:r>
+                    </a:p>
+                  </a:txBody>
+                  <a:tcPr marL="45720" marR="45720" marT="27432" marB="27432">
+                    <a:solidFill>
+                      <a:srgbClr val="1A222C"/>
+                    </a:solidFill>
+                  </a:tcPr>
+                </a:tc>
+                <a:tc>
+                  <a:txBody>
+                    <a:bodyPr/>
+                    <a:lstStyle/>
+                    <a:p>
+                      <a:pPr algn="ctr"/>
+                      <a:r>
+                        <a:rPr sz="1400" b="0">
+                          <a:solidFill>
+                            <a:srgbClr val="E8EDF2"/>
+                          </a:solidFill>
+                          <a:latin typeface="Segoe UI"/>
+                        </a:rPr>
+                        <a:t>0.0001</a:t>
+                      </a:r>
+                    </a:p>
+                  </a:txBody>
+                  <a:tcPr marL="45720" marR="45720" marT="27432" marB="27432">
+                    <a:solidFill>
+                      <a:srgbClr val="1A222C"/>
+                    </a:solidFill>
+                  </a:tcPr>
+                </a:tc>
+                <a:tc>
+                  <a:txBody>
+                    <a:bodyPr/>
+                    <a:lstStyle/>
+                    <a:p>
+                      <a:pPr algn="ctr"/>
+                      <a:r>
+                        <a:rPr sz="1400" b="0">
+                          <a:solidFill>
+                            <a:srgbClr val="E8EDF2"/>
+                          </a:solidFill>
+                          <a:latin typeface="Segoe UI"/>
+                        </a:rPr>
+                        <a:t>558.5</a:t>
+                      </a:r>
+                    </a:p>
+                  </a:txBody>
+                  <a:tcPr marL="45720" marR="45720" marT="27432" marB="27432">
+                    <a:solidFill>
+                      <a:srgbClr val="1A222C"/>
+                    </a:solidFill>
+                  </a:tcPr>
+                </a:tc>
+                <a:tc>
+                  <a:txBody>
+                    <a:bodyPr/>
+                    <a:lstStyle/>
+                    <a:p>
+                      <a:pPr algn="ctr"/>
+                      <a:r>
+                        <a:rPr sz="1400" b="0">
+                          <a:solidFill>
+                            <a:srgbClr val="E8EDF2"/>
+                          </a:solidFill>
+                          <a:latin typeface="Segoe UI"/>
+                        </a:rPr>
+                        <a:t>+0.1</a:t>
+                      </a:r>
+                    </a:p>
+                  </a:txBody>
+                  <a:tcPr marL="45720" marR="45720" marT="27432" marB="27432">
+                    <a:solidFill>
+                      <a:srgbClr val="1A222C"/>
                     </a:solidFill>
                   </a:tcPr>
                 </a:tc>
               </a:tr>
-              <a:tr h="731520">
+              <a:tr h="640080">
                 <a:tc>
                   <a:txBody>
                     <a:bodyPr/>
@@ -3790,47 +4954,185 @@
                     <a:p>
                       <a:pPr algn="l"/>
                       <a:r>
-                        <a:rPr sz="1600" b="0">
-                          <a:solidFill>
-                            <a:srgbClr val="E8EDF2"/>
-                          </a:solidFill>
-                          <a:latin typeface="Segoe UI"/>
-                        </a:rPr>
-                        <a:t>Init (one-time)</a:t>
-                      </a:r>
-                    </a:p>
-                  </a:txBody>
-                  <a:tcPr marL="137160" marR="137160" marT="45720" marB="45720">
-                    <a:solidFill>
-                      <a:srgbClr val="1A222C"/>
-                    </a:solidFill>
-                  </a:tcPr>
-                </a:tc>
-                <a:tc>
-                  <a:txBody>
-                    <a:bodyPr/>
-                    <a:lstStyle/>
-                    <a:p>
-                      <a:pPr algn="r"/>
-                      <a:r>
-                        <a:rPr sz="1600" b="0">
-                          <a:solidFill>
-                            <a:srgbClr val="E8EDF2"/>
-                          </a:solidFill>
-                          <a:latin typeface="Segoe UI"/>
-                        </a:rPr>
-                        <a:t>0.17 s</a:t>
-                      </a:r>
-                    </a:p>
-                  </a:txBody>
-                  <a:tcPr marL="137160" marR="137160" marT="45720" marB="45720">
+                        <a:rPr sz="1400" b="0">
+                          <a:solidFill>
+                            <a:srgbClr val="4FC3F7"/>
+                          </a:solidFill>
+                          <a:latin typeface="Segoe UI"/>
+                        </a:rPr>
+                        <a:t>streaming r2</a:t>
+                      </a:r>
+                    </a:p>
+                  </a:txBody>
+                  <a:tcPr marL="45720" marR="45720" marT="27432" marB="27432">
+                    <a:solidFill>
+                      <a:srgbClr val="1A222C"/>
+                    </a:solidFill>
+                  </a:tcPr>
+                </a:tc>
+                <a:tc>
+                  <a:txBody>
+                    <a:bodyPr/>
+                    <a:lstStyle/>
+                    <a:p>
+                      <a:pPr algn="ctr"/>
+                      <a:r>
+                        <a:rPr sz="1400" b="0">
+                          <a:solidFill>
+                            <a:srgbClr val="E8EDF2"/>
+                          </a:solidFill>
+                          <a:latin typeface="Segoe UI"/>
+                        </a:rPr>
+                        <a:t>36,851</a:t>
+                      </a:r>
+                    </a:p>
+                  </a:txBody>
+                  <a:tcPr marL="45720" marR="45720" marT="27432" marB="27432">
+                    <a:solidFill>
+                      <a:srgbClr val="1A222C"/>
+                    </a:solidFill>
+                  </a:tcPr>
+                </a:tc>
+                <a:tc>
+                  <a:txBody>
+                    <a:bodyPr/>
+                    <a:lstStyle/>
+                    <a:p>
+                      <a:pPr algn="ctr"/>
+                      <a:r>
+                        <a:rPr sz="1400" b="0">
+                          <a:solidFill>
+                            <a:srgbClr val="E8EDF2"/>
+                          </a:solidFill>
+                          <a:latin typeface="Segoe UI"/>
+                        </a:rPr>
+                        <a:t>2.12</a:t>
+                      </a:r>
+                    </a:p>
+                  </a:txBody>
+                  <a:tcPr marL="45720" marR="45720" marT="27432" marB="27432">
+                    <a:solidFill>
+                      <a:srgbClr val="1A222C"/>
+                    </a:solidFill>
+                  </a:tcPr>
+                </a:tc>
+                <a:tc>
+                  <a:txBody>
+                    <a:bodyPr/>
+                    <a:lstStyle/>
+                    <a:p>
+                      <a:pPr algn="ctr"/>
+                      <a:r>
+                        <a:rPr sz="1400" b="0">
+                          <a:solidFill>
+                            <a:srgbClr val="E8EDF2"/>
+                          </a:solidFill>
+                          <a:latin typeface="Segoe UI"/>
+                        </a:rPr>
+                        <a:t>24.50</a:t>
+                      </a:r>
+                    </a:p>
+                  </a:txBody>
+                  <a:tcPr marL="45720" marR="45720" marT="27432" marB="27432">
+                    <a:solidFill>
+                      <a:srgbClr val="1A222C"/>
+                    </a:solidFill>
+                  </a:tcPr>
+                </a:tc>
+                <a:tc>
+                  <a:txBody>
+                    <a:bodyPr/>
+                    <a:lstStyle/>
+                    <a:p>
+                      <a:pPr algn="ctr"/>
+                      <a:r>
+                        <a:rPr sz="1400" b="0">
+                          <a:solidFill>
+                            <a:srgbClr val="E8EDF2"/>
+                          </a:solidFill>
+                          <a:latin typeface="Segoe UI"/>
+                        </a:rPr>
+                        <a:t>0.416</a:t>
+                      </a:r>
+                    </a:p>
+                  </a:txBody>
+                  <a:tcPr marL="45720" marR="45720" marT="27432" marB="27432">
+                    <a:solidFill>
+                      <a:srgbClr val="1A222C"/>
+                    </a:solidFill>
+                  </a:tcPr>
+                </a:tc>
+                <a:tc>
+                  <a:txBody>
+                    <a:bodyPr/>
+                    <a:lstStyle/>
+                    <a:p>
+                      <a:pPr algn="ctr"/>
+                      <a:r>
+                        <a:rPr sz="1400" b="0">
+                          <a:solidFill>
+                            <a:srgbClr val="E8EDF2"/>
+                          </a:solidFill>
+                          <a:latin typeface="Segoe UI"/>
+                        </a:rPr>
+                        <a:t>0.0001</a:t>
+                      </a:r>
+                    </a:p>
+                  </a:txBody>
+                  <a:tcPr marL="45720" marR="45720" marT="27432" marB="27432">
+                    <a:solidFill>
+                      <a:srgbClr val="1A222C"/>
+                    </a:solidFill>
+                  </a:tcPr>
+                </a:tc>
+                <a:tc>
+                  <a:txBody>
+                    <a:bodyPr/>
+                    <a:lstStyle/>
+                    <a:p>
+                      <a:pPr algn="ctr"/>
+                      <a:r>
+                        <a:rPr sz="1400" b="0">
+                          <a:solidFill>
+                            <a:srgbClr val="E8EDF2"/>
+                          </a:solidFill>
+                          <a:latin typeface="Segoe UI"/>
+                        </a:rPr>
+                        <a:t>556.8</a:t>
+                      </a:r>
+                    </a:p>
+                  </a:txBody>
+                  <a:tcPr marL="45720" marR="45720" marT="27432" marB="27432">
+                    <a:solidFill>
+                      <a:srgbClr val="1A222C"/>
+                    </a:solidFill>
+                  </a:tcPr>
+                </a:tc>
+                <a:tc>
+                  <a:txBody>
+                    <a:bodyPr/>
+                    <a:lstStyle/>
+                    <a:p>
+                      <a:pPr algn="ctr"/>
+                      <a:r>
+                        <a:rPr sz="1400" b="0">
+                          <a:solidFill>
+                            <a:srgbClr val="E8EDF2"/>
+                          </a:solidFill>
+                          <a:latin typeface="Segoe UI"/>
+                        </a:rPr>
+                        <a:t>-1.6</a:t>
+                      </a:r>
+                    </a:p>
+                  </a:txBody>
+                  <a:tcPr marL="45720" marR="45720" marT="27432" marB="27432">
                     <a:solidFill>
                       <a:srgbClr val="1A222C"/>
                     </a:solidFill>
                   </a:tcPr>
                 </a:tc>
               </a:tr>
-              <a:tr h="731520">
+              <a:tr h="640080">
                 <a:tc>
                   <a:txBody>
                     <a:bodyPr/>
@@ -3838,184 +5140,178 @@
                     <a:p>
                       <a:pPr algn="l"/>
                       <a:r>
-                        <a:rPr sz="1600" b="0">
-                          <a:solidFill>
-                            <a:srgbClr val="E8EDF2"/>
-                          </a:solidFill>
-                          <a:latin typeface="Segoe UI"/>
-                        </a:rPr>
-                        <a:t>Per-push cost (36,851 events)</a:t>
-                      </a:r>
-                    </a:p>
-                  </a:txBody>
-                  <a:tcPr marL="137160" marR="137160" marT="45720" marB="45720">
-                    <a:solidFill>
-                      <a:srgbClr val="1A222C"/>
-                    </a:solidFill>
-                  </a:tcPr>
-                </a:tc>
-                <a:tc>
-                  <a:txBody>
-                    <a:bodyPr/>
-                    <a:lstStyle/>
-                    <a:p>
-                      <a:pPr algn="r"/>
-                      <a:r>
-                        <a:rPr sz="1600" b="0">
-                          <a:solidFill>
-                            <a:srgbClr val="E8EDF2"/>
-                          </a:solidFill>
-                          <a:latin typeface="Segoe UI"/>
-                        </a:rPr>
-                        <a:t>21.5 us/event  (0.79 s total)</a:t>
-                      </a:r>
-                    </a:p>
-                  </a:txBody>
-                  <a:tcPr marL="137160" marR="137160" marT="45720" marB="45720">
-                    <a:solidFill>
-                      <a:srgbClr val="1A222C"/>
-                    </a:solidFill>
-                  </a:tcPr>
-                </a:tc>
-              </a:tr>
-              <a:tr h="731520">
-                <a:tc>
-                  <a:txBody>
-                    <a:bodyPr/>
-                    <a:lstStyle/>
-                    <a:p>
-                      <a:pPr algn="l"/>
-                      <a:r>
-                        <a:rPr sz="1600" b="0">
-                          <a:solidFill>
-                            <a:srgbClr val="E8EDF2"/>
-                          </a:solidFill>
-                          <a:latin typeface="Segoe UI"/>
-                        </a:rPr>
-                        <a:t>Finalize (drain + flush)</a:t>
-                      </a:r>
-                    </a:p>
-                  </a:txBody>
-                  <a:tcPr marL="137160" marR="137160" marT="45720" marB="45720">
-                    <a:solidFill>
-                      <a:srgbClr val="1A222C"/>
-                    </a:solidFill>
-                  </a:tcPr>
-                </a:tc>
-                <a:tc>
-                  <a:txBody>
-                    <a:bodyPr/>
-                    <a:lstStyle/>
-                    <a:p>
-                      <a:pPr algn="r"/>
-                      <a:r>
-                        <a:rPr sz="1600" b="0">
-                          <a:solidFill>
-                            <a:srgbClr val="E8EDF2"/>
-                          </a:solidFill>
-                          <a:latin typeface="Segoe UI"/>
-                        </a:rPr>
-                        <a:t>0.0001 s</a:t>
-                      </a:r>
-                    </a:p>
-                  </a:txBody>
-                  <a:tcPr marL="137160" marR="137160" marT="45720" marB="45720">
-                    <a:solidFill>
-                      <a:srgbClr val="1A222C"/>
-                    </a:solidFill>
-                  </a:tcPr>
-                </a:tc>
-              </a:tr>
-              <a:tr h="731520">
-                <a:tc>
-                  <a:txBody>
-                    <a:bodyPr/>
-                    <a:lstStyle/>
-                    <a:p>
-                      <a:pPr algn="l"/>
-                      <a:r>
-                        <a:rPr sz="1600" b="1">
-                          <a:solidFill>
-                            <a:srgbClr val="FFFFFF"/>
-                          </a:solidFill>
-                          <a:latin typeface="Segoe UI"/>
-                        </a:rPr>
-                        <a:t>Total streaming overhead (self-timed)</a:t>
-                      </a:r>
-                    </a:p>
-                  </a:txBody>
-                  <a:tcPr marL="137160" marR="137160" marT="45720" marB="45720">
-                    <a:solidFill>
-                      <a:srgbClr val="12202B"/>
-                    </a:solidFill>
-                  </a:tcPr>
-                </a:tc>
-                <a:tc>
-                  <a:txBody>
-                    <a:bodyPr/>
-                    <a:lstStyle/>
-                    <a:p>
-                      <a:pPr algn="r"/>
-                      <a:r>
-                        <a:rPr sz="1600" b="1">
-                          <a:solidFill>
-                            <a:srgbClr val="FFFFFF"/>
-                          </a:solidFill>
-                          <a:latin typeface="Segoe UI"/>
-                        </a:rPr>
-                        <a:t>1.10 s  =  0.20 % of run</a:t>
-                      </a:r>
-                    </a:p>
-                  </a:txBody>
-                  <a:tcPr marL="137160" marR="137160" marT="45720" marB="45720">
-                    <a:solidFill>
-                      <a:srgbClr val="12202B"/>
-                    </a:solidFill>
-                  </a:tcPr>
-                </a:tc>
-              </a:tr>
-              <a:tr h="731520">
-                <a:tc>
-                  <a:txBody>
-                    <a:bodyPr/>
-                    <a:lstStyle/>
-                    <a:p>
-                      <a:pPr algn="l"/>
-                      <a:r>
-                        <a:rPr sz="1600" b="0">
-                          <a:solidFill>
-                            <a:srgbClr val="E8EDF2"/>
-                          </a:solidFill>
-                          <a:latin typeface="Segoe UI"/>
-                        </a:rPr>
-                        <a:t>Wall time (baseline -&gt; streaming)</a:t>
-                      </a:r>
-                    </a:p>
-                  </a:txBody>
-                  <a:tcPr marL="137160" marR="137160" marT="45720" marB="45720">
-                    <a:solidFill>
-                      <a:srgbClr val="1A222C"/>
-                    </a:solidFill>
-                  </a:tcPr>
-                </a:tc>
-                <a:tc>
-                  <a:txBody>
-                    <a:bodyPr/>
-                    <a:lstStyle/>
-                    <a:p>
-                      <a:pPr algn="r"/>
-                      <a:r>
-                        <a:rPr sz="1600" b="0">
-                          <a:solidFill>
-                            <a:srgbClr val="E8EDF2"/>
-                          </a:solidFill>
-                          <a:latin typeface="Segoe UI"/>
-                        </a:rPr>
-                        <a:t>558.4 -&gt; 556.8 s</a:t>
-                      </a:r>
-                    </a:p>
-                  </a:txBody>
-                  <a:tcPr marL="137160" marR="137160" marT="45720" marB="45720">
+                        <a:rPr sz="1400" b="0">
+                          <a:solidFill>
+                            <a:srgbClr val="4FC3F7"/>
+                          </a:solidFill>
+                          <a:latin typeface="Segoe UI"/>
+                        </a:rPr>
+                        <a:t>streaming r3</a:t>
+                      </a:r>
+                    </a:p>
+                  </a:txBody>
+                  <a:tcPr marL="45720" marR="45720" marT="27432" marB="27432">
+                    <a:solidFill>
+                      <a:srgbClr val="1A222C"/>
+                    </a:solidFill>
+                  </a:tcPr>
+                </a:tc>
+                <a:tc>
+                  <a:txBody>
+                    <a:bodyPr/>
+                    <a:lstStyle/>
+                    <a:p>
+                      <a:pPr algn="ctr"/>
+                      <a:r>
+                        <a:rPr sz="1400" b="0">
+                          <a:solidFill>
+                            <a:srgbClr val="E8EDF2"/>
+                          </a:solidFill>
+                          <a:latin typeface="Segoe UI"/>
+                        </a:rPr>
+                        <a:t>36,851</a:t>
+                      </a:r>
+                    </a:p>
+                  </a:txBody>
+                  <a:tcPr marL="45720" marR="45720" marT="27432" marB="27432">
+                    <a:solidFill>
+                      <a:srgbClr val="1A222C"/>
+                    </a:solidFill>
+                  </a:tcPr>
+                </a:tc>
+                <a:tc>
+                  <a:txBody>
+                    <a:bodyPr/>
+                    <a:lstStyle/>
+                    <a:p>
+                      <a:pPr algn="ctr"/>
+                      <a:r>
+                        <a:rPr sz="1400" b="0">
+                          <a:solidFill>
+                            <a:srgbClr val="E8EDF2"/>
+                          </a:solidFill>
+                          <a:latin typeface="Segoe UI"/>
+                        </a:rPr>
+                        <a:t>2.21</a:t>
+                      </a:r>
+                    </a:p>
+                  </a:txBody>
+                  <a:tcPr marL="45720" marR="45720" marT="27432" marB="27432">
+                    <a:solidFill>
+                      <a:srgbClr val="1A222C"/>
+                    </a:solidFill>
+                  </a:tcPr>
+                </a:tc>
+                <a:tc>
+                  <a:txBody>
+                    <a:bodyPr/>
+                    <a:lstStyle/>
+                    <a:p>
+                      <a:pPr algn="ctr"/>
+                      <a:r>
+                        <a:rPr sz="1400" b="0">
+                          <a:solidFill>
+                            <a:srgbClr val="E8EDF2"/>
+                          </a:solidFill>
+                          <a:latin typeface="Segoe UI"/>
+                        </a:rPr>
+                        <a:t>19.49</a:t>
+                      </a:r>
+                    </a:p>
+                  </a:txBody>
+                  <a:tcPr marL="45720" marR="45720" marT="27432" marB="27432">
+                    <a:solidFill>
+                      <a:srgbClr val="1A222C"/>
+                    </a:solidFill>
+                  </a:tcPr>
+                </a:tc>
+                <a:tc>
+                  <a:txBody>
+                    <a:bodyPr/>
+                    <a:lstStyle/>
+                    <a:p>
+                      <a:pPr algn="ctr"/>
+                      <a:r>
+                        <a:rPr sz="1400" b="0">
+                          <a:solidFill>
+                            <a:srgbClr val="E8EDF2"/>
+                          </a:solidFill>
+                          <a:latin typeface="Segoe UI"/>
+                        </a:rPr>
+                        <a:t>0.165</a:t>
+                      </a:r>
+                    </a:p>
+                  </a:txBody>
+                  <a:tcPr marL="45720" marR="45720" marT="27432" marB="27432">
+                    <a:solidFill>
+                      <a:srgbClr val="1A222C"/>
+                    </a:solidFill>
+                  </a:tcPr>
+                </a:tc>
+                <a:tc>
+                  <a:txBody>
+                    <a:bodyPr/>
+                    <a:lstStyle/>
+                    <a:p>
+                      <a:pPr algn="ctr"/>
+                      <a:r>
+                        <a:rPr sz="1400" b="0">
+                          <a:solidFill>
+                            <a:srgbClr val="E8EDF2"/>
+                          </a:solidFill>
+                          <a:latin typeface="Segoe UI"/>
+                        </a:rPr>
+                        <a:t>0.0001</a:t>
+                      </a:r>
+                    </a:p>
+                  </a:txBody>
+                  <a:tcPr marL="45720" marR="45720" marT="27432" marB="27432">
+                    <a:solidFill>
+                      <a:srgbClr val="1A222C"/>
+                    </a:solidFill>
+                  </a:tcPr>
+                </a:tc>
+                <a:tc>
+                  <a:txBody>
+                    <a:bodyPr/>
+                    <a:lstStyle/>
+                    <a:p>
+                      <a:pPr algn="ctr"/>
+                      <a:r>
+                        <a:rPr sz="1400" b="0">
+                          <a:solidFill>
+                            <a:srgbClr val="E8EDF2"/>
+                          </a:solidFill>
+                          <a:latin typeface="Segoe UI"/>
+                        </a:rPr>
+                        <a:t>556.3</a:t>
+                      </a:r>
+                    </a:p>
+                  </a:txBody>
+                  <a:tcPr marL="45720" marR="45720" marT="27432" marB="27432">
+                    <a:solidFill>
+                      <a:srgbClr val="1A222C"/>
+                    </a:solidFill>
+                  </a:tcPr>
+                </a:tc>
+                <a:tc>
+                  <a:txBody>
+                    <a:bodyPr/>
+                    <a:lstStyle/>
+                    <a:p>
+                      <a:pPr algn="ctr"/>
+                      <a:r>
+                        <a:rPr sz="1400" b="0">
+                          <a:solidFill>
+                            <a:srgbClr val="E8EDF2"/>
+                          </a:solidFill>
+                          <a:latin typeface="Segoe UI"/>
+                        </a:rPr>
+                        <a:t>-2.1</a:t>
+                      </a:r>
+                    </a:p>
+                  </a:txBody>
+                  <a:tcPr marL="45720" marR="45720" marT="27432" marB="27432">
                     <a:solidFill>
                       <a:srgbClr val="1A222C"/>
                     </a:solidFill>
@@ -4034,8 +5330,8 @@
         </p:nvSpPr>
         <p:spPr>
           <a:xfrm>
-            <a:off x="731520" y="6309360"/>
-            <a:ext cx="10698480" cy="457200"/>
+            <a:off x="457200" y="6126480"/>
+            <a:ext cx="11247120" cy="548640"/>
           </a:xfrm>
           <a:prstGeom prst="rect">
             <a:avLst/>
@@ -4056,7 +5352,7 @@
                 </a:solidFill>
                 <a:latin typeface="Segoe UI"/>
               </a:rPr>
-              <a:t>Self-timed overhead = Init + Push + Send + Finalize, measured inside the process. Per-push runs off the app critical path (drain thread); app pays only a ~2 us enqueue.</a:t>
+              <a:t>send = app-critical-path enqueue (total s). push/init/finalize = drain-thread + one-time connector cost (total s). Baseline has no connector (-). overhead in seconds vs baseline.</a:t>
             </a:r>
           </a:p>
         </p:txBody>
@@ -4095,8 +5391,8 @@
         </p:nvSpPr>
         <p:spPr>
           <a:xfrm>
-            <a:off x="731520" y="365760"/>
-            <a:ext cx="10881360" cy="822960"/>
+            <a:off x="457200" y="365760"/>
+            <a:ext cx="11247120" cy="822960"/>
           </a:xfrm>
           <a:prstGeom prst="rect">
             <a:avLst/>
@@ -4111,13 +5407,13 @@
           <a:p>
             <a:pPr algn="l"/>
             <a:r>
-              <a:rPr sz="2600" b="1">
+              <a:rPr sz="2400" b="1">
                 <a:solidFill>
                   <a:srgbClr val="4FC3F7"/>
                 </a:solidFill>
                 <a:latin typeface="Segoe UI"/>
               </a:rPr>
-              <a:t>python-ml (real ML: dataset + train epochs + checkpoint)  -  CXI, 1 rank/node</a:t>
+              <a:t>python-ml (real ML: dataset + train + checkpoint)  -  CXI, 1 rank/node, Adaptive</a:t>
             </a:r>
           </a:p>
         </p:txBody>
@@ -4130,8 +5426,8 @@
         </p:nvSpPr>
         <p:spPr>
           <a:xfrm>
-            <a:off x="731520" y="1188720"/>
-            <a:ext cx="10881360" cy="640080"/>
+            <a:off x="457200" y="1143000"/>
+            <a:ext cx="11247120" cy="640080"/>
           </a:xfrm>
           <a:prstGeom prst="rect">
             <a:avLst/>
@@ -4146,13 +5442,13 @@
           <a:p>
             <a:pPr algn="l"/>
             <a:r>
-              <a:rPr sz="1400" b="0">
+              <a:rPr sz="1300" b="0">
                 <a:solidFill>
                   <a:srgbClr val="93A1AF"/>
                 </a:solidFill>
                 <a:latin typeface="Segoe UI"/>
               </a:rPr>
-              <a:t>NumPy/PyTorch, compute-bound. 154,538 events. 3 reps. Fidelity EXACT.</a:t>
+              <a:t>NumPy/PyTorch, compute-bound. Fidelity EXACT. walltime = WORK region.</a:t>
             </a:r>
           </a:p>
         </p:txBody>
@@ -4166,8 +5462,8 @@
           <p:nvPr/>
         </p:nvGraphicFramePr>
         <p:xfrm>
-          <a:off x="731520" y="2103120"/>
-          <a:ext cx="10698480" cy="4389120"/>
+          <a:off x="365760" y="2011680"/>
+          <a:ext cx="11429999" cy="3200400"/>
         </p:xfrm>
         <a:graphic>
           <a:graphicData uri="http://schemas.openxmlformats.org/drawingml/2006/table">
@@ -4176,10 +5472,202 @@
                 <a:tableStyleId>{5C22544A-7EE6-4342-B048-85BDC9FD1C3A}</a:tableStyleId>
               </a:tblPr>
               <a:tblGrid>
-                <a:gridCol w="6035040"/>
-                <a:gridCol w="4663440"/>
+                <a:gridCol w="1920240"/>
+                <a:gridCol w="1358537"/>
+                <a:gridCol w="1358537"/>
+                <a:gridCol w="1358537"/>
+                <a:gridCol w="1358537"/>
+                <a:gridCol w="1358537"/>
+                <a:gridCol w="1358537"/>
+                <a:gridCol w="1358537"/>
               </a:tblGrid>
-              <a:tr h="731520">
+              <a:tr h="640080">
+                <a:tc>
+                  <a:txBody>
+                    <a:bodyPr/>
+                    <a:lstStyle/>
+                    <a:p>
+                      <a:pPr algn="ctr"/>
+                      <a:r>
+                        <a:rPr sz="1300" b="1">
+                          <a:solidFill>
+                            <a:srgbClr val="4FC3F7"/>
+                          </a:solidFill>
+                          <a:latin typeface="Segoe UI"/>
+                        </a:rPr>
+                        <a:t>arm</a:t>
+                      </a:r>
+                    </a:p>
+                  </a:txBody>
+                  <a:tcPr marL="45720" marR="45720" marT="27432" marB="27432">
+                    <a:solidFill>
+                      <a:srgbClr val="141B23"/>
+                    </a:solidFill>
+                  </a:tcPr>
+                </a:tc>
+                <a:tc>
+                  <a:txBody>
+                    <a:bodyPr/>
+                    <a:lstStyle/>
+                    <a:p>
+                      <a:pPr algn="ctr"/>
+                      <a:r>
+                        <a:rPr sz="1300" b="1">
+                          <a:solidFill>
+                            <a:srgbClr val="4FC3F7"/>
+                          </a:solidFill>
+                          <a:latin typeface="Segoe UI"/>
+                        </a:rPr>
+                        <a:t>events</a:t>
+                      </a:r>
+                    </a:p>
+                  </a:txBody>
+                  <a:tcPr marL="45720" marR="45720" marT="27432" marB="27432">
+                    <a:solidFill>
+                      <a:srgbClr val="141B23"/>
+                    </a:solidFill>
+                  </a:tcPr>
+                </a:tc>
+                <a:tc>
+                  <a:txBody>
+                    <a:bodyPr/>
+                    <a:lstStyle/>
+                    <a:p>
+                      <a:pPr algn="ctr"/>
+                      <a:r>
+                        <a:rPr sz="1300" b="1">
+                          <a:solidFill>
+                            <a:srgbClr val="4FC3F7"/>
+                          </a:solidFill>
+                          <a:latin typeface="Segoe UI"/>
+                        </a:rPr>
+                        <a:t>send avg (us)</a:t>
+                      </a:r>
+                    </a:p>
+                  </a:txBody>
+                  <a:tcPr marL="45720" marR="45720" marT="27432" marB="27432">
+                    <a:solidFill>
+                      <a:srgbClr val="141B23"/>
+                    </a:solidFill>
+                  </a:tcPr>
+                </a:tc>
+                <a:tc>
+                  <a:txBody>
+                    <a:bodyPr/>
+                    <a:lstStyle/>
+                    <a:p>
+                      <a:pPr algn="ctr"/>
+                      <a:r>
+                        <a:rPr sz="1300" b="1">
+                          <a:solidFill>
+                            <a:srgbClr val="4FC3F7"/>
+                          </a:solidFill>
+                          <a:latin typeface="Segoe UI"/>
+                        </a:rPr>
+                        <a:t>push avg (us)</a:t>
+                      </a:r>
+                    </a:p>
+                  </a:txBody>
+                  <a:tcPr marL="45720" marR="45720" marT="27432" marB="27432">
+                    <a:solidFill>
+                      <a:srgbClr val="141B23"/>
+                    </a:solidFill>
+                  </a:tcPr>
+                </a:tc>
+                <a:tc>
+                  <a:txBody>
+                    <a:bodyPr/>
+                    <a:lstStyle/>
+                    <a:p>
+                      <a:pPr algn="ctr"/>
+                      <a:r>
+                        <a:rPr sz="1300" b="1">
+                          <a:solidFill>
+                            <a:srgbClr val="4FC3F7"/>
+                          </a:solidFill>
+                          <a:latin typeface="Segoe UI"/>
+                        </a:rPr>
+                        <a:t>init (s)</a:t>
+                      </a:r>
+                    </a:p>
+                  </a:txBody>
+                  <a:tcPr marL="45720" marR="45720" marT="27432" marB="27432">
+                    <a:solidFill>
+                      <a:srgbClr val="141B23"/>
+                    </a:solidFill>
+                  </a:tcPr>
+                </a:tc>
+                <a:tc>
+                  <a:txBody>
+                    <a:bodyPr/>
+                    <a:lstStyle/>
+                    <a:p>
+                      <a:pPr algn="ctr"/>
+                      <a:r>
+                        <a:rPr sz="1300" b="1">
+                          <a:solidFill>
+                            <a:srgbClr val="4FC3F7"/>
+                          </a:solidFill>
+                          <a:latin typeface="Segoe UI"/>
+                        </a:rPr>
+                        <a:t>finalize (s)</a:t>
+                      </a:r>
+                    </a:p>
+                  </a:txBody>
+                  <a:tcPr marL="45720" marR="45720" marT="27432" marB="27432">
+                    <a:solidFill>
+                      <a:srgbClr val="141B23"/>
+                    </a:solidFill>
+                  </a:tcPr>
+                </a:tc>
+                <a:tc>
+                  <a:txBody>
+                    <a:bodyPr/>
+                    <a:lstStyle/>
+                    <a:p>
+                      <a:pPr algn="ctr"/>
+                      <a:r>
+                        <a:rPr sz="1300" b="1">
+                          <a:solidFill>
+                            <a:srgbClr val="4FC3F7"/>
+                          </a:solidFill>
+                          <a:latin typeface="Segoe UI"/>
+                        </a:rPr>
+                        <a:t>walltime (s)</a:t>
+                      </a:r>
+                    </a:p>
+                  </a:txBody>
+                  <a:tcPr marL="45720" marR="45720" marT="27432" marB="27432">
+                    <a:solidFill>
+                      <a:srgbClr val="141B23"/>
+                    </a:solidFill>
+                  </a:tcPr>
+                </a:tc>
+                <a:tc>
+                  <a:txBody>
+                    <a:bodyPr/>
+                    <a:lstStyle/>
+                    <a:p>
+                      <a:pPr algn="ctr"/>
+                      <a:r>
+                        <a:rPr sz="1300" b="1">
+                          <a:solidFill>
+                            <a:srgbClr val="4FC3F7"/>
+                          </a:solidFill>
+                          <a:latin typeface="Segoe UI"/>
+                        </a:rPr>
+                        <a:t>overhead (s)</a:t>
+                      </a:r>
+                    </a:p>
+                  </a:txBody>
+                  <a:tcPr marL="45720" marR="45720" marT="27432" marB="27432">
+                    <a:solidFill>
+                      <a:srgbClr val="141B23"/>
+                    </a:solidFill>
+                  </a:tcPr>
+                </a:tc>
+              </a:tr>
+              <a:tr h="640080">
                 <a:tc>
                   <a:txBody>
                     <a:bodyPr/>
@@ -4187,47 +5675,371 @@
                     <a:p>
                       <a:pPr algn="l"/>
                       <a:r>
-                        <a:rPr sz="1600" b="1">
+                        <a:rPr sz="1400" b="1">
                           <a:solidFill>
                             <a:srgbClr val="4FC3F7"/>
                           </a:solidFill>
                           <a:latin typeface="Segoe UI"/>
                         </a:rPr>
-                        <a:t>Phase</a:t>
-                      </a:r>
-                    </a:p>
-                  </a:txBody>
-                  <a:tcPr marL="137160" marR="137160" marT="45720" marB="45720">
-                    <a:solidFill>
-                      <a:srgbClr val="141B23"/>
-                    </a:solidFill>
-                  </a:tcPr>
-                </a:tc>
-                <a:tc>
-                  <a:txBody>
-                    <a:bodyPr/>
-                    <a:lstStyle/>
-                    <a:p>
-                      <a:pPr algn="r"/>
-                      <a:r>
-                        <a:rPr sz="1600" b="1">
+                        <a:t>baseline</a:t>
+                      </a:r>
+                    </a:p>
+                  </a:txBody>
+                  <a:tcPr marL="45720" marR="45720" marT="27432" marB="27432">
+                    <a:solidFill>
+                      <a:srgbClr val="12202B"/>
+                    </a:solidFill>
+                  </a:tcPr>
+                </a:tc>
+                <a:tc>
+                  <a:txBody>
+                    <a:bodyPr/>
+                    <a:lstStyle/>
+                    <a:p>
+                      <a:pPr algn="ctr"/>
+                      <a:r>
+                        <a:rPr sz="1400" b="1">
+                          <a:solidFill>
+                            <a:srgbClr val="FFFFFF"/>
+                          </a:solidFill>
+                          <a:latin typeface="Segoe UI"/>
+                        </a:rPr>
+                        <a:t>-</a:t>
+                      </a:r>
+                    </a:p>
+                  </a:txBody>
+                  <a:tcPr marL="45720" marR="45720" marT="27432" marB="27432">
+                    <a:solidFill>
+                      <a:srgbClr val="12202B"/>
+                    </a:solidFill>
+                  </a:tcPr>
+                </a:tc>
+                <a:tc>
+                  <a:txBody>
+                    <a:bodyPr/>
+                    <a:lstStyle/>
+                    <a:p>
+                      <a:pPr algn="ctr"/>
+                      <a:r>
+                        <a:rPr sz="1400" b="1">
+                          <a:solidFill>
+                            <a:srgbClr val="FFFFFF"/>
+                          </a:solidFill>
+                          <a:latin typeface="Segoe UI"/>
+                        </a:rPr>
+                        <a:t>-</a:t>
+                      </a:r>
+                    </a:p>
+                  </a:txBody>
+                  <a:tcPr marL="45720" marR="45720" marT="27432" marB="27432">
+                    <a:solidFill>
+                      <a:srgbClr val="12202B"/>
+                    </a:solidFill>
+                  </a:tcPr>
+                </a:tc>
+                <a:tc>
+                  <a:txBody>
+                    <a:bodyPr/>
+                    <a:lstStyle/>
+                    <a:p>
+                      <a:pPr algn="ctr"/>
+                      <a:r>
+                        <a:rPr sz="1400" b="1">
+                          <a:solidFill>
+                            <a:srgbClr val="FFFFFF"/>
+                          </a:solidFill>
+                          <a:latin typeface="Segoe UI"/>
+                        </a:rPr>
+                        <a:t>-</a:t>
+                      </a:r>
+                    </a:p>
+                  </a:txBody>
+                  <a:tcPr marL="45720" marR="45720" marT="27432" marB="27432">
+                    <a:solidFill>
+                      <a:srgbClr val="12202B"/>
+                    </a:solidFill>
+                  </a:tcPr>
+                </a:tc>
+                <a:tc>
+                  <a:txBody>
+                    <a:bodyPr/>
+                    <a:lstStyle/>
+                    <a:p>
+                      <a:pPr algn="ctr"/>
+                      <a:r>
+                        <a:rPr sz="1400" b="1">
+                          <a:solidFill>
+                            <a:srgbClr val="FFFFFF"/>
+                          </a:solidFill>
+                          <a:latin typeface="Segoe UI"/>
+                        </a:rPr>
+                        <a:t>-</a:t>
+                      </a:r>
+                    </a:p>
+                  </a:txBody>
+                  <a:tcPr marL="45720" marR="45720" marT="27432" marB="27432">
+                    <a:solidFill>
+                      <a:srgbClr val="12202B"/>
+                    </a:solidFill>
+                  </a:tcPr>
+                </a:tc>
+                <a:tc>
+                  <a:txBody>
+                    <a:bodyPr/>
+                    <a:lstStyle/>
+                    <a:p>
+                      <a:pPr algn="ctr"/>
+                      <a:r>
+                        <a:rPr sz="1400" b="1">
+                          <a:solidFill>
+                            <a:srgbClr val="FFFFFF"/>
+                          </a:solidFill>
+                          <a:latin typeface="Segoe UI"/>
+                        </a:rPr>
+                        <a:t>-</a:t>
+                      </a:r>
+                    </a:p>
+                  </a:txBody>
+                  <a:tcPr marL="45720" marR="45720" marT="27432" marB="27432">
+                    <a:solidFill>
+                      <a:srgbClr val="12202B"/>
+                    </a:solidFill>
+                  </a:tcPr>
+                </a:tc>
+                <a:tc>
+                  <a:txBody>
+                    <a:bodyPr/>
+                    <a:lstStyle/>
+                    <a:p>
+                      <a:pPr algn="ctr"/>
+                      <a:r>
+                        <a:rPr sz="1400" b="1">
+                          <a:solidFill>
+                            <a:srgbClr val="FFFFFF"/>
+                          </a:solidFill>
+                          <a:latin typeface="Segoe UI"/>
+                        </a:rPr>
+                        <a:t>211.3</a:t>
+                      </a:r>
+                    </a:p>
+                  </a:txBody>
+                  <a:tcPr marL="45720" marR="45720" marT="27432" marB="27432">
+                    <a:solidFill>
+                      <a:srgbClr val="12202B"/>
+                    </a:solidFill>
+                  </a:tcPr>
+                </a:tc>
+                <a:tc>
+                  <a:txBody>
+                    <a:bodyPr/>
+                    <a:lstStyle/>
+                    <a:p>
+                      <a:pPr algn="ctr"/>
+                      <a:r>
+                        <a:rPr sz="1400" b="1">
+                          <a:solidFill>
+                            <a:srgbClr val="FFFFFF"/>
+                          </a:solidFill>
+                          <a:latin typeface="Segoe UI"/>
+                        </a:rPr>
+                        <a:t>0.0</a:t>
+                      </a:r>
+                    </a:p>
+                  </a:txBody>
+                  <a:tcPr marL="45720" marR="45720" marT="27432" marB="27432">
+                    <a:solidFill>
+                      <a:srgbClr val="12202B"/>
+                    </a:solidFill>
+                  </a:tcPr>
+                </a:tc>
+              </a:tr>
+              <a:tr h="640080">
+                <a:tc>
+                  <a:txBody>
+                    <a:bodyPr/>
+                    <a:lstStyle/>
+                    <a:p>
+                      <a:pPr algn="l"/>
+                      <a:r>
+                        <a:rPr sz="1400" b="0">
                           <a:solidFill>
                             <a:srgbClr val="4FC3F7"/>
                           </a:solidFill>
                           <a:latin typeface="Segoe UI"/>
                         </a:rPr>
-                        <a:t>Cost</a:t>
-                      </a:r>
-                    </a:p>
-                  </a:txBody>
-                  <a:tcPr marL="137160" marR="137160" marT="45720" marB="45720">
-                    <a:solidFill>
-                      <a:srgbClr val="141B23"/>
+                        <a:t>streaming r1</a:t>
+                      </a:r>
+                    </a:p>
+                  </a:txBody>
+                  <a:tcPr marL="45720" marR="45720" marT="27432" marB="27432">
+                    <a:solidFill>
+                      <a:srgbClr val="1A222C"/>
+                    </a:solidFill>
+                  </a:tcPr>
+                </a:tc>
+                <a:tc>
+                  <a:txBody>
+                    <a:bodyPr/>
+                    <a:lstStyle/>
+                    <a:p>
+                      <a:pPr algn="ctr"/>
+                      <a:r>
+                        <a:rPr sz="1400" b="0">
+                          <a:solidFill>
+                            <a:srgbClr val="E8EDF2"/>
+                          </a:solidFill>
+                          <a:latin typeface="Segoe UI"/>
+                        </a:rPr>
+                        <a:t>154,538</a:t>
+                      </a:r>
+                    </a:p>
+                  </a:txBody>
+                  <a:tcPr marL="45720" marR="45720" marT="27432" marB="27432">
+                    <a:solidFill>
+                      <a:srgbClr val="1A222C"/>
+                    </a:solidFill>
+                  </a:tcPr>
+                </a:tc>
+                <a:tc>
+                  <a:txBody>
+                    <a:bodyPr/>
+                    <a:lstStyle/>
+                    <a:p>
+                      <a:pPr algn="ctr"/>
+                      <a:r>
+                        <a:rPr sz="1400" b="0">
+                          <a:solidFill>
+                            <a:srgbClr val="E8EDF2"/>
+                          </a:solidFill>
+                          <a:latin typeface="Segoe UI"/>
+                        </a:rPr>
+                        <a:t>0.73</a:t>
+                      </a:r>
+                    </a:p>
+                  </a:txBody>
+                  <a:tcPr marL="45720" marR="45720" marT="27432" marB="27432">
+                    <a:solidFill>
+                      <a:srgbClr val="1A222C"/>
+                    </a:solidFill>
+                  </a:tcPr>
+                </a:tc>
+                <a:tc>
+                  <a:txBody>
+                    <a:bodyPr/>
+                    <a:lstStyle/>
+                    <a:p>
+                      <a:pPr algn="ctr"/>
+                      <a:r>
+                        <a:rPr sz="1400" b="0">
+                          <a:solidFill>
+                            <a:srgbClr val="E8EDF2"/>
+                          </a:solidFill>
+                          <a:latin typeface="Segoe UI"/>
+                        </a:rPr>
+                        <a:t>46.10</a:t>
+                      </a:r>
+                    </a:p>
+                  </a:txBody>
+                  <a:tcPr marL="45720" marR="45720" marT="27432" marB="27432">
+                    <a:solidFill>
+                      <a:srgbClr val="1A222C"/>
+                    </a:solidFill>
+                  </a:tcPr>
+                </a:tc>
+                <a:tc>
+                  <a:txBody>
+                    <a:bodyPr/>
+                    <a:lstStyle/>
+                    <a:p>
+                      <a:pPr algn="ctr"/>
+                      <a:r>
+                        <a:rPr sz="1400" b="0">
+                          <a:solidFill>
+                            <a:srgbClr val="E8EDF2"/>
+                          </a:solidFill>
+                          <a:latin typeface="Segoe UI"/>
+                        </a:rPr>
+                        <a:t>0.542</a:t>
+                      </a:r>
+                    </a:p>
+                  </a:txBody>
+                  <a:tcPr marL="45720" marR="45720" marT="27432" marB="27432">
+                    <a:solidFill>
+                      <a:srgbClr val="1A222C"/>
+                    </a:solidFill>
+                  </a:tcPr>
+                </a:tc>
+                <a:tc>
+                  <a:txBody>
+                    <a:bodyPr/>
+                    <a:lstStyle/>
+                    <a:p>
+                      <a:pPr algn="ctr"/>
+                      <a:r>
+                        <a:rPr sz="1400" b="0">
+                          <a:solidFill>
+                            <a:srgbClr val="E8EDF2"/>
+                          </a:solidFill>
+                          <a:latin typeface="Segoe UI"/>
+                        </a:rPr>
+                        <a:t>0.0001</a:t>
+                      </a:r>
+                    </a:p>
+                  </a:txBody>
+                  <a:tcPr marL="45720" marR="45720" marT="27432" marB="27432">
+                    <a:solidFill>
+                      <a:srgbClr val="1A222C"/>
+                    </a:solidFill>
+                  </a:tcPr>
+                </a:tc>
+                <a:tc>
+                  <a:txBody>
+                    <a:bodyPr/>
+                    <a:lstStyle/>
+                    <a:p>
+                      <a:pPr algn="ctr"/>
+                      <a:r>
+                        <a:rPr sz="1400" b="0">
+                          <a:solidFill>
+                            <a:srgbClr val="E8EDF2"/>
+                          </a:solidFill>
+                          <a:latin typeface="Segoe UI"/>
+                        </a:rPr>
+                        <a:t>351.6</a:t>
+                      </a:r>
+                    </a:p>
+                  </a:txBody>
+                  <a:tcPr marL="45720" marR="45720" marT="27432" marB="27432">
+                    <a:solidFill>
+                      <a:srgbClr val="1A222C"/>
+                    </a:solidFill>
+                  </a:tcPr>
+                </a:tc>
+                <a:tc>
+                  <a:txBody>
+                    <a:bodyPr/>
+                    <a:lstStyle/>
+                    <a:p>
+                      <a:pPr algn="ctr"/>
+                      <a:r>
+                        <a:rPr sz="1400" b="0">
+                          <a:solidFill>
+                            <a:srgbClr val="E8EDF2"/>
+                          </a:solidFill>
+                          <a:latin typeface="Segoe UI"/>
+                        </a:rPr>
+                        <a:t>+140.3</a:t>
+                      </a:r>
+                    </a:p>
+                  </a:txBody>
+                  <a:tcPr marL="45720" marR="45720" marT="27432" marB="27432">
+                    <a:solidFill>
+                      <a:srgbClr val="1A222C"/>
                     </a:solidFill>
                   </a:tcPr>
                 </a:tc>
               </a:tr>
-              <a:tr h="731520">
+              <a:tr h="640080">
                 <a:tc>
                   <a:txBody>
                     <a:bodyPr/>
@@ -4235,47 +6047,185 @@
                     <a:p>
                       <a:pPr algn="l"/>
                       <a:r>
-                        <a:rPr sz="1600" b="0">
-                          <a:solidFill>
-                            <a:srgbClr val="E8EDF2"/>
-                          </a:solidFill>
-                          <a:latin typeface="Segoe UI"/>
-                        </a:rPr>
-                        <a:t>Init (one-time)</a:t>
-                      </a:r>
-                    </a:p>
-                  </a:txBody>
-                  <a:tcPr marL="137160" marR="137160" marT="45720" marB="45720">
-                    <a:solidFill>
-                      <a:srgbClr val="1A222C"/>
-                    </a:solidFill>
-                  </a:tcPr>
-                </a:tc>
-                <a:tc>
-                  <a:txBody>
-                    <a:bodyPr/>
-                    <a:lstStyle/>
-                    <a:p>
-                      <a:pPr algn="r"/>
-                      <a:r>
-                        <a:rPr sz="1600" b="0">
-                          <a:solidFill>
-                            <a:srgbClr val="E8EDF2"/>
-                          </a:solidFill>
-                          <a:latin typeface="Segoe UI"/>
-                        </a:rPr>
-                        <a:t>0.18 s</a:t>
-                      </a:r>
-                    </a:p>
-                  </a:txBody>
-                  <a:tcPr marL="137160" marR="137160" marT="45720" marB="45720">
+                        <a:rPr sz="1400" b="0">
+                          <a:solidFill>
+                            <a:srgbClr val="4FC3F7"/>
+                          </a:solidFill>
+                          <a:latin typeface="Segoe UI"/>
+                        </a:rPr>
+                        <a:t>streaming r2</a:t>
+                      </a:r>
+                    </a:p>
+                  </a:txBody>
+                  <a:tcPr marL="45720" marR="45720" marT="27432" marB="27432">
+                    <a:solidFill>
+                      <a:srgbClr val="1A222C"/>
+                    </a:solidFill>
+                  </a:tcPr>
+                </a:tc>
+                <a:tc>
+                  <a:txBody>
+                    <a:bodyPr/>
+                    <a:lstStyle/>
+                    <a:p>
+                      <a:pPr algn="ctr"/>
+                      <a:r>
+                        <a:rPr sz="1400" b="0">
+                          <a:solidFill>
+                            <a:srgbClr val="E8EDF2"/>
+                          </a:solidFill>
+                          <a:latin typeface="Segoe UI"/>
+                        </a:rPr>
+                        <a:t>154,538</a:t>
+                      </a:r>
+                    </a:p>
+                  </a:txBody>
+                  <a:tcPr marL="45720" marR="45720" marT="27432" marB="27432">
+                    <a:solidFill>
+                      <a:srgbClr val="1A222C"/>
+                    </a:solidFill>
+                  </a:tcPr>
+                </a:tc>
+                <a:tc>
+                  <a:txBody>
+                    <a:bodyPr/>
+                    <a:lstStyle/>
+                    <a:p>
+                      <a:pPr algn="ctr"/>
+                      <a:r>
+                        <a:rPr sz="1400" b="0">
+                          <a:solidFill>
+                            <a:srgbClr val="E8EDF2"/>
+                          </a:solidFill>
+                          <a:latin typeface="Segoe UI"/>
+                        </a:rPr>
+                        <a:t>0.79</a:t>
+                      </a:r>
+                    </a:p>
+                  </a:txBody>
+                  <a:tcPr marL="45720" marR="45720" marT="27432" marB="27432">
+                    <a:solidFill>
+                      <a:srgbClr val="1A222C"/>
+                    </a:solidFill>
+                  </a:tcPr>
+                </a:tc>
+                <a:tc>
+                  <a:txBody>
+                    <a:bodyPr/>
+                    <a:lstStyle/>
+                    <a:p>
+                      <a:pPr algn="ctr"/>
+                      <a:r>
+                        <a:rPr sz="1400" b="0">
+                          <a:solidFill>
+                            <a:srgbClr val="E8EDF2"/>
+                          </a:solidFill>
+                          <a:latin typeface="Segoe UI"/>
+                        </a:rPr>
+                        <a:t>45.35</a:t>
+                      </a:r>
+                    </a:p>
+                  </a:txBody>
+                  <a:tcPr marL="45720" marR="45720" marT="27432" marB="27432">
+                    <a:solidFill>
+                      <a:srgbClr val="1A222C"/>
+                    </a:solidFill>
+                  </a:tcPr>
+                </a:tc>
+                <a:tc>
+                  <a:txBody>
+                    <a:bodyPr/>
+                    <a:lstStyle/>
+                    <a:p>
+                      <a:pPr algn="ctr"/>
+                      <a:r>
+                        <a:rPr sz="1400" b="0">
+                          <a:solidFill>
+                            <a:srgbClr val="E8EDF2"/>
+                          </a:solidFill>
+                          <a:latin typeface="Segoe UI"/>
+                        </a:rPr>
+                        <a:t>0.159</a:t>
+                      </a:r>
+                    </a:p>
+                  </a:txBody>
+                  <a:tcPr marL="45720" marR="45720" marT="27432" marB="27432">
+                    <a:solidFill>
+                      <a:srgbClr val="1A222C"/>
+                    </a:solidFill>
+                  </a:tcPr>
+                </a:tc>
+                <a:tc>
+                  <a:txBody>
+                    <a:bodyPr/>
+                    <a:lstStyle/>
+                    <a:p>
+                      <a:pPr algn="ctr"/>
+                      <a:r>
+                        <a:rPr sz="1400" b="0">
+                          <a:solidFill>
+                            <a:srgbClr val="E8EDF2"/>
+                          </a:solidFill>
+                          <a:latin typeface="Segoe UI"/>
+                        </a:rPr>
+                        <a:t>0.0002</a:t>
+                      </a:r>
+                    </a:p>
+                  </a:txBody>
+                  <a:tcPr marL="45720" marR="45720" marT="27432" marB="27432">
+                    <a:solidFill>
+                      <a:srgbClr val="1A222C"/>
+                    </a:solidFill>
+                  </a:tcPr>
+                </a:tc>
+                <a:tc>
+                  <a:txBody>
+                    <a:bodyPr/>
+                    <a:lstStyle/>
+                    <a:p>
+                      <a:pPr algn="ctr"/>
+                      <a:r>
+                        <a:rPr sz="1400" b="0">
+                          <a:solidFill>
+                            <a:srgbClr val="E8EDF2"/>
+                          </a:solidFill>
+                          <a:latin typeface="Segoe UI"/>
+                        </a:rPr>
+                        <a:t>348.5</a:t>
+                      </a:r>
+                    </a:p>
+                  </a:txBody>
+                  <a:tcPr marL="45720" marR="45720" marT="27432" marB="27432">
+                    <a:solidFill>
+                      <a:srgbClr val="1A222C"/>
+                    </a:solidFill>
+                  </a:tcPr>
+                </a:tc>
+                <a:tc>
+                  <a:txBody>
+                    <a:bodyPr/>
+                    <a:lstStyle/>
+                    <a:p>
+                      <a:pPr algn="ctr"/>
+                      <a:r>
+                        <a:rPr sz="1400" b="0">
+                          <a:solidFill>
+                            <a:srgbClr val="E8EDF2"/>
+                          </a:solidFill>
+                          <a:latin typeface="Segoe UI"/>
+                        </a:rPr>
+                        <a:t>+137.2</a:t>
+                      </a:r>
+                    </a:p>
+                  </a:txBody>
+                  <a:tcPr marL="45720" marR="45720" marT="27432" marB="27432">
                     <a:solidFill>
                       <a:srgbClr val="1A222C"/>
                     </a:solidFill>
                   </a:tcPr>
                 </a:tc>
               </a:tr>
-              <a:tr h="731520">
+              <a:tr h="640080">
                 <a:tc>
                   <a:txBody>
                     <a:bodyPr/>
@@ -4283,184 +6233,178 @@
                     <a:p>
                       <a:pPr algn="l"/>
                       <a:r>
-                        <a:rPr sz="1600" b="0">
-                          <a:solidFill>
-                            <a:srgbClr val="E8EDF2"/>
-                          </a:solidFill>
-                          <a:latin typeface="Segoe UI"/>
-                        </a:rPr>
-                        <a:t>Per-push cost (154,538 events)</a:t>
-                      </a:r>
-                    </a:p>
-                  </a:txBody>
-                  <a:tcPr marL="137160" marR="137160" marT="45720" marB="45720">
-                    <a:solidFill>
-                      <a:srgbClr val="1A222C"/>
-                    </a:solidFill>
-                  </a:tcPr>
-                </a:tc>
-                <a:tc>
-                  <a:txBody>
-                    <a:bodyPr/>
-                    <a:lstStyle/>
-                    <a:p>
-                      <a:pPr algn="r"/>
-                      <a:r>
-                        <a:rPr sz="1600" b="0">
-                          <a:solidFill>
-                            <a:srgbClr val="E8EDF2"/>
-                          </a:solidFill>
-                          <a:latin typeface="Segoe UI"/>
-                        </a:rPr>
-                        <a:t>45.3 us/event  (7.01 s total)</a:t>
-                      </a:r>
-                    </a:p>
-                  </a:txBody>
-                  <a:tcPr marL="137160" marR="137160" marT="45720" marB="45720">
-                    <a:solidFill>
-                      <a:srgbClr val="1A222C"/>
-                    </a:solidFill>
-                  </a:tcPr>
-                </a:tc>
-              </a:tr>
-              <a:tr h="731520">
-                <a:tc>
-                  <a:txBody>
-                    <a:bodyPr/>
-                    <a:lstStyle/>
-                    <a:p>
-                      <a:pPr algn="l"/>
-                      <a:r>
-                        <a:rPr sz="1600" b="0">
-                          <a:solidFill>
-                            <a:srgbClr val="E8EDF2"/>
-                          </a:solidFill>
-                          <a:latin typeface="Segoe UI"/>
-                        </a:rPr>
-                        <a:t>Finalize (drain + flush)</a:t>
-                      </a:r>
-                    </a:p>
-                  </a:txBody>
-                  <a:tcPr marL="137160" marR="137160" marT="45720" marB="45720">
-                    <a:solidFill>
-                      <a:srgbClr val="1A222C"/>
-                    </a:solidFill>
-                  </a:tcPr>
-                </a:tc>
-                <a:tc>
-                  <a:txBody>
-                    <a:bodyPr/>
-                    <a:lstStyle/>
-                    <a:p>
-                      <a:pPr algn="r"/>
-                      <a:r>
-                        <a:rPr sz="1600" b="0">
-                          <a:solidFill>
-                            <a:srgbClr val="E8EDF2"/>
-                          </a:solidFill>
-                          <a:latin typeface="Segoe UI"/>
-                        </a:rPr>
-                        <a:t>0.0002 s</a:t>
-                      </a:r>
-                    </a:p>
-                  </a:txBody>
-                  <a:tcPr marL="137160" marR="137160" marT="45720" marB="45720">
-                    <a:solidFill>
-                      <a:srgbClr val="1A222C"/>
-                    </a:solidFill>
-                  </a:tcPr>
-                </a:tc>
-              </a:tr>
-              <a:tr h="731520">
-                <a:tc>
-                  <a:txBody>
-                    <a:bodyPr/>
-                    <a:lstStyle/>
-                    <a:p>
-                      <a:pPr algn="l"/>
-                      <a:r>
-                        <a:rPr sz="1600" b="1">
-                          <a:solidFill>
-                            <a:srgbClr val="FFFFFF"/>
-                          </a:solidFill>
-                          <a:latin typeface="Segoe UI"/>
-                        </a:rPr>
-                        <a:t>Total streaming overhead (self-timed)</a:t>
-                      </a:r>
-                    </a:p>
-                  </a:txBody>
-                  <a:tcPr marL="137160" marR="137160" marT="45720" marB="45720">
-                    <a:solidFill>
-                      <a:srgbClr val="12202B"/>
-                    </a:solidFill>
-                  </a:tcPr>
-                </a:tc>
-                <a:tc>
-                  <a:txBody>
-                    <a:bodyPr/>
-                    <a:lstStyle/>
-                    <a:p>
-                      <a:pPr algn="r"/>
-                      <a:r>
-                        <a:rPr sz="1600" b="1">
-                          <a:solidFill>
-                            <a:srgbClr val="FFFFFF"/>
-                          </a:solidFill>
-                          <a:latin typeface="Segoe UI"/>
-                        </a:rPr>
-                        <a:t>7.29 s  =  2.1 % of run</a:t>
-                      </a:r>
-                    </a:p>
-                  </a:txBody>
-                  <a:tcPr marL="137160" marR="137160" marT="45720" marB="45720">
-                    <a:solidFill>
-                      <a:srgbClr val="12202B"/>
-                    </a:solidFill>
-                  </a:tcPr>
-                </a:tc>
-              </a:tr>
-              <a:tr h="731520">
-                <a:tc>
-                  <a:txBody>
-                    <a:bodyPr/>
-                    <a:lstStyle/>
-                    <a:p>
-                      <a:pPr algn="l"/>
-                      <a:r>
-                        <a:rPr sz="1600" b="0">
-                          <a:solidFill>
-                            <a:srgbClr val="E8EDF2"/>
-                          </a:solidFill>
-                          <a:latin typeface="Segoe UI"/>
-                        </a:rPr>
-                        <a:t>Wall time (baseline -&gt; streaming)</a:t>
-                      </a:r>
-                    </a:p>
-                  </a:txBody>
-                  <a:tcPr marL="137160" marR="137160" marT="45720" marB="45720">
-                    <a:solidFill>
-                      <a:srgbClr val="1A222C"/>
-                    </a:solidFill>
-                  </a:tcPr>
-                </a:tc>
-                <a:tc>
-                  <a:txBody>
-                    <a:bodyPr/>
-                    <a:lstStyle/>
-                    <a:p>
-                      <a:pPr algn="r"/>
-                      <a:r>
-                        <a:rPr sz="1600" b="0">
-                          <a:solidFill>
-                            <a:srgbClr val="E8EDF2"/>
-                          </a:solidFill>
-                          <a:latin typeface="Segoe UI"/>
-                        </a:rPr>
-                        <a:t>211.3 -&gt; 348.5 s</a:t>
-                      </a:r>
-                    </a:p>
-                  </a:txBody>
-                  <a:tcPr marL="137160" marR="137160" marT="45720" marB="45720">
+                        <a:rPr sz="1400" b="0">
+                          <a:solidFill>
+                            <a:srgbClr val="4FC3F7"/>
+                          </a:solidFill>
+                          <a:latin typeface="Segoe UI"/>
+                        </a:rPr>
+                        <a:t>streaming r3</a:t>
+                      </a:r>
+                    </a:p>
+                  </a:txBody>
+                  <a:tcPr marL="45720" marR="45720" marT="27432" marB="27432">
+                    <a:solidFill>
+                      <a:srgbClr val="1A222C"/>
+                    </a:solidFill>
+                  </a:tcPr>
+                </a:tc>
+                <a:tc>
+                  <a:txBody>
+                    <a:bodyPr/>
+                    <a:lstStyle/>
+                    <a:p>
+                      <a:pPr algn="ctr"/>
+                      <a:r>
+                        <a:rPr sz="1400" b="0">
+                          <a:solidFill>
+                            <a:srgbClr val="E8EDF2"/>
+                          </a:solidFill>
+                          <a:latin typeface="Segoe UI"/>
+                        </a:rPr>
+                        <a:t>154,538</a:t>
+                      </a:r>
+                    </a:p>
+                  </a:txBody>
+                  <a:tcPr marL="45720" marR="45720" marT="27432" marB="27432">
+                    <a:solidFill>
+                      <a:srgbClr val="1A222C"/>
+                    </a:solidFill>
+                  </a:tcPr>
+                </a:tc>
+                <a:tc>
+                  <a:txBody>
+                    <a:bodyPr/>
+                    <a:lstStyle/>
+                    <a:p>
+                      <a:pPr algn="ctr"/>
+                      <a:r>
+                        <a:rPr sz="1400" b="0">
+                          <a:solidFill>
+                            <a:srgbClr val="E8EDF2"/>
+                          </a:solidFill>
+                          <a:latin typeface="Segoe UI"/>
+                        </a:rPr>
+                        <a:t>0.77</a:t>
+                      </a:r>
+                    </a:p>
+                  </a:txBody>
+                  <a:tcPr marL="45720" marR="45720" marT="27432" marB="27432">
+                    <a:solidFill>
+                      <a:srgbClr val="1A222C"/>
+                    </a:solidFill>
+                  </a:tcPr>
+                </a:tc>
+                <a:tc>
+                  <a:txBody>
+                    <a:bodyPr/>
+                    <a:lstStyle/>
+                    <a:p>
+                      <a:pPr algn="ctr"/>
+                      <a:r>
+                        <a:rPr sz="1400" b="0">
+                          <a:solidFill>
+                            <a:srgbClr val="E8EDF2"/>
+                          </a:solidFill>
+                          <a:latin typeface="Segoe UI"/>
+                        </a:rPr>
+                        <a:t>41.60</a:t>
+                      </a:r>
+                    </a:p>
+                  </a:txBody>
+                  <a:tcPr marL="45720" marR="45720" marT="27432" marB="27432">
+                    <a:solidFill>
+                      <a:srgbClr val="1A222C"/>
+                    </a:solidFill>
+                  </a:tcPr>
+                </a:tc>
+                <a:tc>
+                  <a:txBody>
+                    <a:bodyPr/>
+                    <a:lstStyle/>
+                    <a:p>
+                      <a:pPr algn="ctr"/>
+                      <a:r>
+                        <a:rPr sz="1400" b="0">
+                          <a:solidFill>
+                            <a:srgbClr val="E8EDF2"/>
+                          </a:solidFill>
+                          <a:latin typeface="Segoe UI"/>
+                        </a:rPr>
+                        <a:t>0.182</a:t>
+                      </a:r>
+                    </a:p>
+                  </a:txBody>
+                  <a:tcPr marL="45720" marR="45720" marT="27432" marB="27432">
+                    <a:solidFill>
+                      <a:srgbClr val="1A222C"/>
+                    </a:solidFill>
+                  </a:tcPr>
+                </a:tc>
+                <a:tc>
+                  <a:txBody>
+                    <a:bodyPr/>
+                    <a:lstStyle/>
+                    <a:p>
+                      <a:pPr algn="ctr"/>
+                      <a:r>
+                        <a:rPr sz="1400" b="0">
+                          <a:solidFill>
+                            <a:srgbClr val="E8EDF2"/>
+                          </a:solidFill>
+                          <a:latin typeface="Segoe UI"/>
+                        </a:rPr>
+                        <a:t>0.0001</a:t>
+                      </a:r>
+                    </a:p>
+                  </a:txBody>
+                  <a:tcPr marL="45720" marR="45720" marT="27432" marB="27432">
+                    <a:solidFill>
+                      <a:srgbClr val="1A222C"/>
+                    </a:solidFill>
+                  </a:tcPr>
+                </a:tc>
+                <a:tc>
+                  <a:txBody>
+                    <a:bodyPr/>
+                    <a:lstStyle/>
+                    <a:p>
+                      <a:pPr algn="ctr"/>
+                      <a:r>
+                        <a:rPr sz="1400" b="0">
+                          <a:solidFill>
+                            <a:srgbClr val="E8EDF2"/>
+                          </a:solidFill>
+                          <a:latin typeface="Segoe UI"/>
+                        </a:rPr>
+                        <a:t>350.4</a:t>
+                      </a:r>
+                    </a:p>
+                  </a:txBody>
+                  <a:tcPr marL="45720" marR="45720" marT="27432" marB="27432">
+                    <a:solidFill>
+                      <a:srgbClr val="1A222C"/>
+                    </a:solidFill>
+                  </a:tcPr>
+                </a:tc>
+                <a:tc>
+                  <a:txBody>
+                    <a:bodyPr/>
+                    <a:lstStyle/>
+                    <a:p>
+                      <a:pPr algn="ctr"/>
+                      <a:r>
+                        <a:rPr sz="1400" b="0">
+                          <a:solidFill>
+                            <a:srgbClr val="E8EDF2"/>
+                          </a:solidFill>
+                          <a:latin typeface="Segoe UI"/>
+                        </a:rPr>
+                        <a:t>+139.1</a:t>
+                      </a:r>
+                    </a:p>
+                  </a:txBody>
+                  <a:tcPr marL="45720" marR="45720" marT="27432" marB="27432">
                     <a:solidFill>
                       <a:srgbClr val="1A222C"/>
                     </a:solidFill>
@@ -4479,8 +6423,8 @@
         </p:nvSpPr>
         <p:spPr>
           <a:xfrm>
-            <a:off x="731520" y="6309360"/>
-            <a:ext cx="10698480" cy="457200"/>
+            <a:off x="457200" y="6126480"/>
+            <a:ext cx="11247120" cy="548640"/>
           </a:xfrm>
           <a:prstGeom prst="rect">
             <a:avLst/>
@@ -4501,7 +6445,7 @@
                 </a:solidFill>
                 <a:latin typeface="Segoe UI"/>
               </a:rPr>
-              <a:t>Self-timed overhead = Init + Push + Send + Finalize, measured inside the process. Per-push runs off the app critical path (drain thread); app pays only a ~2 us enqueue.</a:t>
+              <a:t>send = app-critical-path enqueue (total s). push/init/finalize = drain-thread + one-time connector cost (total s). Baseline has no connector (-). overhead in seconds vs baseline.</a:t>
             </a:r>
           </a:p>
         </p:txBody>
@@ -4540,8 +6484,8 @@
         </p:nvSpPr>
         <p:spPr>
           <a:xfrm>
-            <a:off x="731520" y="365760"/>
-            <a:ext cx="10881360" cy="822960"/>
+            <a:off x="457200" y="365760"/>
+            <a:ext cx="11247120" cy="822960"/>
           </a:xfrm>
           <a:prstGeom prst="rect">
             <a:avLst/>
@@ -4556,13 +6500,13 @@
           <a:p>
             <a:pPr algn="l"/>
             <a:r>
-              <a:rPr sz="2600" b="1">
+              <a:rPr sz="2400" b="1">
                 <a:solidFill>
                   <a:srgbClr val="4FC3F7"/>
                 </a:solidFill>
                 <a:latin typeface="Segoe UI"/>
               </a:rPr>
-              <a:t>mpi (collective MPI-IO, shared file)  -  TCP, 32 ranks/node</a:t>
+              <a:t>mpi (collective MPI-IO, shared file)  -  TCP, 32 ranks/node, Adaptive</a:t>
             </a:r>
           </a:p>
         </p:txBody>
@@ -4575,8 +6519,8 @@
         </p:nvSpPr>
         <p:spPr>
           <a:xfrm>
-            <a:off x="731520" y="1188720"/>
-            <a:ext cx="10881360" cy="640080"/>
+            <a:off x="457200" y="1143000"/>
+            <a:ext cx="11247120" cy="640080"/>
           </a:xfrm>
           <a:prstGeom prst="rect">
             <a:avLst/>
@@ -4591,13 +6535,13 @@
           <a:p>
             <a:pPr algn="l"/>
             <a:r>
-              <a:rPr sz="1400" b="0">
+              <a:rPr sz="1300" b="0">
                 <a:solidFill>
                   <a:srgbClr val="93A1AF"/>
                 </a:solidFill>
                 <a:latin typeface="Segoe UI"/>
               </a:rPr>
-              <a:t>MPI unsupported over CXI. 26,566 events. 3 reps. Fidelity EXACT (32-&gt;1 aggregated).</a:t>
+              <a:t>MPI unsupported over CXI. Fidelity EXACT (32-&gt;1 aggregated). Workload is I/O-trivial (0.34 s); per-event cost is the metric, wall n/a.</a:t>
             </a:r>
           </a:p>
         </p:txBody>
@@ -4611,8 +6555,8 @@
           <p:nvPr/>
         </p:nvGraphicFramePr>
         <p:xfrm>
-          <a:off x="731520" y="2103120"/>
-          <a:ext cx="10698480" cy="4389120"/>
+          <a:off x="365760" y="2011680"/>
+          <a:ext cx="11429999" cy="3200400"/>
         </p:xfrm>
         <a:graphic>
           <a:graphicData uri="http://schemas.openxmlformats.org/drawingml/2006/table">
@@ -4621,10 +6565,202 @@
                 <a:tableStyleId>{5C22544A-7EE6-4342-B048-85BDC9FD1C3A}</a:tableStyleId>
               </a:tblPr>
               <a:tblGrid>
-                <a:gridCol w="6035040"/>
-                <a:gridCol w="4663440"/>
+                <a:gridCol w="1920240"/>
+                <a:gridCol w="1358537"/>
+                <a:gridCol w="1358537"/>
+                <a:gridCol w="1358537"/>
+                <a:gridCol w="1358537"/>
+                <a:gridCol w="1358537"/>
+                <a:gridCol w="1358537"/>
+                <a:gridCol w="1358537"/>
               </a:tblGrid>
-              <a:tr h="731520">
+              <a:tr h="640080">
+                <a:tc>
+                  <a:txBody>
+                    <a:bodyPr/>
+                    <a:lstStyle/>
+                    <a:p>
+                      <a:pPr algn="ctr"/>
+                      <a:r>
+                        <a:rPr sz="1300" b="1">
+                          <a:solidFill>
+                            <a:srgbClr val="4FC3F7"/>
+                          </a:solidFill>
+                          <a:latin typeface="Segoe UI"/>
+                        </a:rPr>
+                        <a:t>arm</a:t>
+                      </a:r>
+                    </a:p>
+                  </a:txBody>
+                  <a:tcPr marL="45720" marR="45720" marT="27432" marB="27432">
+                    <a:solidFill>
+                      <a:srgbClr val="141B23"/>
+                    </a:solidFill>
+                  </a:tcPr>
+                </a:tc>
+                <a:tc>
+                  <a:txBody>
+                    <a:bodyPr/>
+                    <a:lstStyle/>
+                    <a:p>
+                      <a:pPr algn="ctr"/>
+                      <a:r>
+                        <a:rPr sz="1300" b="1">
+                          <a:solidFill>
+                            <a:srgbClr val="4FC3F7"/>
+                          </a:solidFill>
+                          <a:latin typeface="Segoe UI"/>
+                        </a:rPr>
+                        <a:t>events</a:t>
+                      </a:r>
+                    </a:p>
+                  </a:txBody>
+                  <a:tcPr marL="45720" marR="45720" marT="27432" marB="27432">
+                    <a:solidFill>
+                      <a:srgbClr val="141B23"/>
+                    </a:solidFill>
+                  </a:tcPr>
+                </a:tc>
+                <a:tc>
+                  <a:txBody>
+                    <a:bodyPr/>
+                    <a:lstStyle/>
+                    <a:p>
+                      <a:pPr algn="ctr"/>
+                      <a:r>
+                        <a:rPr sz="1300" b="1">
+                          <a:solidFill>
+                            <a:srgbClr val="4FC3F7"/>
+                          </a:solidFill>
+                          <a:latin typeface="Segoe UI"/>
+                        </a:rPr>
+                        <a:t>send avg (us)</a:t>
+                      </a:r>
+                    </a:p>
+                  </a:txBody>
+                  <a:tcPr marL="45720" marR="45720" marT="27432" marB="27432">
+                    <a:solidFill>
+                      <a:srgbClr val="141B23"/>
+                    </a:solidFill>
+                  </a:tcPr>
+                </a:tc>
+                <a:tc>
+                  <a:txBody>
+                    <a:bodyPr/>
+                    <a:lstStyle/>
+                    <a:p>
+                      <a:pPr algn="ctr"/>
+                      <a:r>
+                        <a:rPr sz="1300" b="1">
+                          <a:solidFill>
+                            <a:srgbClr val="4FC3F7"/>
+                          </a:solidFill>
+                          <a:latin typeface="Segoe UI"/>
+                        </a:rPr>
+                        <a:t>push avg (us)</a:t>
+                      </a:r>
+                    </a:p>
+                  </a:txBody>
+                  <a:tcPr marL="45720" marR="45720" marT="27432" marB="27432">
+                    <a:solidFill>
+                      <a:srgbClr val="141B23"/>
+                    </a:solidFill>
+                  </a:tcPr>
+                </a:tc>
+                <a:tc>
+                  <a:txBody>
+                    <a:bodyPr/>
+                    <a:lstStyle/>
+                    <a:p>
+                      <a:pPr algn="ctr"/>
+                      <a:r>
+                        <a:rPr sz="1300" b="1">
+                          <a:solidFill>
+                            <a:srgbClr val="4FC3F7"/>
+                          </a:solidFill>
+                          <a:latin typeface="Segoe UI"/>
+                        </a:rPr>
+                        <a:t>init (s)</a:t>
+                      </a:r>
+                    </a:p>
+                  </a:txBody>
+                  <a:tcPr marL="45720" marR="45720" marT="27432" marB="27432">
+                    <a:solidFill>
+                      <a:srgbClr val="141B23"/>
+                    </a:solidFill>
+                  </a:tcPr>
+                </a:tc>
+                <a:tc>
+                  <a:txBody>
+                    <a:bodyPr/>
+                    <a:lstStyle/>
+                    <a:p>
+                      <a:pPr algn="ctr"/>
+                      <a:r>
+                        <a:rPr sz="1300" b="1">
+                          <a:solidFill>
+                            <a:srgbClr val="4FC3F7"/>
+                          </a:solidFill>
+                          <a:latin typeface="Segoe UI"/>
+                        </a:rPr>
+                        <a:t>finalize (s)</a:t>
+                      </a:r>
+                    </a:p>
+                  </a:txBody>
+                  <a:tcPr marL="45720" marR="45720" marT="27432" marB="27432">
+                    <a:solidFill>
+                      <a:srgbClr val="141B23"/>
+                    </a:solidFill>
+                  </a:tcPr>
+                </a:tc>
+                <a:tc>
+                  <a:txBody>
+                    <a:bodyPr/>
+                    <a:lstStyle/>
+                    <a:p>
+                      <a:pPr algn="ctr"/>
+                      <a:r>
+                        <a:rPr sz="1300" b="1">
+                          <a:solidFill>
+                            <a:srgbClr val="4FC3F7"/>
+                          </a:solidFill>
+                          <a:latin typeface="Segoe UI"/>
+                        </a:rPr>
+                        <a:t>walltime (s)</a:t>
+                      </a:r>
+                    </a:p>
+                  </a:txBody>
+                  <a:tcPr marL="45720" marR="45720" marT="27432" marB="27432">
+                    <a:solidFill>
+                      <a:srgbClr val="141B23"/>
+                    </a:solidFill>
+                  </a:tcPr>
+                </a:tc>
+                <a:tc>
+                  <a:txBody>
+                    <a:bodyPr/>
+                    <a:lstStyle/>
+                    <a:p>
+                      <a:pPr algn="ctr"/>
+                      <a:r>
+                        <a:rPr sz="1300" b="1">
+                          <a:solidFill>
+                            <a:srgbClr val="4FC3F7"/>
+                          </a:solidFill>
+                          <a:latin typeface="Segoe UI"/>
+                        </a:rPr>
+                        <a:t>overhead (s)</a:t>
+                      </a:r>
+                    </a:p>
+                  </a:txBody>
+                  <a:tcPr marL="45720" marR="45720" marT="27432" marB="27432">
+                    <a:solidFill>
+                      <a:srgbClr val="141B23"/>
+                    </a:solidFill>
+                  </a:tcPr>
+                </a:tc>
+              </a:tr>
+              <a:tr h="640080">
                 <a:tc>
                   <a:txBody>
                     <a:bodyPr/>
@@ -4632,47 +6768,371 @@
                     <a:p>
                       <a:pPr algn="l"/>
                       <a:r>
-                        <a:rPr sz="1600" b="1">
+                        <a:rPr sz="1400" b="1">
                           <a:solidFill>
                             <a:srgbClr val="4FC3F7"/>
                           </a:solidFill>
                           <a:latin typeface="Segoe UI"/>
                         </a:rPr>
-                        <a:t>Phase</a:t>
-                      </a:r>
-                    </a:p>
-                  </a:txBody>
-                  <a:tcPr marL="137160" marR="137160" marT="45720" marB="45720">
-                    <a:solidFill>
-                      <a:srgbClr val="141B23"/>
-                    </a:solidFill>
-                  </a:tcPr>
-                </a:tc>
-                <a:tc>
-                  <a:txBody>
-                    <a:bodyPr/>
-                    <a:lstStyle/>
-                    <a:p>
-                      <a:pPr algn="r"/>
-                      <a:r>
-                        <a:rPr sz="1600" b="1">
+                        <a:t>baseline</a:t>
+                      </a:r>
+                    </a:p>
+                  </a:txBody>
+                  <a:tcPr marL="45720" marR="45720" marT="27432" marB="27432">
+                    <a:solidFill>
+                      <a:srgbClr val="12202B"/>
+                    </a:solidFill>
+                  </a:tcPr>
+                </a:tc>
+                <a:tc>
+                  <a:txBody>
+                    <a:bodyPr/>
+                    <a:lstStyle/>
+                    <a:p>
+                      <a:pPr algn="ctr"/>
+                      <a:r>
+                        <a:rPr sz="1400" b="1">
+                          <a:solidFill>
+                            <a:srgbClr val="FFFFFF"/>
+                          </a:solidFill>
+                          <a:latin typeface="Segoe UI"/>
+                        </a:rPr>
+                        <a:t>-</a:t>
+                      </a:r>
+                    </a:p>
+                  </a:txBody>
+                  <a:tcPr marL="45720" marR="45720" marT="27432" marB="27432">
+                    <a:solidFill>
+                      <a:srgbClr val="12202B"/>
+                    </a:solidFill>
+                  </a:tcPr>
+                </a:tc>
+                <a:tc>
+                  <a:txBody>
+                    <a:bodyPr/>
+                    <a:lstStyle/>
+                    <a:p>
+                      <a:pPr algn="ctr"/>
+                      <a:r>
+                        <a:rPr sz="1400" b="1">
+                          <a:solidFill>
+                            <a:srgbClr val="FFFFFF"/>
+                          </a:solidFill>
+                          <a:latin typeface="Segoe UI"/>
+                        </a:rPr>
+                        <a:t>-</a:t>
+                      </a:r>
+                    </a:p>
+                  </a:txBody>
+                  <a:tcPr marL="45720" marR="45720" marT="27432" marB="27432">
+                    <a:solidFill>
+                      <a:srgbClr val="12202B"/>
+                    </a:solidFill>
+                  </a:tcPr>
+                </a:tc>
+                <a:tc>
+                  <a:txBody>
+                    <a:bodyPr/>
+                    <a:lstStyle/>
+                    <a:p>
+                      <a:pPr algn="ctr"/>
+                      <a:r>
+                        <a:rPr sz="1400" b="1">
+                          <a:solidFill>
+                            <a:srgbClr val="FFFFFF"/>
+                          </a:solidFill>
+                          <a:latin typeface="Segoe UI"/>
+                        </a:rPr>
+                        <a:t>-</a:t>
+                      </a:r>
+                    </a:p>
+                  </a:txBody>
+                  <a:tcPr marL="45720" marR="45720" marT="27432" marB="27432">
+                    <a:solidFill>
+                      <a:srgbClr val="12202B"/>
+                    </a:solidFill>
+                  </a:tcPr>
+                </a:tc>
+                <a:tc>
+                  <a:txBody>
+                    <a:bodyPr/>
+                    <a:lstStyle/>
+                    <a:p>
+                      <a:pPr algn="ctr"/>
+                      <a:r>
+                        <a:rPr sz="1400" b="1">
+                          <a:solidFill>
+                            <a:srgbClr val="FFFFFF"/>
+                          </a:solidFill>
+                          <a:latin typeface="Segoe UI"/>
+                        </a:rPr>
+                        <a:t>-</a:t>
+                      </a:r>
+                    </a:p>
+                  </a:txBody>
+                  <a:tcPr marL="45720" marR="45720" marT="27432" marB="27432">
+                    <a:solidFill>
+                      <a:srgbClr val="12202B"/>
+                    </a:solidFill>
+                  </a:tcPr>
+                </a:tc>
+                <a:tc>
+                  <a:txBody>
+                    <a:bodyPr/>
+                    <a:lstStyle/>
+                    <a:p>
+                      <a:pPr algn="ctr"/>
+                      <a:r>
+                        <a:rPr sz="1400" b="1">
+                          <a:solidFill>
+                            <a:srgbClr val="FFFFFF"/>
+                          </a:solidFill>
+                          <a:latin typeface="Segoe UI"/>
+                        </a:rPr>
+                        <a:t>-</a:t>
+                      </a:r>
+                    </a:p>
+                  </a:txBody>
+                  <a:tcPr marL="45720" marR="45720" marT="27432" marB="27432">
+                    <a:solidFill>
+                      <a:srgbClr val="12202B"/>
+                    </a:solidFill>
+                  </a:tcPr>
+                </a:tc>
+                <a:tc>
+                  <a:txBody>
+                    <a:bodyPr/>
+                    <a:lstStyle/>
+                    <a:p>
+                      <a:pPr algn="ctr"/>
+                      <a:r>
+                        <a:rPr sz="1400" b="1">
+                          <a:solidFill>
+                            <a:srgbClr val="FFFFFF"/>
+                          </a:solidFill>
+                          <a:latin typeface="Segoe UI"/>
+                        </a:rPr>
+                        <a:t>0.34</a:t>
+                      </a:r>
+                    </a:p>
+                  </a:txBody>
+                  <a:tcPr marL="45720" marR="45720" marT="27432" marB="27432">
+                    <a:solidFill>
+                      <a:srgbClr val="12202B"/>
+                    </a:solidFill>
+                  </a:tcPr>
+                </a:tc>
+                <a:tc>
+                  <a:txBody>
+                    <a:bodyPr/>
+                    <a:lstStyle/>
+                    <a:p>
+                      <a:pPr algn="ctr"/>
+                      <a:r>
+                        <a:rPr sz="1400" b="1">
+                          <a:solidFill>
+                            <a:srgbClr val="FFFFFF"/>
+                          </a:solidFill>
+                          <a:latin typeface="Segoe UI"/>
+                        </a:rPr>
+                        <a:t>n/a</a:t>
+                      </a:r>
+                    </a:p>
+                  </a:txBody>
+                  <a:tcPr marL="45720" marR="45720" marT="27432" marB="27432">
+                    <a:solidFill>
+                      <a:srgbClr val="12202B"/>
+                    </a:solidFill>
+                  </a:tcPr>
+                </a:tc>
+              </a:tr>
+              <a:tr h="640080">
+                <a:tc>
+                  <a:txBody>
+                    <a:bodyPr/>
+                    <a:lstStyle/>
+                    <a:p>
+                      <a:pPr algn="l"/>
+                      <a:r>
+                        <a:rPr sz="1400" b="0">
                           <a:solidFill>
                             <a:srgbClr val="4FC3F7"/>
                           </a:solidFill>
                           <a:latin typeface="Segoe UI"/>
                         </a:rPr>
-                        <a:t>Cost</a:t>
-                      </a:r>
-                    </a:p>
-                  </a:txBody>
-                  <a:tcPr marL="137160" marR="137160" marT="45720" marB="45720">
-                    <a:solidFill>
-                      <a:srgbClr val="141B23"/>
+                        <a:t>streaming r1</a:t>
+                      </a:r>
+                    </a:p>
+                  </a:txBody>
+                  <a:tcPr marL="45720" marR="45720" marT="27432" marB="27432">
+                    <a:solidFill>
+                      <a:srgbClr val="1A222C"/>
+                    </a:solidFill>
+                  </a:tcPr>
+                </a:tc>
+                <a:tc>
+                  <a:txBody>
+                    <a:bodyPr/>
+                    <a:lstStyle/>
+                    <a:p>
+                      <a:pPr algn="ctr"/>
+                      <a:r>
+                        <a:rPr sz="1400" b="0">
+                          <a:solidFill>
+                            <a:srgbClr val="E8EDF2"/>
+                          </a:solidFill>
+                          <a:latin typeface="Segoe UI"/>
+                        </a:rPr>
+                        <a:t>26,566</a:t>
+                      </a:r>
+                    </a:p>
+                  </a:txBody>
+                  <a:tcPr marL="45720" marR="45720" marT="27432" marB="27432">
+                    <a:solidFill>
+                      <a:srgbClr val="1A222C"/>
+                    </a:solidFill>
+                  </a:tcPr>
+                </a:tc>
+                <a:tc>
+                  <a:txBody>
+                    <a:bodyPr/>
+                    <a:lstStyle/>
+                    <a:p>
+                      <a:pPr algn="ctr"/>
+                      <a:r>
+                        <a:rPr sz="1400" b="0">
+                          <a:solidFill>
+                            <a:srgbClr val="E8EDF2"/>
+                          </a:solidFill>
+                          <a:latin typeface="Segoe UI"/>
+                        </a:rPr>
+                        <a:t>7.32</a:t>
+                      </a:r>
+                    </a:p>
+                  </a:txBody>
+                  <a:tcPr marL="45720" marR="45720" marT="27432" marB="27432">
+                    <a:solidFill>
+                      <a:srgbClr val="1A222C"/>
+                    </a:solidFill>
+                  </a:tcPr>
+                </a:tc>
+                <a:tc>
+                  <a:txBody>
+                    <a:bodyPr/>
+                    <a:lstStyle/>
+                    <a:p>
+                      <a:pPr algn="ctr"/>
+                      <a:r>
+                        <a:rPr sz="1400" b="0">
+                          <a:solidFill>
+                            <a:srgbClr val="E8EDF2"/>
+                          </a:solidFill>
+                          <a:latin typeface="Segoe UI"/>
+                        </a:rPr>
+                        <a:t>35.09</a:t>
+                      </a:r>
+                    </a:p>
+                  </a:txBody>
+                  <a:tcPr marL="45720" marR="45720" marT="27432" marB="27432">
+                    <a:solidFill>
+                      <a:srgbClr val="1A222C"/>
+                    </a:solidFill>
+                  </a:tcPr>
+                </a:tc>
+                <a:tc>
+                  <a:txBody>
+                    <a:bodyPr/>
+                    <a:lstStyle/>
+                    <a:p>
+                      <a:pPr algn="ctr"/>
+                      <a:r>
+                        <a:rPr sz="1400" b="0">
+                          <a:solidFill>
+                            <a:srgbClr val="E8EDF2"/>
+                          </a:solidFill>
+                          <a:latin typeface="Segoe UI"/>
+                        </a:rPr>
+                        <a:t>3.05</a:t>
+                      </a:r>
+                    </a:p>
+                  </a:txBody>
+                  <a:tcPr marL="45720" marR="45720" marT="27432" marB="27432">
+                    <a:solidFill>
+                      <a:srgbClr val="1A222C"/>
+                    </a:solidFill>
+                  </a:tcPr>
+                </a:tc>
+                <a:tc>
+                  <a:txBody>
+                    <a:bodyPr/>
+                    <a:lstStyle/>
+                    <a:p>
+                      <a:pPr algn="ctr"/>
+                      <a:r>
+                        <a:rPr sz="1400" b="0">
+                          <a:solidFill>
+                            <a:srgbClr val="E8EDF2"/>
+                          </a:solidFill>
+                          <a:latin typeface="Segoe UI"/>
+                        </a:rPr>
+                        <a:t>1.14</a:t>
+                      </a:r>
+                    </a:p>
+                  </a:txBody>
+                  <a:tcPr marL="45720" marR="45720" marT="27432" marB="27432">
+                    <a:solidFill>
+                      <a:srgbClr val="1A222C"/>
+                    </a:solidFill>
+                  </a:tcPr>
+                </a:tc>
+                <a:tc>
+                  <a:txBody>
+                    <a:bodyPr/>
+                    <a:lstStyle/>
+                    <a:p>
+                      <a:pPr algn="ctr"/>
+                      <a:r>
+                        <a:rPr sz="1400" b="0">
+                          <a:solidFill>
+                            <a:srgbClr val="E8EDF2"/>
+                          </a:solidFill>
+                          <a:latin typeface="Segoe UI"/>
+                        </a:rPr>
+                        <a:t>0.34</a:t>
+                      </a:r>
+                    </a:p>
+                  </a:txBody>
+                  <a:tcPr marL="45720" marR="45720" marT="27432" marB="27432">
+                    <a:solidFill>
+                      <a:srgbClr val="1A222C"/>
+                    </a:solidFill>
+                  </a:tcPr>
+                </a:tc>
+                <a:tc>
+                  <a:txBody>
+                    <a:bodyPr/>
+                    <a:lstStyle/>
+                    <a:p>
+                      <a:pPr algn="ctr"/>
+                      <a:r>
+                        <a:rPr sz="1400" b="0">
+                          <a:solidFill>
+                            <a:srgbClr val="E8EDF2"/>
+                          </a:solidFill>
+                          <a:latin typeface="Segoe UI"/>
+                        </a:rPr>
+                        <a:t>n/a</a:t>
+                      </a:r>
+                    </a:p>
+                  </a:txBody>
+                  <a:tcPr marL="45720" marR="45720" marT="27432" marB="27432">
+                    <a:solidFill>
+                      <a:srgbClr val="1A222C"/>
                     </a:solidFill>
                   </a:tcPr>
                 </a:tc>
               </a:tr>
-              <a:tr h="731520">
+              <a:tr h="640080">
                 <a:tc>
                   <a:txBody>
                     <a:bodyPr/>
@@ -4680,47 +7140,185 @@
                     <a:p>
                       <a:pPr algn="l"/>
                       <a:r>
-                        <a:rPr sz="1600" b="0">
-                          <a:solidFill>
-                            <a:srgbClr val="E8EDF2"/>
-                          </a:solidFill>
-                          <a:latin typeface="Segoe UI"/>
-                        </a:rPr>
-                        <a:t>Init (one-time, median)</a:t>
-                      </a:r>
-                    </a:p>
-                  </a:txBody>
-                  <a:tcPr marL="137160" marR="137160" marT="45720" marB="45720">
-                    <a:solidFill>
-                      <a:srgbClr val="1A222C"/>
-                    </a:solidFill>
-                  </a:tcPr>
-                </a:tc>
-                <a:tc>
-                  <a:txBody>
-                    <a:bodyPr/>
-                    <a:lstStyle/>
-                    <a:p>
-                      <a:pPr algn="r"/>
-                      <a:r>
-                        <a:rPr sz="1600" b="0">
-                          <a:solidFill>
-                            <a:srgbClr val="E8EDF2"/>
-                          </a:solidFill>
-                          <a:latin typeface="Segoe UI"/>
-                        </a:rPr>
-                        <a:t>3.05 s</a:t>
-                      </a:r>
-                    </a:p>
-                  </a:txBody>
-                  <a:tcPr marL="137160" marR="137160" marT="45720" marB="45720">
+                        <a:rPr sz="1400" b="0">
+                          <a:solidFill>
+                            <a:srgbClr val="4FC3F7"/>
+                          </a:solidFill>
+                          <a:latin typeface="Segoe UI"/>
+                        </a:rPr>
+                        <a:t>streaming r2</a:t>
+                      </a:r>
+                    </a:p>
+                  </a:txBody>
+                  <a:tcPr marL="45720" marR="45720" marT="27432" marB="27432">
+                    <a:solidFill>
+                      <a:srgbClr val="1A222C"/>
+                    </a:solidFill>
+                  </a:tcPr>
+                </a:tc>
+                <a:tc>
+                  <a:txBody>
+                    <a:bodyPr/>
+                    <a:lstStyle/>
+                    <a:p>
+                      <a:pPr algn="ctr"/>
+                      <a:r>
+                        <a:rPr sz="1400" b="0">
+                          <a:solidFill>
+                            <a:srgbClr val="E8EDF2"/>
+                          </a:solidFill>
+                          <a:latin typeface="Segoe UI"/>
+                        </a:rPr>
+                        <a:t>26,566</a:t>
+                      </a:r>
+                    </a:p>
+                  </a:txBody>
+                  <a:tcPr marL="45720" marR="45720" marT="27432" marB="27432">
+                    <a:solidFill>
+                      <a:srgbClr val="1A222C"/>
+                    </a:solidFill>
+                  </a:tcPr>
+                </a:tc>
+                <a:tc>
+                  <a:txBody>
+                    <a:bodyPr/>
+                    <a:lstStyle/>
+                    <a:p>
+                      <a:pPr algn="ctr"/>
+                      <a:r>
+                        <a:rPr sz="1400" b="0">
+                          <a:solidFill>
+                            <a:srgbClr val="E8EDF2"/>
+                          </a:solidFill>
+                          <a:latin typeface="Segoe UI"/>
+                        </a:rPr>
+                        <a:t>11.95</a:t>
+                      </a:r>
+                    </a:p>
+                  </a:txBody>
+                  <a:tcPr marL="45720" marR="45720" marT="27432" marB="27432">
+                    <a:solidFill>
+                      <a:srgbClr val="1A222C"/>
+                    </a:solidFill>
+                  </a:tcPr>
+                </a:tc>
+                <a:tc>
+                  <a:txBody>
+                    <a:bodyPr/>
+                    <a:lstStyle/>
+                    <a:p>
+                      <a:pPr algn="ctr"/>
+                      <a:r>
+                        <a:rPr sz="1400" b="0">
+                          <a:solidFill>
+                            <a:srgbClr val="E8EDF2"/>
+                          </a:solidFill>
+                          <a:latin typeface="Segoe UI"/>
+                        </a:rPr>
+                        <a:t>32.73</a:t>
+                      </a:r>
+                    </a:p>
+                  </a:txBody>
+                  <a:tcPr marL="45720" marR="45720" marT="27432" marB="27432">
+                    <a:solidFill>
+                      <a:srgbClr val="1A222C"/>
+                    </a:solidFill>
+                  </a:tcPr>
+                </a:tc>
+                <a:tc>
+                  <a:txBody>
+                    <a:bodyPr/>
+                    <a:lstStyle/>
+                    <a:p>
+                      <a:pPr algn="ctr"/>
+                      <a:r>
+                        <a:rPr sz="1400" b="0">
+                          <a:solidFill>
+                            <a:srgbClr val="E8EDF2"/>
+                          </a:solidFill>
+                          <a:latin typeface="Segoe UI"/>
+                        </a:rPr>
+                        <a:t>46.3</a:t>
+                      </a:r>
+                    </a:p>
+                  </a:txBody>
+                  <a:tcPr marL="45720" marR="45720" marT="27432" marB="27432">
+                    <a:solidFill>
+                      <a:srgbClr val="1A222C"/>
+                    </a:solidFill>
+                  </a:tcPr>
+                </a:tc>
+                <a:tc>
+                  <a:txBody>
+                    <a:bodyPr/>
+                    <a:lstStyle/>
+                    <a:p>
+                      <a:pPr algn="ctr"/>
+                      <a:r>
+                        <a:rPr sz="1400" b="0">
+                          <a:solidFill>
+                            <a:srgbClr val="E8EDF2"/>
+                          </a:solidFill>
+                          <a:latin typeface="Segoe UI"/>
+                        </a:rPr>
+                        <a:t>0.37</a:t>
+                      </a:r>
+                    </a:p>
+                  </a:txBody>
+                  <a:tcPr marL="45720" marR="45720" marT="27432" marB="27432">
+                    <a:solidFill>
+                      <a:srgbClr val="1A222C"/>
+                    </a:solidFill>
+                  </a:tcPr>
+                </a:tc>
+                <a:tc>
+                  <a:txBody>
+                    <a:bodyPr/>
+                    <a:lstStyle/>
+                    <a:p>
+                      <a:pPr algn="ctr"/>
+                      <a:r>
+                        <a:rPr sz="1400" b="0">
+                          <a:solidFill>
+                            <a:srgbClr val="E8EDF2"/>
+                          </a:solidFill>
+                          <a:latin typeface="Segoe UI"/>
+                        </a:rPr>
+                        <a:t>0.34</a:t>
+                      </a:r>
+                    </a:p>
+                  </a:txBody>
+                  <a:tcPr marL="45720" marR="45720" marT="27432" marB="27432">
+                    <a:solidFill>
+                      <a:srgbClr val="1A222C"/>
+                    </a:solidFill>
+                  </a:tcPr>
+                </a:tc>
+                <a:tc>
+                  <a:txBody>
+                    <a:bodyPr/>
+                    <a:lstStyle/>
+                    <a:p>
+                      <a:pPr algn="ctr"/>
+                      <a:r>
+                        <a:rPr sz="1400" b="0">
+                          <a:solidFill>
+                            <a:srgbClr val="E8EDF2"/>
+                          </a:solidFill>
+                          <a:latin typeface="Segoe UI"/>
+                        </a:rPr>
+                        <a:t>n/a</a:t>
+                      </a:r>
+                    </a:p>
+                  </a:txBody>
+                  <a:tcPr marL="45720" marR="45720" marT="27432" marB="27432">
                     <a:solidFill>
                       <a:srgbClr val="1A222C"/>
                     </a:solidFill>
                   </a:tcPr>
                 </a:tc>
               </a:tr>
-              <a:tr h="731520">
+              <a:tr h="640080">
                 <a:tc>
                   <a:txBody>
                     <a:bodyPr/>
@@ -4728,184 +7326,178 @@
                     <a:p>
                       <a:pPr algn="l"/>
                       <a:r>
-                        <a:rPr sz="1600" b="0">
-                          <a:solidFill>
-                            <a:srgbClr val="E8EDF2"/>
-                          </a:solidFill>
-                          <a:latin typeface="Segoe UI"/>
-                        </a:rPr>
-                        <a:t>Per-push cost (26,566 events)</a:t>
-                      </a:r>
-                    </a:p>
-                  </a:txBody>
-                  <a:tcPr marL="137160" marR="137160" marT="45720" marB="45720">
-                    <a:solidFill>
-                      <a:srgbClr val="1A222C"/>
-                    </a:solidFill>
-                  </a:tcPr>
-                </a:tc>
-                <a:tc>
-                  <a:txBody>
-                    <a:bodyPr/>
-                    <a:lstStyle/>
-                    <a:p>
-                      <a:pPr algn="r"/>
-                      <a:r>
-                        <a:rPr sz="1600" b="0">
-                          <a:solidFill>
-                            <a:srgbClr val="E8EDF2"/>
-                          </a:solidFill>
-                          <a:latin typeface="Segoe UI"/>
-                        </a:rPr>
-                        <a:t>35.1 us/event  (0.93 s total)</a:t>
-                      </a:r>
-                    </a:p>
-                  </a:txBody>
-                  <a:tcPr marL="137160" marR="137160" marT="45720" marB="45720">
-                    <a:solidFill>
-                      <a:srgbClr val="1A222C"/>
-                    </a:solidFill>
-                  </a:tcPr>
-                </a:tc>
-              </a:tr>
-              <a:tr h="731520">
-                <a:tc>
-                  <a:txBody>
-                    <a:bodyPr/>
-                    <a:lstStyle/>
-                    <a:p>
-                      <a:pPr algn="l"/>
-                      <a:r>
-                        <a:rPr sz="1600" b="0">
-                          <a:solidFill>
-                            <a:srgbClr val="E8EDF2"/>
-                          </a:solidFill>
-                          <a:latin typeface="Segoe UI"/>
-                        </a:rPr>
-                        <a:t>Finalize (drain + flush)</a:t>
-                      </a:r>
-                    </a:p>
-                  </a:txBody>
-                  <a:tcPr marL="137160" marR="137160" marT="45720" marB="45720">
-                    <a:solidFill>
-                      <a:srgbClr val="1A222C"/>
-                    </a:solidFill>
-                  </a:tcPr>
-                </a:tc>
-                <a:tc>
-                  <a:txBody>
-                    <a:bodyPr/>
-                    <a:lstStyle/>
-                    <a:p>
-                      <a:pPr algn="r"/>
-                      <a:r>
-                        <a:rPr sz="1600" b="0">
-                          <a:solidFill>
-                            <a:srgbClr val="E8EDF2"/>
-                          </a:solidFill>
-                          <a:latin typeface="Segoe UI"/>
-                        </a:rPr>
-                        <a:t>0.37 s</a:t>
-                      </a:r>
-                    </a:p>
-                  </a:txBody>
-                  <a:tcPr marL="137160" marR="137160" marT="45720" marB="45720">
-                    <a:solidFill>
-                      <a:srgbClr val="1A222C"/>
-                    </a:solidFill>
-                  </a:tcPr>
-                </a:tc>
-              </a:tr>
-              <a:tr h="731520">
-                <a:tc>
-                  <a:txBody>
-                    <a:bodyPr/>
-                    <a:lstStyle/>
-                    <a:p>
-                      <a:pPr algn="l"/>
-                      <a:r>
-                        <a:rPr sz="1600" b="1">
-                          <a:solidFill>
-                            <a:srgbClr val="FFFFFF"/>
-                          </a:solidFill>
-                          <a:latin typeface="Segoe UI"/>
-                        </a:rPr>
-                        <a:t>Total streaming overhead (self-timed)</a:t>
-                      </a:r>
-                    </a:p>
-                  </a:txBody>
-                  <a:tcPr marL="137160" marR="137160" marT="45720" marB="45720">
-                    <a:solidFill>
-                      <a:srgbClr val="12202B"/>
-                    </a:solidFill>
-                  </a:tcPr>
-                </a:tc>
-                <a:tc>
-                  <a:txBody>
-                    <a:bodyPr/>
-                    <a:lstStyle/>
-                    <a:p>
-                      <a:pPr algn="r"/>
-                      <a:r>
-                        <a:rPr sz="1600" b="1">
-                          <a:solidFill>
-                            <a:srgbClr val="FFFFFF"/>
-                          </a:solidFill>
-                          <a:latin typeface="Segoe UI"/>
-                        </a:rPr>
-                        <a:t>4.67 s</a:t>
-                      </a:r>
-                    </a:p>
-                  </a:txBody>
-                  <a:tcPr marL="137160" marR="137160" marT="45720" marB="45720">
-                    <a:solidFill>
-                      <a:srgbClr val="12202B"/>
-                    </a:solidFill>
-                  </a:tcPr>
-                </a:tc>
-              </a:tr>
-              <a:tr h="731520">
-                <a:tc>
-                  <a:txBody>
-                    <a:bodyPr/>
-                    <a:lstStyle/>
-                    <a:p>
-                      <a:pPr algn="l"/>
-                      <a:r>
-                        <a:rPr sz="1600" b="0">
-                          <a:solidFill>
-                            <a:srgbClr val="E8EDF2"/>
-                          </a:solidFill>
-                          <a:latin typeface="Segoe UI"/>
-                        </a:rPr>
-                        <a:t>Wall time (baseline -&gt; streaming)</a:t>
-                      </a:r>
-                    </a:p>
-                  </a:txBody>
-                  <a:tcPr marL="137160" marR="137160" marT="45720" marB="45720">
-                    <a:solidFill>
-                      <a:srgbClr val="1A222C"/>
-                    </a:solidFill>
-                  </a:tcPr>
-                </a:tc>
-                <a:tc>
-                  <a:txBody>
-                    <a:bodyPr/>
-                    <a:lstStyle/>
-                    <a:p>
-                      <a:pPr algn="r"/>
-                      <a:r>
-                        <a:rPr sz="1600" b="0">
-                          <a:solidFill>
-                            <a:srgbClr val="E8EDF2"/>
-                          </a:solidFill>
-                          <a:latin typeface="Segoe UI"/>
-                        </a:rPr>
-                        <a:t>932 -&gt; 918 s  (arm-to-arm, ~0 %)</a:t>
-                      </a:r>
-                    </a:p>
-                  </a:txBody>
-                  <a:tcPr marL="137160" marR="137160" marT="45720" marB="45720">
+                        <a:rPr sz="1400" b="0">
+                          <a:solidFill>
+                            <a:srgbClr val="4FC3F7"/>
+                          </a:solidFill>
+                          <a:latin typeface="Segoe UI"/>
+                        </a:rPr>
+                        <a:t>streaming r3</a:t>
+                      </a:r>
+                    </a:p>
+                  </a:txBody>
+                  <a:tcPr marL="45720" marR="45720" marT="27432" marB="27432">
+                    <a:solidFill>
+                      <a:srgbClr val="1A222C"/>
+                    </a:solidFill>
+                  </a:tcPr>
+                </a:tc>
+                <a:tc>
+                  <a:txBody>
+                    <a:bodyPr/>
+                    <a:lstStyle/>
+                    <a:p>
+                      <a:pPr algn="ctr"/>
+                      <a:r>
+                        <a:rPr sz="1400" b="0">
+                          <a:solidFill>
+                            <a:srgbClr val="E8EDF2"/>
+                          </a:solidFill>
+                          <a:latin typeface="Segoe UI"/>
+                        </a:rPr>
+                        <a:t>26,566</a:t>
+                      </a:r>
+                    </a:p>
+                  </a:txBody>
+                  <a:tcPr marL="45720" marR="45720" marT="27432" marB="27432">
+                    <a:solidFill>
+                      <a:srgbClr val="1A222C"/>
+                    </a:solidFill>
+                  </a:tcPr>
+                </a:tc>
+                <a:tc>
+                  <a:txBody>
+                    <a:bodyPr/>
+                    <a:lstStyle/>
+                    <a:p>
+                      <a:pPr algn="ctr"/>
+                      <a:r>
+                        <a:rPr sz="1400" b="0">
+                          <a:solidFill>
+                            <a:srgbClr val="E8EDF2"/>
+                          </a:solidFill>
+                          <a:latin typeface="Segoe UI"/>
+                        </a:rPr>
+                        <a:t>15.74</a:t>
+                      </a:r>
+                    </a:p>
+                  </a:txBody>
+                  <a:tcPr marL="45720" marR="45720" marT="27432" marB="27432">
+                    <a:solidFill>
+                      <a:srgbClr val="1A222C"/>
+                    </a:solidFill>
+                  </a:tcPr>
+                </a:tc>
+                <a:tc>
+                  <a:txBody>
+                    <a:bodyPr/>
+                    <a:lstStyle/>
+                    <a:p>
+                      <a:pPr algn="ctr"/>
+                      <a:r>
+                        <a:rPr sz="1400" b="0">
+                          <a:solidFill>
+                            <a:srgbClr val="E8EDF2"/>
+                          </a:solidFill>
+                          <a:latin typeface="Segoe UI"/>
+                        </a:rPr>
+                        <a:t>35.21</a:t>
+                      </a:r>
+                    </a:p>
+                  </a:txBody>
+                  <a:tcPr marL="45720" marR="45720" marT="27432" marB="27432">
+                    <a:solidFill>
+                      <a:srgbClr val="1A222C"/>
+                    </a:solidFill>
+                  </a:tcPr>
+                </a:tc>
+                <a:tc>
+                  <a:txBody>
+                    <a:bodyPr/>
+                    <a:lstStyle/>
+                    <a:p>
+                      <a:pPr algn="ctr"/>
+                      <a:r>
+                        <a:rPr sz="1400" b="0">
+                          <a:solidFill>
+                            <a:srgbClr val="E8EDF2"/>
+                          </a:solidFill>
+                          <a:latin typeface="Segoe UI"/>
+                        </a:rPr>
+                        <a:t>3.86</a:t>
+                      </a:r>
+                    </a:p>
+                  </a:txBody>
+                  <a:tcPr marL="45720" marR="45720" marT="27432" marB="27432">
+                    <a:solidFill>
+                      <a:srgbClr val="1A222C"/>
+                    </a:solidFill>
+                  </a:tcPr>
+                </a:tc>
+                <a:tc>
+                  <a:txBody>
+                    <a:bodyPr/>
+                    <a:lstStyle/>
+                    <a:p>
+                      <a:pPr algn="ctr"/>
+                      <a:r>
+                        <a:rPr sz="1400" b="0">
+                          <a:solidFill>
+                            <a:srgbClr val="E8EDF2"/>
+                          </a:solidFill>
+                          <a:latin typeface="Segoe UI"/>
+                        </a:rPr>
+                        <a:t>0.004</a:t>
+                      </a:r>
+                    </a:p>
+                  </a:txBody>
+                  <a:tcPr marL="45720" marR="45720" marT="27432" marB="27432">
+                    <a:solidFill>
+                      <a:srgbClr val="1A222C"/>
+                    </a:solidFill>
+                  </a:tcPr>
+                </a:tc>
+                <a:tc>
+                  <a:txBody>
+                    <a:bodyPr/>
+                    <a:lstStyle/>
+                    <a:p>
+                      <a:pPr algn="ctr"/>
+                      <a:r>
+                        <a:rPr sz="1400" b="0">
+                          <a:solidFill>
+                            <a:srgbClr val="E8EDF2"/>
+                          </a:solidFill>
+                          <a:latin typeface="Segoe UI"/>
+                        </a:rPr>
+                        <a:t>0.34</a:t>
+                      </a:r>
+                    </a:p>
+                  </a:txBody>
+                  <a:tcPr marL="45720" marR="45720" marT="27432" marB="27432">
+                    <a:solidFill>
+                      <a:srgbClr val="1A222C"/>
+                    </a:solidFill>
+                  </a:tcPr>
+                </a:tc>
+                <a:tc>
+                  <a:txBody>
+                    <a:bodyPr/>
+                    <a:lstStyle/>
+                    <a:p>
+                      <a:pPr algn="ctr"/>
+                      <a:r>
+                        <a:rPr sz="1400" b="0">
+                          <a:solidFill>
+                            <a:srgbClr val="E8EDF2"/>
+                          </a:solidFill>
+                          <a:latin typeface="Segoe UI"/>
+                        </a:rPr>
+                        <a:t>n/a</a:t>
+                      </a:r>
+                    </a:p>
+                  </a:txBody>
+                  <a:tcPr marL="45720" marR="45720" marT="27432" marB="27432">
                     <a:solidFill>
                       <a:srgbClr val="1A222C"/>
                     </a:solidFill>
@@ -4924,8 +7516,8 @@
         </p:nvSpPr>
         <p:spPr>
           <a:xfrm>
-            <a:off x="731520" y="6309360"/>
-            <a:ext cx="10698480" cy="457200"/>
+            <a:off x="457200" y="6126480"/>
+            <a:ext cx="11247120" cy="548640"/>
           </a:xfrm>
           <a:prstGeom prst="rect">
             <a:avLst/>
@@ -4946,7 +7538,7 @@
                 </a:solidFill>
                 <a:latin typeface="Segoe UI"/>
               </a:rPr>
-              <a:t>Self-timed overhead = Init + Push + Send + Finalize, measured inside the process. Per-push runs off the app critical path (drain thread); app pays only a ~2 us enqueue.</a:t>
+              <a:t>send = app-critical-path enqueue (total s). push/init/finalize = drain-thread + one-time connector cost (total s). Baseline has no connector (-). overhead in seconds vs baseline.</a:t>
             </a:r>
           </a:p>
         </p:txBody>
@@ -4985,8 +7577,8 @@
         </p:nvSpPr>
         <p:spPr>
           <a:xfrm>
-            <a:off x="731520" y="365760"/>
-            <a:ext cx="10881360" cy="822960"/>
+            <a:off x="457200" y="365760"/>
+            <a:ext cx="11247120" cy="822960"/>
           </a:xfrm>
           <a:prstGeom prst="rect">
             <a:avLst/>
@@ -5001,13 +7593,13 @@
           <a:p>
             <a:pPr algn="l"/>
             <a:r>
-              <a:rPr sz="2600" b="1">
+              <a:rPr sz="2400" b="1">
                 <a:solidFill>
                   <a:srgbClr val="4FC3F7"/>
                 </a:solidFill>
                 <a:latin typeface="Segoe UI"/>
               </a:rPr>
-              <a:t>dlio (DLIO benchmark dataset-generation)  -  TCP, 32 ranks/node</a:t>
+              <a:t>dlio (DLIO benchmark dataset-generation)  -  TCP, 32 ranks/node, Adaptive</a:t>
             </a:r>
           </a:p>
         </p:txBody>
@@ -5020,8 +7612,8 @@
         </p:nvSpPr>
         <p:spPr>
           <a:xfrm>
-            <a:off x="731520" y="1188720"/>
-            <a:ext cx="10881360" cy="640080"/>
+            <a:off x="457200" y="1143000"/>
+            <a:ext cx="11247120" cy="640080"/>
           </a:xfrm>
           <a:prstGeom prst="rect">
             <a:avLst/>
@@ -5036,13 +7628,13 @@
           <a:p>
             <a:pPr algn="l"/>
             <a:r>
-              <a:rPr sz="1400" b="0">
+              <a:rPr sz="1300" b="0">
                 <a:solidFill>
                   <a:srgbClr val="93A1AF"/>
                 </a:solidFill>
                 <a:latin typeface="Segoe UI"/>
               </a:rPr>
-              <a:t>TensorFlow NPZ data-gen. 475,994 events. 2 reps. Fidelity EXACT (32-&gt;1 aggregated).</a:t>
+              <a:t>TensorFlow NPZ data-gen. Fidelity EXACT (32-&gt;1 aggregated). Per-event cost is the metric.</a:t>
             </a:r>
           </a:p>
         </p:txBody>
@@ -5056,8 +7648,8 @@
           <p:nvPr/>
         </p:nvGraphicFramePr>
         <p:xfrm>
-          <a:off x="731520" y="2103120"/>
-          <a:ext cx="10698480" cy="4389120"/>
+          <a:off x="365760" y="2011680"/>
+          <a:ext cx="11429999" cy="3200400"/>
         </p:xfrm>
         <a:graphic>
           <a:graphicData uri="http://schemas.openxmlformats.org/drawingml/2006/table">
@@ -5066,10 +7658,202 @@
                 <a:tableStyleId>{5C22544A-7EE6-4342-B048-85BDC9FD1C3A}</a:tableStyleId>
               </a:tblPr>
               <a:tblGrid>
-                <a:gridCol w="6035040"/>
-                <a:gridCol w="4663440"/>
+                <a:gridCol w="1920240"/>
+                <a:gridCol w="1358537"/>
+                <a:gridCol w="1358537"/>
+                <a:gridCol w="1358537"/>
+                <a:gridCol w="1358537"/>
+                <a:gridCol w="1358537"/>
+                <a:gridCol w="1358537"/>
+                <a:gridCol w="1358537"/>
               </a:tblGrid>
-              <a:tr h="731520">
+              <a:tr h="640080">
+                <a:tc>
+                  <a:txBody>
+                    <a:bodyPr/>
+                    <a:lstStyle/>
+                    <a:p>
+                      <a:pPr algn="ctr"/>
+                      <a:r>
+                        <a:rPr sz="1300" b="1">
+                          <a:solidFill>
+                            <a:srgbClr val="4FC3F7"/>
+                          </a:solidFill>
+                          <a:latin typeface="Segoe UI"/>
+                        </a:rPr>
+                        <a:t>arm</a:t>
+                      </a:r>
+                    </a:p>
+                  </a:txBody>
+                  <a:tcPr marL="45720" marR="45720" marT="27432" marB="27432">
+                    <a:solidFill>
+                      <a:srgbClr val="141B23"/>
+                    </a:solidFill>
+                  </a:tcPr>
+                </a:tc>
+                <a:tc>
+                  <a:txBody>
+                    <a:bodyPr/>
+                    <a:lstStyle/>
+                    <a:p>
+                      <a:pPr algn="ctr"/>
+                      <a:r>
+                        <a:rPr sz="1300" b="1">
+                          <a:solidFill>
+                            <a:srgbClr val="4FC3F7"/>
+                          </a:solidFill>
+                          <a:latin typeface="Segoe UI"/>
+                        </a:rPr>
+                        <a:t>events</a:t>
+                      </a:r>
+                    </a:p>
+                  </a:txBody>
+                  <a:tcPr marL="45720" marR="45720" marT="27432" marB="27432">
+                    <a:solidFill>
+                      <a:srgbClr val="141B23"/>
+                    </a:solidFill>
+                  </a:tcPr>
+                </a:tc>
+                <a:tc>
+                  <a:txBody>
+                    <a:bodyPr/>
+                    <a:lstStyle/>
+                    <a:p>
+                      <a:pPr algn="ctr"/>
+                      <a:r>
+                        <a:rPr sz="1300" b="1">
+                          <a:solidFill>
+                            <a:srgbClr val="4FC3F7"/>
+                          </a:solidFill>
+                          <a:latin typeface="Segoe UI"/>
+                        </a:rPr>
+                        <a:t>send avg (us)</a:t>
+                      </a:r>
+                    </a:p>
+                  </a:txBody>
+                  <a:tcPr marL="45720" marR="45720" marT="27432" marB="27432">
+                    <a:solidFill>
+                      <a:srgbClr val="141B23"/>
+                    </a:solidFill>
+                  </a:tcPr>
+                </a:tc>
+                <a:tc>
+                  <a:txBody>
+                    <a:bodyPr/>
+                    <a:lstStyle/>
+                    <a:p>
+                      <a:pPr algn="ctr"/>
+                      <a:r>
+                        <a:rPr sz="1300" b="1">
+                          <a:solidFill>
+                            <a:srgbClr val="4FC3F7"/>
+                          </a:solidFill>
+                          <a:latin typeface="Segoe UI"/>
+                        </a:rPr>
+                        <a:t>push avg (us)</a:t>
+                      </a:r>
+                    </a:p>
+                  </a:txBody>
+                  <a:tcPr marL="45720" marR="45720" marT="27432" marB="27432">
+                    <a:solidFill>
+                      <a:srgbClr val="141B23"/>
+                    </a:solidFill>
+                  </a:tcPr>
+                </a:tc>
+                <a:tc>
+                  <a:txBody>
+                    <a:bodyPr/>
+                    <a:lstStyle/>
+                    <a:p>
+                      <a:pPr algn="ctr"/>
+                      <a:r>
+                        <a:rPr sz="1300" b="1">
+                          <a:solidFill>
+                            <a:srgbClr val="4FC3F7"/>
+                          </a:solidFill>
+                          <a:latin typeface="Segoe UI"/>
+                        </a:rPr>
+                        <a:t>init (s)</a:t>
+                      </a:r>
+                    </a:p>
+                  </a:txBody>
+                  <a:tcPr marL="45720" marR="45720" marT="27432" marB="27432">
+                    <a:solidFill>
+                      <a:srgbClr val="141B23"/>
+                    </a:solidFill>
+                  </a:tcPr>
+                </a:tc>
+                <a:tc>
+                  <a:txBody>
+                    <a:bodyPr/>
+                    <a:lstStyle/>
+                    <a:p>
+                      <a:pPr algn="ctr"/>
+                      <a:r>
+                        <a:rPr sz="1300" b="1">
+                          <a:solidFill>
+                            <a:srgbClr val="4FC3F7"/>
+                          </a:solidFill>
+                          <a:latin typeface="Segoe UI"/>
+                        </a:rPr>
+                        <a:t>finalize (s)</a:t>
+                      </a:r>
+                    </a:p>
+                  </a:txBody>
+                  <a:tcPr marL="45720" marR="45720" marT="27432" marB="27432">
+                    <a:solidFill>
+                      <a:srgbClr val="141B23"/>
+                    </a:solidFill>
+                  </a:tcPr>
+                </a:tc>
+                <a:tc>
+                  <a:txBody>
+                    <a:bodyPr/>
+                    <a:lstStyle/>
+                    <a:p>
+                      <a:pPr algn="ctr"/>
+                      <a:r>
+                        <a:rPr sz="1300" b="1">
+                          <a:solidFill>
+                            <a:srgbClr val="4FC3F7"/>
+                          </a:solidFill>
+                          <a:latin typeface="Segoe UI"/>
+                        </a:rPr>
+                        <a:t>walltime (s)</a:t>
+                      </a:r>
+                    </a:p>
+                  </a:txBody>
+                  <a:tcPr marL="45720" marR="45720" marT="27432" marB="27432">
+                    <a:solidFill>
+                      <a:srgbClr val="141B23"/>
+                    </a:solidFill>
+                  </a:tcPr>
+                </a:tc>
+                <a:tc>
+                  <a:txBody>
+                    <a:bodyPr/>
+                    <a:lstStyle/>
+                    <a:p>
+                      <a:pPr algn="ctr"/>
+                      <a:r>
+                        <a:rPr sz="1300" b="1">
+                          <a:solidFill>
+                            <a:srgbClr val="4FC3F7"/>
+                          </a:solidFill>
+                          <a:latin typeface="Segoe UI"/>
+                        </a:rPr>
+                        <a:t>overhead (s)</a:t>
+                      </a:r>
+                    </a:p>
+                  </a:txBody>
+                  <a:tcPr marL="45720" marR="45720" marT="27432" marB="27432">
+                    <a:solidFill>
+                      <a:srgbClr val="141B23"/>
+                    </a:solidFill>
+                  </a:tcPr>
+                </a:tc>
+              </a:tr>
+              <a:tr h="640080">
                 <a:tc>
                   <a:txBody>
                     <a:bodyPr/>
@@ -5077,47 +7861,371 @@
                     <a:p>
                       <a:pPr algn="l"/>
                       <a:r>
-                        <a:rPr sz="1600" b="1">
+                        <a:rPr sz="1400" b="1">
                           <a:solidFill>
                             <a:srgbClr val="4FC3F7"/>
                           </a:solidFill>
                           <a:latin typeface="Segoe UI"/>
                         </a:rPr>
-                        <a:t>Phase</a:t>
-                      </a:r>
-                    </a:p>
-                  </a:txBody>
-                  <a:tcPr marL="137160" marR="137160" marT="45720" marB="45720">
-                    <a:solidFill>
-                      <a:srgbClr val="141B23"/>
-                    </a:solidFill>
-                  </a:tcPr>
-                </a:tc>
-                <a:tc>
-                  <a:txBody>
-                    <a:bodyPr/>
-                    <a:lstStyle/>
-                    <a:p>
-                      <a:pPr algn="r"/>
-                      <a:r>
-                        <a:rPr sz="1600" b="1">
+                        <a:t>baseline</a:t>
+                      </a:r>
+                    </a:p>
+                  </a:txBody>
+                  <a:tcPr marL="45720" marR="45720" marT="27432" marB="27432">
+                    <a:solidFill>
+                      <a:srgbClr val="12202B"/>
+                    </a:solidFill>
+                  </a:tcPr>
+                </a:tc>
+                <a:tc>
+                  <a:txBody>
+                    <a:bodyPr/>
+                    <a:lstStyle/>
+                    <a:p>
+                      <a:pPr algn="ctr"/>
+                      <a:r>
+                        <a:rPr sz="1400" b="1">
+                          <a:solidFill>
+                            <a:srgbClr val="FFFFFF"/>
+                          </a:solidFill>
+                          <a:latin typeface="Segoe UI"/>
+                        </a:rPr>
+                        <a:t>-</a:t>
+                      </a:r>
+                    </a:p>
+                  </a:txBody>
+                  <a:tcPr marL="45720" marR="45720" marT="27432" marB="27432">
+                    <a:solidFill>
+                      <a:srgbClr val="12202B"/>
+                    </a:solidFill>
+                  </a:tcPr>
+                </a:tc>
+                <a:tc>
+                  <a:txBody>
+                    <a:bodyPr/>
+                    <a:lstStyle/>
+                    <a:p>
+                      <a:pPr algn="ctr"/>
+                      <a:r>
+                        <a:rPr sz="1400" b="1">
+                          <a:solidFill>
+                            <a:srgbClr val="FFFFFF"/>
+                          </a:solidFill>
+                          <a:latin typeface="Segoe UI"/>
+                        </a:rPr>
+                        <a:t>-</a:t>
+                      </a:r>
+                    </a:p>
+                  </a:txBody>
+                  <a:tcPr marL="45720" marR="45720" marT="27432" marB="27432">
+                    <a:solidFill>
+                      <a:srgbClr val="12202B"/>
+                    </a:solidFill>
+                  </a:tcPr>
+                </a:tc>
+                <a:tc>
+                  <a:txBody>
+                    <a:bodyPr/>
+                    <a:lstStyle/>
+                    <a:p>
+                      <a:pPr algn="ctr"/>
+                      <a:r>
+                        <a:rPr sz="1400" b="1">
+                          <a:solidFill>
+                            <a:srgbClr val="FFFFFF"/>
+                          </a:solidFill>
+                          <a:latin typeface="Segoe UI"/>
+                        </a:rPr>
+                        <a:t>-</a:t>
+                      </a:r>
+                    </a:p>
+                  </a:txBody>
+                  <a:tcPr marL="45720" marR="45720" marT="27432" marB="27432">
+                    <a:solidFill>
+                      <a:srgbClr val="12202B"/>
+                    </a:solidFill>
+                  </a:tcPr>
+                </a:tc>
+                <a:tc>
+                  <a:txBody>
+                    <a:bodyPr/>
+                    <a:lstStyle/>
+                    <a:p>
+                      <a:pPr algn="ctr"/>
+                      <a:r>
+                        <a:rPr sz="1400" b="1">
+                          <a:solidFill>
+                            <a:srgbClr val="FFFFFF"/>
+                          </a:solidFill>
+                          <a:latin typeface="Segoe UI"/>
+                        </a:rPr>
+                        <a:t>-</a:t>
+                      </a:r>
+                    </a:p>
+                  </a:txBody>
+                  <a:tcPr marL="45720" marR="45720" marT="27432" marB="27432">
+                    <a:solidFill>
+                      <a:srgbClr val="12202B"/>
+                    </a:solidFill>
+                  </a:tcPr>
+                </a:tc>
+                <a:tc>
+                  <a:txBody>
+                    <a:bodyPr/>
+                    <a:lstStyle/>
+                    <a:p>
+                      <a:pPr algn="ctr"/>
+                      <a:r>
+                        <a:rPr sz="1400" b="1">
+                          <a:solidFill>
+                            <a:srgbClr val="FFFFFF"/>
+                          </a:solidFill>
+                          <a:latin typeface="Segoe UI"/>
+                        </a:rPr>
+                        <a:t>-</a:t>
+                      </a:r>
+                    </a:p>
+                  </a:txBody>
+                  <a:tcPr marL="45720" marR="45720" marT="27432" marB="27432">
+                    <a:solidFill>
+                      <a:srgbClr val="12202B"/>
+                    </a:solidFill>
+                  </a:tcPr>
+                </a:tc>
+                <a:tc>
+                  <a:txBody>
+                    <a:bodyPr/>
+                    <a:lstStyle/>
+                    <a:p>
+                      <a:pPr algn="ctr"/>
+                      <a:r>
+                        <a:rPr sz="1400" b="1">
+                          <a:solidFill>
+                            <a:srgbClr val="FFFFFF"/>
+                          </a:solidFill>
+                          <a:latin typeface="Segoe UI"/>
+                        </a:rPr>
+                        <a:t>n/a</a:t>
+                      </a:r>
+                    </a:p>
+                  </a:txBody>
+                  <a:tcPr marL="45720" marR="45720" marT="27432" marB="27432">
+                    <a:solidFill>
+                      <a:srgbClr val="12202B"/>
+                    </a:solidFill>
+                  </a:tcPr>
+                </a:tc>
+                <a:tc>
+                  <a:txBody>
+                    <a:bodyPr/>
+                    <a:lstStyle/>
+                    <a:p>
+                      <a:pPr algn="ctr"/>
+                      <a:r>
+                        <a:rPr sz="1400" b="1">
+                          <a:solidFill>
+                            <a:srgbClr val="FFFFFF"/>
+                          </a:solidFill>
+                          <a:latin typeface="Segoe UI"/>
+                        </a:rPr>
+                        <a:t>n/a</a:t>
+                      </a:r>
+                    </a:p>
+                  </a:txBody>
+                  <a:tcPr marL="45720" marR="45720" marT="27432" marB="27432">
+                    <a:solidFill>
+                      <a:srgbClr val="12202B"/>
+                    </a:solidFill>
+                  </a:tcPr>
+                </a:tc>
+              </a:tr>
+              <a:tr h="640080">
+                <a:tc>
+                  <a:txBody>
+                    <a:bodyPr/>
+                    <a:lstStyle/>
+                    <a:p>
+                      <a:pPr algn="l"/>
+                      <a:r>
+                        <a:rPr sz="1400" b="0">
                           <a:solidFill>
                             <a:srgbClr val="4FC3F7"/>
                           </a:solidFill>
                           <a:latin typeface="Segoe UI"/>
                         </a:rPr>
-                        <a:t>Cost</a:t>
-                      </a:r>
-                    </a:p>
-                  </a:txBody>
-                  <a:tcPr marL="137160" marR="137160" marT="45720" marB="45720">
-                    <a:solidFill>
-                      <a:srgbClr val="141B23"/>
+                        <a:t>streaming r1</a:t>
+                      </a:r>
+                    </a:p>
+                  </a:txBody>
+                  <a:tcPr marL="45720" marR="45720" marT="27432" marB="27432">
+                    <a:solidFill>
+                      <a:srgbClr val="1A222C"/>
+                    </a:solidFill>
+                  </a:tcPr>
+                </a:tc>
+                <a:tc>
+                  <a:txBody>
+                    <a:bodyPr/>
+                    <a:lstStyle/>
+                    <a:p>
+                      <a:pPr algn="ctr"/>
+                      <a:r>
+                        <a:rPr sz="1400" b="0">
+                          <a:solidFill>
+                            <a:srgbClr val="E8EDF2"/>
+                          </a:solidFill>
+                          <a:latin typeface="Segoe UI"/>
+                        </a:rPr>
+                        <a:t>475,994</a:t>
+                      </a:r>
+                    </a:p>
+                  </a:txBody>
+                  <a:tcPr marL="45720" marR="45720" marT="27432" marB="27432">
+                    <a:solidFill>
+                      <a:srgbClr val="1A222C"/>
+                    </a:solidFill>
+                  </a:tcPr>
+                </a:tc>
+                <a:tc>
+                  <a:txBody>
+                    <a:bodyPr/>
+                    <a:lstStyle/>
+                    <a:p>
+                      <a:pPr algn="ctr"/>
+                      <a:r>
+                        <a:rPr sz="1400" b="0">
+                          <a:solidFill>
+                            <a:srgbClr val="E8EDF2"/>
+                          </a:solidFill>
+                          <a:latin typeface="Segoe UI"/>
+                        </a:rPr>
+                        <a:t>3.00</a:t>
+                      </a:r>
+                    </a:p>
+                  </a:txBody>
+                  <a:tcPr marL="45720" marR="45720" marT="27432" marB="27432">
+                    <a:solidFill>
+                      <a:srgbClr val="1A222C"/>
+                    </a:solidFill>
+                  </a:tcPr>
+                </a:tc>
+                <a:tc>
+                  <a:txBody>
+                    <a:bodyPr/>
+                    <a:lstStyle/>
+                    <a:p>
+                      <a:pPr algn="ctr"/>
+                      <a:r>
+                        <a:rPr sz="1400" b="0">
+                          <a:solidFill>
+                            <a:srgbClr val="E8EDF2"/>
+                          </a:solidFill>
+                          <a:latin typeface="Segoe UI"/>
+                        </a:rPr>
+                        <a:t>37.96</a:t>
+                      </a:r>
+                    </a:p>
+                  </a:txBody>
+                  <a:tcPr marL="45720" marR="45720" marT="27432" marB="27432">
+                    <a:solidFill>
+                      <a:srgbClr val="1A222C"/>
+                    </a:solidFill>
+                  </a:tcPr>
+                </a:tc>
+                <a:tc>
+                  <a:txBody>
+                    <a:bodyPr/>
+                    <a:lstStyle/>
+                    <a:p>
+                      <a:pPr algn="ctr"/>
+                      <a:r>
+                        <a:rPr sz="1400" b="0">
+                          <a:solidFill>
+                            <a:srgbClr val="E8EDF2"/>
+                          </a:solidFill>
+                          <a:latin typeface="Segoe UI"/>
+                        </a:rPr>
+                        <a:t>3.25</a:t>
+                      </a:r>
+                    </a:p>
+                  </a:txBody>
+                  <a:tcPr marL="45720" marR="45720" marT="27432" marB="27432">
+                    <a:solidFill>
+                      <a:srgbClr val="1A222C"/>
+                    </a:solidFill>
+                  </a:tcPr>
+                </a:tc>
+                <a:tc>
+                  <a:txBody>
+                    <a:bodyPr/>
+                    <a:lstStyle/>
+                    <a:p>
+                      <a:pPr algn="ctr"/>
+                      <a:r>
+                        <a:rPr sz="1400" b="0">
+                          <a:solidFill>
+                            <a:srgbClr val="E8EDF2"/>
+                          </a:solidFill>
+                          <a:latin typeface="Segoe UI"/>
+                        </a:rPr>
+                        <a:t>0.004</a:t>
+                      </a:r>
+                    </a:p>
+                  </a:txBody>
+                  <a:tcPr marL="45720" marR="45720" marT="27432" marB="27432">
+                    <a:solidFill>
+                      <a:srgbClr val="1A222C"/>
+                    </a:solidFill>
+                  </a:tcPr>
+                </a:tc>
+                <a:tc>
+                  <a:txBody>
+                    <a:bodyPr/>
+                    <a:lstStyle/>
+                    <a:p>
+                      <a:pPr algn="ctr"/>
+                      <a:r>
+                        <a:rPr sz="1400" b="0">
+                          <a:solidFill>
+                            <a:srgbClr val="E8EDF2"/>
+                          </a:solidFill>
+                          <a:latin typeface="Segoe UI"/>
+                        </a:rPr>
+                        <a:t>n/a</a:t>
+                      </a:r>
+                    </a:p>
+                  </a:txBody>
+                  <a:tcPr marL="45720" marR="45720" marT="27432" marB="27432">
+                    <a:solidFill>
+                      <a:srgbClr val="1A222C"/>
+                    </a:solidFill>
+                  </a:tcPr>
+                </a:tc>
+                <a:tc>
+                  <a:txBody>
+                    <a:bodyPr/>
+                    <a:lstStyle/>
+                    <a:p>
+                      <a:pPr algn="ctr"/>
+                      <a:r>
+                        <a:rPr sz="1400" b="0">
+                          <a:solidFill>
+                            <a:srgbClr val="E8EDF2"/>
+                          </a:solidFill>
+                          <a:latin typeface="Segoe UI"/>
+                        </a:rPr>
+                        <a:t>n/a</a:t>
+                      </a:r>
+                    </a:p>
+                  </a:txBody>
+                  <a:tcPr marL="45720" marR="45720" marT="27432" marB="27432">
+                    <a:solidFill>
+                      <a:srgbClr val="1A222C"/>
                     </a:solidFill>
                   </a:tcPr>
                 </a:tc>
               </a:tr>
-              <a:tr h="731520">
+              <a:tr h="640080">
                 <a:tc>
                   <a:txBody>
                     <a:bodyPr/>
@@ -5125,47 +8233,185 @@
                     <a:p>
                       <a:pPr algn="l"/>
                       <a:r>
-                        <a:rPr sz="1600" b="0">
-                          <a:solidFill>
-                            <a:srgbClr val="E8EDF2"/>
-                          </a:solidFill>
-                          <a:latin typeface="Segoe UI"/>
-                        </a:rPr>
-                        <a:t>Init (one-time)</a:t>
-                      </a:r>
-                    </a:p>
-                  </a:txBody>
-                  <a:tcPr marL="137160" marR="137160" marT="45720" marB="45720">
-                    <a:solidFill>
-                      <a:srgbClr val="1A222C"/>
-                    </a:solidFill>
-                  </a:tcPr>
-                </a:tc>
-                <a:tc>
-                  <a:txBody>
-                    <a:bodyPr/>
-                    <a:lstStyle/>
-                    <a:p>
-                      <a:pPr algn="r"/>
-                      <a:r>
-                        <a:rPr sz="1600" b="0">
-                          <a:solidFill>
-                            <a:srgbClr val="E8EDF2"/>
-                          </a:solidFill>
-                          <a:latin typeface="Segoe UI"/>
-                        </a:rPr>
-                        <a:t>3.7 s</a:t>
-                      </a:r>
-                    </a:p>
-                  </a:txBody>
-                  <a:tcPr marL="137160" marR="137160" marT="45720" marB="45720">
+                        <a:rPr sz="1400" b="0">
+                          <a:solidFill>
+                            <a:srgbClr val="4FC3F7"/>
+                          </a:solidFill>
+                          <a:latin typeface="Segoe UI"/>
+                        </a:rPr>
+                        <a:t>streaming r2</a:t>
+                      </a:r>
+                    </a:p>
+                  </a:txBody>
+                  <a:tcPr marL="45720" marR="45720" marT="27432" marB="27432">
+                    <a:solidFill>
+                      <a:srgbClr val="1A222C"/>
+                    </a:solidFill>
+                  </a:tcPr>
+                </a:tc>
+                <a:tc>
+                  <a:txBody>
+                    <a:bodyPr/>
+                    <a:lstStyle/>
+                    <a:p>
+                      <a:pPr algn="ctr"/>
+                      <a:r>
+                        <a:rPr sz="1400" b="0">
+                          <a:solidFill>
+                            <a:srgbClr val="E8EDF2"/>
+                          </a:solidFill>
+                          <a:latin typeface="Segoe UI"/>
+                        </a:rPr>
+                        <a:t>475,994</a:t>
+                      </a:r>
+                    </a:p>
+                  </a:txBody>
+                  <a:tcPr marL="45720" marR="45720" marT="27432" marB="27432">
+                    <a:solidFill>
+                      <a:srgbClr val="1A222C"/>
+                    </a:solidFill>
+                  </a:tcPr>
+                </a:tc>
+                <a:tc>
+                  <a:txBody>
+                    <a:bodyPr/>
+                    <a:lstStyle/>
+                    <a:p>
+                      <a:pPr algn="ctr"/>
+                      <a:r>
+                        <a:rPr sz="1400" b="0">
+                          <a:solidFill>
+                            <a:srgbClr val="E8EDF2"/>
+                          </a:solidFill>
+                          <a:latin typeface="Segoe UI"/>
+                        </a:rPr>
+                        <a:t>4.62</a:t>
+                      </a:r>
+                    </a:p>
+                  </a:txBody>
+                  <a:tcPr marL="45720" marR="45720" marT="27432" marB="27432">
+                    <a:solidFill>
+                      <a:srgbClr val="1A222C"/>
+                    </a:solidFill>
+                  </a:tcPr>
+                </a:tc>
+                <a:tc>
+                  <a:txBody>
+                    <a:bodyPr/>
+                    <a:lstStyle/>
+                    <a:p>
+                      <a:pPr algn="ctr"/>
+                      <a:r>
+                        <a:rPr sz="1400" b="0">
+                          <a:solidFill>
+                            <a:srgbClr val="E8EDF2"/>
+                          </a:solidFill>
+                          <a:latin typeface="Segoe UI"/>
+                        </a:rPr>
+                        <a:t>42.54</a:t>
+                      </a:r>
+                    </a:p>
+                  </a:txBody>
+                  <a:tcPr marL="45720" marR="45720" marT="27432" marB="27432">
+                    <a:solidFill>
+                      <a:srgbClr val="1A222C"/>
+                    </a:solidFill>
+                  </a:tcPr>
+                </a:tc>
+                <a:tc>
+                  <a:txBody>
+                    <a:bodyPr/>
+                    <a:lstStyle/>
+                    <a:p>
+                      <a:pPr algn="ctr"/>
+                      <a:r>
+                        <a:rPr sz="1400" b="0">
+                          <a:solidFill>
+                            <a:srgbClr val="E8EDF2"/>
+                          </a:solidFill>
+                          <a:latin typeface="Segoe UI"/>
+                        </a:rPr>
+                        <a:t>4.10</a:t>
+                      </a:r>
+                    </a:p>
+                  </a:txBody>
+                  <a:tcPr marL="45720" marR="45720" marT="27432" marB="27432">
+                    <a:solidFill>
+                      <a:srgbClr val="1A222C"/>
+                    </a:solidFill>
+                  </a:tcPr>
+                </a:tc>
+                <a:tc>
+                  <a:txBody>
+                    <a:bodyPr/>
+                    <a:lstStyle/>
+                    <a:p>
+                      <a:pPr algn="ctr"/>
+                      <a:r>
+                        <a:rPr sz="1400" b="0">
+                          <a:solidFill>
+                            <a:srgbClr val="E8EDF2"/>
+                          </a:solidFill>
+                          <a:latin typeface="Segoe UI"/>
+                        </a:rPr>
+                        <a:t>0.005</a:t>
+                      </a:r>
+                    </a:p>
+                  </a:txBody>
+                  <a:tcPr marL="45720" marR="45720" marT="27432" marB="27432">
+                    <a:solidFill>
+                      <a:srgbClr val="1A222C"/>
+                    </a:solidFill>
+                  </a:tcPr>
+                </a:tc>
+                <a:tc>
+                  <a:txBody>
+                    <a:bodyPr/>
+                    <a:lstStyle/>
+                    <a:p>
+                      <a:pPr algn="ctr"/>
+                      <a:r>
+                        <a:rPr sz="1400" b="0">
+                          <a:solidFill>
+                            <a:srgbClr val="E8EDF2"/>
+                          </a:solidFill>
+                          <a:latin typeface="Segoe UI"/>
+                        </a:rPr>
+                        <a:t>n/a</a:t>
+                      </a:r>
+                    </a:p>
+                  </a:txBody>
+                  <a:tcPr marL="45720" marR="45720" marT="27432" marB="27432">
+                    <a:solidFill>
+                      <a:srgbClr val="1A222C"/>
+                    </a:solidFill>
+                  </a:tcPr>
+                </a:tc>
+                <a:tc>
+                  <a:txBody>
+                    <a:bodyPr/>
+                    <a:lstStyle/>
+                    <a:p>
+                      <a:pPr algn="ctr"/>
+                      <a:r>
+                        <a:rPr sz="1400" b="0">
+                          <a:solidFill>
+                            <a:srgbClr val="E8EDF2"/>
+                          </a:solidFill>
+                          <a:latin typeface="Segoe UI"/>
+                        </a:rPr>
+                        <a:t>n/a</a:t>
+                      </a:r>
+                    </a:p>
+                  </a:txBody>
+                  <a:tcPr marL="45720" marR="45720" marT="27432" marB="27432">
                     <a:solidFill>
                       <a:srgbClr val="1A222C"/>
                     </a:solidFill>
                   </a:tcPr>
                 </a:tc>
               </a:tr>
-              <a:tr h="731520">
+              <a:tr h="640080">
                 <a:tc>
                   <a:txBody>
                     <a:bodyPr/>
@@ -5173,184 +8419,178 @@
                     <a:p>
                       <a:pPr algn="l"/>
                       <a:r>
-                        <a:rPr sz="1600" b="0">
-                          <a:solidFill>
-                            <a:srgbClr val="E8EDF2"/>
-                          </a:solidFill>
-                          <a:latin typeface="Segoe UI"/>
-                        </a:rPr>
-                        <a:t>Per-push cost (475,994 events)</a:t>
-                      </a:r>
-                    </a:p>
-                  </a:txBody>
-                  <a:tcPr marL="137160" marR="137160" marT="45720" marB="45720">
-                    <a:solidFill>
-                      <a:srgbClr val="1A222C"/>
-                    </a:solidFill>
-                  </a:tcPr>
-                </a:tc>
-                <a:tc>
-                  <a:txBody>
-                    <a:bodyPr/>
-                    <a:lstStyle/>
-                    <a:p>
-                      <a:pPr algn="r"/>
-                      <a:r>
-                        <a:rPr sz="1600" b="0">
-                          <a:solidFill>
-                            <a:srgbClr val="E8EDF2"/>
-                          </a:solidFill>
-                          <a:latin typeface="Segoe UI"/>
-                        </a:rPr>
-                        <a:t>40.3 us/event  (19.2 s total)</a:t>
-                      </a:r>
-                    </a:p>
-                  </a:txBody>
-                  <a:tcPr marL="137160" marR="137160" marT="45720" marB="45720">
-                    <a:solidFill>
-                      <a:srgbClr val="1A222C"/>
-                    </a:solidFill>
-                  </a:tcPr>
-                </a:tc>
-              </a:tr>
-              <a:tr h="731520">
-                <a:tc>
-                  <a:txBody>
-                    <a:bodyPr/>
-                    <a:lstStyle/>
-                    <a:p>
-                      <a:pPr algn="l"/>
-                      <a:r>
-                        <a:rPr sz="1600" b="0">
-                          <a:solidFill>
-                            <a:srgbClr val="E8EDF2"/>
-                          </a:solidFill>
-                          <a:latin typeface="Segoe UI"/>
-                        </a:rPr>
-                        <a:t>Finalize (drain + flush)</a:t>
-                      </a:r>
-                    </a:p>
-                  </a:txBody>
-                  <a:tcPr marL="137160" marR="137160" marT="45720" marB="45720">
-                    <a:solidFill>
-                      <a:srgbClr val="1A222C"/>
-                    </a:solidFill>
-                  </a:tcPr>
-                </a:tc>
-                <a:tc>
-                  <a:txBody>
-                    <a:bodyPr/>
-                    <a:lstStyle/>
-                    <a:p>
-                      <a:pPr algn="r"/>
-                      <a:r>
-                        <a:rPr sz="1600" b="0">
-                          <a:solidFill>
-                            <a:srgbClr val="E8EDF2"/>
-                          </a:solidFill>
-                          <a:latin typeface="Segoe UI"/>
-                        </a:rPr>
-                        <a:t>0.004 s</a:t>
-                      </a:r>
-                    </a:p>
-                  </a:txBody>
-                  <a:tcPr marL="137160" marR="137160" marT="45720" marB="45720">
-                    <a:solidFill>
-                      <a:srgbClr val="1A222C"/>
-                    </a:solidFill>
-                  </a:tcPr>
-                </a:tc>
-              </a:tr>
-              <a:tr h="731520">
-                <a:tc>
-                  <a:txBody>
-                    <a:bodyPr/>
-                    <a:lstStyle/>
-                    <a:p>
-                      <a:pPr algn="l"/>
-                      <a:r>
-                        <a:rPr sz="1600" b="1">
-                          <a:solidFill>
-                            <a:srgbClr val="FFFFFF"/>
-                          </a:solidFill>
-                          <a:latin typeface="Segoe UI"/>
-                        </a:rPr>
-                        <a:t>Total streaming overhead (self-timed)</a:t>
-                      </a:r>
-                    </a:p>
-                  </a:txBody>
-                  <a:tcPr marL="137160" marR="137160" marT="45720" marB="45720">
-                    <a:solidFill>
-                      <a:srgbClr val="12202B"/>
-                    </a:solidFill>
-                  </a:tcPr>
-                </a:tc>
-                <a:tc>
-                  <a:txBody>
-                    <a:bodyPr/>
-                    <a:lstStyle/>
-                    <a:p>
-                      <a:pPr algn="r"/>
-                      <a:r>
-                        <a:rPr sz="1600" b="1">
-                          <a:solidFill>
-                            <a:srgbClr val="FFFFFF"/>
-                          </a:solidFill>
-                          <a:latin typeface="Segoe UI"/>
-                        </a:rPr>
-                        <a:t>24.7 s</a:t>
-                      </a:r>
-                    </a:p>
-                  </a:txBody>
-                  <a:tcPr marL="137160" marR="137160" marT="45720" marB="45720">
-                    <a:solidFill>
-                      <a:srgbClr val="12202B"/>
-                    </a:solidFill>
-                  </a:tcPr>
-                </a:tc>
-              </a:tr>
-              <a:tr h="731520">
-                <a:tc>
-                  <a:txBody>
-                    <a:bodyPr/>
-                    <a:lstStyle/>
-                    <a:p>
-                      <a:pPr algn="l"/>
-                      <a:r>
-                        <a:rPr sz="1600" b="0">
-                          <a:solidFill>
-                            <a:srgbClr val="E8EDF2"/>
-                          </a:solidFill>
-                          <a:latin typeface="Segoe UI"/>
-                        </a:rPr>
-                        <a:t>Wall time (baseline -&gt; streaming)</a:t>
-                      </a:r>
-                    </a:p>
-                  </a:txBody>
-                  <a:tcPr marL="137160" marR="137160" marT="45720" marB="45720">
-                    <a:solidFill>
-                      <a:srgbClr val="1A222C"/>
-                    </a:solidFill>
-                  </a:tcPr>
-                </a:tc>
-                <a:tc>
-                  <a:txBody>
-                    <a:bodyPr/>
-                    <a:lstStyle/>
-                    <a:p>
-                      <a:pPr algn="r"/>
-                      <a:r>
-                        <a:rPr sz="1600" b="0">
-                          <a:solidFill>
-                            <a:srgbClr val="E8EDF2"/>
-                          </a:solidFill>
-                          <a:latin typeface="Segoe UI"/>
-                        </a:rPr>
-                        <a:t>1030 -&gt; 943 s  (arm-to-arm, ~0 %)</a:t>
-                      </a:r>
-                    </a:p>
-                  </a:txBody>
-                  <a:tcPr marL="137160" marR="137160" marT="45720" marB="45720">
+                        <a:rPr sz="1400" b="0">
+                          <a:solidFill>
+                            <a:srgbClr val="4FC3F7"/>
+                          </a:solidFill>
+                          <a:latin typeface="Segoe UI"/>
+                        </a:rPr>
+                        <a:t>streaming r3</a:t>
+                      </a:r>
+                    </a:p>
+                  </a:txBody>
+                  <a:tcPr marL="45720" marR="45720" marT="27432" marB="27432">
+                    <a:solidFill>
+                      <a:srgbClr val="1A222C"/>
+                    </a:solidFill>
+                  </a:tcPr>
+                </a:tc>
+                <a:tc>
+                  <a:txBody>
+                    <a:bodyPr/>
+                    <a:lstStyle/>
+                    <a:p>
+                      <a:pPr algn="ctr"/>
+                      <a:r>
+                        <a:rPr sz="1400" b="0">
+                          <a:solidFill>
+                            <a:srgbClr val="E8EDF2"/>
+                          </a:solidFill>
+                          <a:latin typeface="Segoe UI"/>
+                        </a:rPr>
+                        <a:t>-</a:t>
+                      </a:r>
+                    </a:p>
+                  </a:txBody>
+                  <a:tcPr marL="45720" marR="45720" marT="27432" marB="27432">
+                    <a:solidFill>
+                      <a:srgbClr val="1A222C"/>
+                    </a:solidFill>
+                  </a:tcPr>
+                </a:tc>
+                <a:tc>
+                  <a:txBody>
+                    <a:bodyPr/>
+                    <a:lstStyle/>
+                    <a:p>
+                      <a:pPr algn="ctr"/>
+                      <a:r>
+                        <a:rPr sz="1400" b="0">
+                          <a:solidFill>
+                            <a:srgbClr val="E8EDF2"/>
+                          </a:solidFill>
+                          <a:latin typeface="Segoe UI"/>
+                        </a:rPr>
+                        <a:t>-</a:t>
+                      </a:r>
+                    </a:p>
+                  </a:txBody>
+                  <a:tcPr marL="45720" marR="45720" marT="27432" marB="27432">
+                    <a:solidFill>
+                      <a:srgbClr val="1A222C"/>
+                    </a:solidFill>
+                  </a:tcPr>
+                </a:tc>
+                <a:tc>
+                  <a:txBody>
+                    <a:bodyPr/>
+                    <a:lstStyle/>
+                    <a:p>
+                      <a:pPr algn="ctr"/>
+                      <a:r>
+                        <a:rPr sz="1400" b="0">
+                          <a:solidFill>
+                            <a:srgbClr val="E8EDF2"/>
+                          </a:solidFill>
+                          <a:latin typeface="Segoe UI"/>
+                        </a:rPr>
+                        <a:t>-</a:t>
+                      </a:r>
+                    </a:p>
+                  </a:txBody>
+                  <a:tcPr marL="45720" marR="45720" marT="27432" marB="27432">
+                    <a:solidFill>
+                      <a:srgbClr val="1A222C"/>
+                    </a:solidFill>
+                  </a:tcPr>
+                </a:tc>
+                <a:tc>
+                  <a:txBody>
+                    <a:bodyPr/>
+                    <a:lstStyle/>
+                    <a:p>
+                      <a:pPr algn="ctr"/>
+                      <a:r>
+                        <a:rPr sz="1400" b="0">
+                          <a:solidFill>
+                            <a:srgbClr val="E8EDF2"/>
+                          </a:solidFill>
+                          <a:latin typeface="Segoe UI"/>
+                        </a:rPr>
+                        <a:t>-</a:t>
+                      </a:r>
+                    </a:p>
+                  </a:txBody>
+                  <a:tcPr marL="45720" marR="45720" marT="27432" marB="27432">
+                    <a:solidFill>
+                      <a:srgbClr val="1A222C"/>
+                    </a:solidFill>
+                  </a:tcPr>
+                </a:tc>
+                <a:tc>
+                  <a:txBody>
+                    <a:bodyPr/>
+                    <a:lstStyle/>
+                    <a:p>
+                      <a:pPr algn="ctr"/>
+                      <a:r>
+                        <a:rPr sz="1400" b="0">
+                          <a:solidFill>
+                            <a:srgbClr val="E8EDF2"/>
+                          </a:solidFill>
+                          <a:latin typeface="Segoe UI"/>
+                        </a:rPr>
+                        <a:t>-</a:t>
+                      </a:r>
+                    </a:p>
+                  </a:txBody>
+                  <a:tcPr marL="45720" marR="45720" marT="27432" marB="27432">
+                    <a:solidFill>
+                      <a:srgbClr val="1A222C"/>
+                    </a:solidFill>
+                  </a:tcPr>
+                </a:tc>
+                <a:tc>
+                  <a:txBody>
+                    <a:bodyPr/>
+                    <a:lstStyle/>
+                    <a:p>
+                      <a:pPr algn="ctr"/>
+                      <a:r>
+                        <a:rPr sz="1400" b="0">
+                          <a:solidFill>
+                            <a:srgbClr val="E8EDF2"/>
+                          </a:solidFill>
+                          <a:latin typeface="Segoe UI"/>
+                        </a:rPr>
+                        <a:t>-</a:t>
+                      </a:r>
+                    </a:p>
+                  </a:txBody>
+                  <a:tcPr marL="45720" marR="45720" marT="27432" marB="27432">
+                    <a:solidFill>
+                      <a:srgbClr val="1A222C"/>
+                    </a:solidFill>
+                  </a:tcPr>
+                </a:tc>
+                <a:tc>
+                  <a:txBody>
+                    <a:bodyPr/>
+                    <a:lstStyle/>
+                    <a:p>
+                      <a:pPr algn="ctr"/>
+                      <a:r>
+                        <a:rPr sz="1400" b="0">
+                          <a:solidFill>
+                            <a:srgbClr val="E8EDF2"/>
+                          </a:solidFill>
+                          <a:latin typeface="Segoe UI"/>
+                        </a:rPr>
+                        <a:t>-</a:t>
+                      </a:r>
+                    </a:p>
+                  </a:txBody>
+                  <a:tcPr marL="45720" marR="45720" marT="27432" marB="27432">
                     <a:solidFill>
                       <a:srgbClr val="1A222C"/>
                     </a:solidFill>
@@ -5369,8 +8609,8 @@
         </p:nvSpPr>
         <p:spPr>
           <a:xfrm>
-            <a:off x="731520" y="6309360"/>
-            <a:ext cx="10698480" cy="457200"/>
+            <a:off x="457200" y="6126480"/>
+            <a:ext cx="11247120" cy="548640"/>
           </a:xfrm>
           <a:prstGeom prst="rect">
             <a:avLst/>
@@ -5391,7 +8631,7 @@
                 </a:solidFill>
                 <a:latin typeface="Segoe UI"/>
               </a:rPr>
-              <a:t>Self-timed overhead = Init + Push + Send + Finalize, measured inside the process. Per-push runs off the app critical path (drain thread); app pays only a ~2 us enqueue.</a:t>
+              <a:t>send = app-critical-path enqueue (total s). push/init/finalize = drain-thread + one-time connector cost (total s). Baseline has no connector (-). overhead in seconds vs baseline.</a:t>
             </a:r>
           </a:p>
         </p:txBody>

--- a/deliverables/paper_overhead_tables.pptx
+++ b/deliverables/paper_overhead_tables.pptx
@@ -6541,7 +6541,7 @@
                 </a:solidFill>
                 <a:latin typeface="Segoe UI"/>
               </a:rPr>
-              <a:t>MPI unsupported over CXI. Fidelity EXACT (32-&gt;1 aggregated). Workload is I/O-trivial (0.34 s); per-event cost is the metric, wall n/a.</a:t>
+              <a:t>MPI unsupported over CXI. Paced (IO_SLEEP_MS) for a comparable ~600 s wall. Fidelity EXACT (32-&gt;1 aggregated).</a:t>
             </a:r>
           </a:p>
         </p:txBody>
@@ -6556,7 +6556,7 @@
         </p:nvGraphicFramePr>
         <p:xfrm>
           <a:off x="365760" y="2011680"/>
-          <a:ext cx="11429999" cy="3200400"/>
+          <a:ext cx="11429999" cy="1920239"/>
         </p:xfrm>
         <a:graphic>
           <a:graphicData uri="http://schemas.openxmlformats.org/drawingml/2006/table">
@@ -6574,7 +6574,7 @@
                 <a:gridCol w="1358537"/>
                 <a:gridCol w="1358537"/>
               </a:tblGrid>
-              <a:tr h="640080">
+              <a:tr h="640079">
                 <a:tc>
                   <a:txBody>
                     <a:bodyPr/>
@@ -6760,7 +6760,7 @@
                   </a:tcPr>
                 </a:tc>
               </a:tr>
-              <a:tr h="640080">
+              <a:tr h="640079">
                 <a:tc>
                   <a:txBody>
                     <a:bodyPr/>
@@ -6912,7 +6912,7 @@
                           </a:solidFill>
                           <a:latin typeface="Segoe UI"/>
                         </a:rPr>
-                        <a:t>0.34</a:t>
+                        <a:t>602.4</a:t>
                       </a:r>
                     </a:p>
                   </a:txBody>
@@ -6935,7 +6935,7 @@
                           </a:solidFill>
                           <a:latin typeface="Segoe UI"/>
                         </a:rPr>
-                        <a:t>n/a</a:t>
+                        <a:t>0.0</a:t>
                       </a:r>
                     </a:p>
                   </a:txBody>
@@ -6946,7 +6946,7 @@
                   </a:tcPr>
                 </a:tc>
               </a:tr>
-              <a:tr h="640080">
+              <a:tr h="640081">
                 <a:tc>
                   <a:txBody>
                     <a:bodyPr/>
@@ -6983,7 +6983,7 @@
                           </a:solidFill>
                           <a:latin typeface="Segoe UI"/>
                         </a:rPr>
-                        <a:t>26,566</a:t>
+                        <a:t>39,770</a:t>
                       </a:r>
                     </a:p>
                   </a:txBody>
@@ -7006,7 +7006,7 @@
                           </a:solidFill>
                           <a:latin typeface="Segoe UI"/>
                         </a:rPr>
-                        <a:t>7.32</a:t>
+                        <a:t>15.0</a:t>
                       </a:r>
                     </a:p>
                   </a:txBody>
@@ -7029,7 +7029,7 @@
                           </a:solidFill>
                           <a:latin typeface="Segoe UI"/>
                         </a:rPr>
-                        <a:t>35.09</a:t>
+                        <a:t>67.2</a:t>
                       </a:r>
                     </a:p>
                   </a:txBody>
@@ -7052,7 +7052,7 @@
                           </a:solidFill>
                           <a:latin typeface="Segoe UI"/>
                         </a:rPr>
-                        <a:t>3.05</a:t>
+                        <a:t>2.70</a:t>
                       </a:r>
                     </a:p>
                   </a:txBody>
@@ -7075,7 +7075,7 @@
                           </a:solidFill>
                           <a:latin typeface="Segoe UI"/>
                         </a:rPr>
-                        <a:t>1.14</a:t>
+                        <a:t>0.003</a:t>
                       </a:r>
                     </a:p>
                   </a:txBody>
@@ -7098,7 +7098,7 @@
                           </a:solidFill>
                           <a:latin typeface="Segoe UI"/>
                         </a:rPr>
-                        <a:t>0.34</a:t>
+                        <a:t>600.7</a:t>
                       </a:r>
                     </a:p>
                   </a:txBody>
@@ -7121,379 +7121,7 @@
                           </a:solidFill>
                           <a:latin typeface="Segoe UI"/>
                         </a:rPr>
-                        <a:t>n/a</a:t>
-                      </a:r>
-                    </a:p>
-                  </a:txBody>
-                  <a:tcPr marL="45720" marR="45720" marT="27432" marB="27432">
-                    <a:solidFill>
-                      <a:srgbClr val="1A222C"/>
-                    </a:solidFill>
-                  </a:tcPr>
-                </a:tc>
-              </a:tr>
-              <a:tr h="640080">
-                <a:tc>
-                  <a:txBody>
-                    <a:bodyPr/>
-                    <a:lstStyle/>
-                    <a:p>
-                      <a:pPr algn="l"/>
-                      <a:r>
-                        <a:rPr sz="1400" b="0">
-                          <a:solidFill>
-                            <a:srgbClr val="4FC3F7"/>
-                          </a:solidFill>
-                          <a:latin typeface="Segoe UI"/>
-                        </a:rPr>
-                        <a:t>streaming r2</a:t>
-                      </a:r>
-                    </a:p>
-                  </a:txBody>
-                  <a:tcPr marL="45720" marR="45720" marT="27432" marB="27432">
-                    <a:solidFill>
-                      <a:srgbClr val="1A222C"/>
-                    </a:solidFill>
-                  </a:tcPr>
-                </a:tc>
-                <a:tc>
-                  <a:txBody>
-                    <a:bodyPr/>
-                    <a:lstStyle/>
-                    <a:p>
-                      <a:pPr algn="ctr"/>
-                      <a:r>
-                        <a:rPr sz="1400" b="0">
-                          <a:solidFill>
-                            <a:srgbClr val="E8EDF2"/>
-                          </a:solidFill>
-                          <a:latin typeface="Segoe UI"/>
-                        </a:rPr>
-                        <a:t>26,566</a:t>
-                      </a:r>
-                    </a:p>
-                  </a:txBody>
-                  <a:tcPr marL="45720" marR="45720" marT="27432" marB="27432">
-                    <a:solidFill>
-                      <a:srgbClr val="1A222C"/>
-                    </a:solidFill>
-                  </a:tcPr>
-                </a:tc>
-                <a:tc>
-                  <a:txBody>
-                    <a:bodyPr/>
-                    <a:lstStyle/>
-                    <a:p>
-                      <a:pPr algn="ctr"/>
-                      <a:r>
-                        <a:rPr sz="1400" b="0">
-                          <a:solidFill>
-                            <a:srgbClr val="E8EDF2"/>
-                          </a:solidFill>
-                          <a:latin typeface="Segoe UI"/>
-                        </a:rPr>
-                        <a:t>11.95</a:t>
-                      </a:r>
-                    </a:p>
-                  </a:txBody>
-                  <a:tcPr marL="45720" marR="45720" marT="27432" marB="27432">
-                    <a:solidFill>
-                      <a:srgbClr val="1A222C"/>
-                    </a:solidFill>
-                  </a:tcPr>
-                </a:tc>
-                <a:tc>
-                  <a:txBody>
-                    <a:bodyPr/>
-                    <a:lstStyle/>
-                    <a:p>
-                      <a:pPr algn="ctr"/>
-                      <a:r>
-                        <a:rPr sz="1400" b="0">
-                          <a:solidFill>
-                            <a:srgbClr val="E8EDF2"/>
-                          </a:solidFill>
-                          <a:latin typeface="Segoe UI"/>
-                        </a:rPr>
-                        <a:t>32.73</a:t>
-                      </a:r>
-                    </a:p>
-                  </a:txBody>
-                  <a:tcPr marL="45720" marR="45720" marT="27432" marB="27432">
-                    <a:solidFill>
-                      <a:srgbClr val="1A222C"/>
-                    </a:solidFill>
-                  </a:tcPr>
-                </a:tc>
-                <a:tc>
-                  <a:txBody>
-                    <a:bodyPr/>
-                    <a:lstStyle/>
-                    <a:p>
-                      <a:pPr algn="ctr"/>
-                      <a:r>
-                        <a:rPr sz="1400" b="0">
-                          <a:solidFill>
-                            <a:srgbClr val="E8EDF2"/>
-                          </a:solidFill>
-                          <a:latin typeface="Segoe UI"/>
-                        </a:rPr>
-                        <a:t>46.3</a:t>
-                      </a:r>
-                    </a:p>
-                  </a:txBody>
-                  <a:tcPr marL="45720" marR="45720" marT="27432" marB="27432">
-                    <a:solidFill>
-                      <a:srgbClr val="1A222C"/>
-                    </a:solidFill>
-                  </a:tcPr>
-                </a:tc>
-                <a:tc>
-                  <a:txBody>
-                    <a:bodyPr/>
-                    <a:lstStyle/>
-                    <a:p>
-                      <a:pPr algn="ctr"/>
-                      <a:r>
-                        <a:rPr sz="1400" b="0">
-                          <a:solidFill>
-                            <a:srgbClr val="E8EDF2"/>
-                          </a:solidFill>
-                          <a:latin typeface="Segoe UI"/>
-                        </a:rPr>
-                        <a:t>0.37</a:t>
-                      </a:r>
-                    </a:p>
-                  </a:txBody>
-                  <a:tcPr marL="45720" marR="45720" marT="27432" marB="27432">
-                    <a:solidFill>
-                      <a:srgbClr val="1A222C"/>
-                    </a:solidFill>
-                  </a:tcPr>
-                </a:tc>
-                <a:tc>
-                  <a:txBody>
-                    <a:bodyPr/>
-                    <a:lstStyle/>
-                    <a:p>
-                      <a:pPr algn="ctr"/>
-                      <a:r>
-                        <a:rPr sz="1400" b="0">
-                          <a:solidFill>
-                            <a:srgbClr val="E8EDF2"/>
-                          </a:solidFill>
-                          <a:latin typeface="Segoe UI"/>
-                        </a:rPr>
-                        <a:t>0.34</a:t>
-                      </a:r>
-                    </a:p>
-                  </a:txBody>
-                  <a:tcPr marL="45720" marR="45720" marT="27432" marB="27432">
-                    <a:solidFill>
-                      <a:srgbClr val="1A222C"/>
-                    </a:solidFill>
-                  </a:tcPr>
-                </a:tc>
-                <a:tc>
-                  <a:txBody>
-                    <a:bodyPr/>
-                    <a:lstStyle/>
-                    <a:p>
-                      <a:pPr algn="ctr"/>
-                      <a:r>
-                        <a:rPr sz="1400" b="0">
-                          <a:solidFill>
-                            <a:srgbClr val="E8EDF2"/>
-                          </a:solidFill>
-                          <a:latin typeface="Segoe UI"/>
-                        </a:rPr>
-                        <a:t>n/a</a:t>
-                      </a:r>
-                    </a:p>
-                  </a:txBody>
-                  <a:tcPr marL="45720" marR="45720" marT="27432" marB="27432">
-                    <a:solidFill>
-                      <a:srgbClr val="1A222C"/>
-                    </a:solidFill>
-                  </a:tcPr>
-                </a:tc>
-              </a:tr>
-              <a:tr h="640080">
-                <a:tc>
-                  <a:txBody>
-                    <a:bodyPr/>
-                    <a:lstStyle/>
-                    <a:p>
-                      <a:pPr algn="l"/>
-                      <a:r>
-                        <a:rPr sz="1400" b="0">
-                          <a:solidFill>
-                            <a:srgbClr val="4FC3F7"/>
-                          </a:solidFill>
-                          <a:latin typeface="Segoe UI"/>
-                        </a:rPr>
-                        <a:t>streaming r3</a:t>
-                      </a:r>
-                    </a:p>
-                  </a:txBody>
-                  <a:tcPr marL="45720" marR="45720" marT="27432" marB="27432">
-                    <a:solidFill>
-                      <a:srgbClr val="1A222C"/>
-                    </a:solidFill>
-                  </a:tcPr>
-                </a:tc>
-                <a:tc>
-                  <a:txBody>
-                    <a:bodyPr/>
-                    <a:lstStyle/>
-                    <a:p>
-                      <a:pPr algn="ctr"/>
-                      <a:r>
-                        <a:rPr sz="1400" b="0">
-                          <a:solidFill>
-                            <a:srgbClr val="E8EDF2"/>
-                          </a:solidFill>
-                          <a:latin typeface="Segoe UI"/>
-                        </a:rPr>
-                        <a:t>26,566</a:t>
-                      </a:r>
-                    </a:p>
-                  </a:txBody>
-                  <a:tcPr marL="45720" marR="45720" marT="27432" marB="27432">
-                    <a:solidFill>
-                      <a:srgbClr val="1A222C"/>
-                    </a:solidFill>
-                  </a:tcPr>
-                </a:tc>
-                <a:tc>
-                  <a:txBody>
-                    <a:bodyPr/>
-                    <a:lstStyle/>
-                    <a:p>
-                      <a:pPr algn="ctr"/>
-                      <a:r>
-                        <a:rPr sz="1400" b="0">
-                          <a:solidFill>
-                            <a:srgbClr val="E8EDF2"/>
-                          </a:solidFill>
-                          <a:latin typeface="Segoe UI"/>
-                        </a:rPr>
-                        <a:t>15.74</a:t>
-                      </a:r>
-                    </a:p>
-                  </a:txBody>
-                  <a:tcPr marL="45720" marR="45720" marT="27432" marB="27432">
-                    <a:solidFill>
-                      <a:srgbClr val="1A222C"/>
-                    </a:solidFill>
-                  </a:tcPr>
-                </a:tc>
-                <a:tc>
-                  <a:txBody>
-                    <a:bodyPr/>
-                    <a:lstStyle/>
-                    <a:p>
-                      <a:pPr algn="ctr"/>
-                      <a:r>
-                        <a:rPr sz="1400" b="0">
-                          <a:solidFill>
-                            <a:srgbClr val="E8EDF2"/>
-                          </a:solidFill>
-                          <a:latin typeface="Segoe UI"/>
-                        </a:rPr>
-                        <a:t>35.21</a:t>
-                      </a:r>
-                    </a:p>
-                  </a:txBody>
-                  <a:tcPr marL="45720" marR="45720" marT="27432" marB="27432">
-                    <a:solidFill>
-                      <a:srgbClr val="1A222C"/>
-                    </a:solidFill>
-                  </a:tcPr>
-                </a:tc>
-                <a:tc>
-                  <a:txBody>
-                    <a:bodyPr/>
-                    <a:lstStyle/>
-                    <a:p>
-                      <a:pPr algn="ctr"/>
-                      <a:r>
-                        <a:rPr sz="1400" b="0">
-                          <a:solidFill>
-                            <a:srgbClr val="E8EDF2"/>
-                          </a:solidFill>
-                          <a:latin typeface="Segoe UI"/>
-                        </a:rPr>
-                        <a:t>3.86</a:t>
-                      </a:r>
-                    </a:p>
-                  </a:txBody>
-                  <a:tcPr marL="45720" marR="45720" marT="27432" marB="27432">
-                    <a:solidFill>
-                      <a:srgbClr val="1A222C"/>
-                    </a:solidFill>
-                  </a:tcPr>
-                </a:tc>
-                <a:tc>
-                  <a:txBody>
-                    <a:bodyPr/>
-                    <a:lstStyle/>
-                    <a:p>
-                      <a:pPr algn="ctr"/>
-                      <a:r>
-                        <a:rPr sz="1400" b="0">
-                          <a:solidFill>
-                            <a:srgbClr val="E8EDF2"/>
-                          </a:solidFill>
-                          <a:latin typeface="Segoe UI"/>
-                        </a:rPr>
-                        <a:t>0.004</a:t>
-                      </a:r>
-                    </a:p>
-                  </a:txBody>
-                  <a:tcPr marL="45720" marR="45720" marT="27432" marB="27432">
-                    <a:solidFill>
-                      <a:srgbClr val="1A222C"/>
-                    </a:solidFill>
-                  </a:tcPr>
-                </a:tc>
-                <a:tc>
-                  <a:txBody>
-                    <a:bodyPr/>
-                    <a:lstStyle/>
-                    <a:p>
-                      <a:pPr algn="ctr"/>
-                      <a:r>
-                        <a:rPr sz="1400" b="0">
-                          <a:solidFill>
-                            <a:srgbClr val="E8EDF2"/>
-                          </a:solidFill>
-                          <a:latin typeface="Segoe UI"/>
-                        </a:rPr>
-                        <a:t>0.34</a:t>
-                      </a:r>
-                    </a:p>
-                  </a:txBody>
-                  <a:tcPr marL="45720" marR="45720" marT="27432" marB="27432">
-                    <a:solidFill>
-                      <a:srgbClr val="1A222C"/>
-                    </a:solidFill>
-                  </a:tcPr>
-                </a:tc>
-                <a:tc>
-                  <a:txBody>
-                    <a:bodyPr/>
-                    <a:lstStyle/>
-                    <a:p>
-                      <a:pPr algn="ctr"/>
-                      <a:r>
-                        <a:rPr sz="1400" b="0">
-                          <a:solidFill>
-                            <a:srgbClr val="E8EDF2"/>
-                          </a:solidFill>
-                          <a:latin typeface="Segoe UI"/>
-                        </a:rPr>
-                        <a:t>n/a</a:t>
+                        <a:t>-1.7</a:t>
                       </a:r>
                     </a:p>
                   </a:txBody>
@@ -7634,7 +7262,7 @@
                 </a:solidFill>
                 <a:latin typeface="Segoe UI"/>
               </a:rPr>
-              <a:t>TensorFlow NPZ data-gen. Fidelity EXACT (32-&gt;1 aggregated). Per-event cost is the metric.</a:t>
+              <a:t>TensorFlow NPZ data-gen. Fidelity EXACT (32-&gt;1 aggregated). Wall = cold/warm-dominated -&gt; per-event cost is the metric.</a:t>
             </a:r>
           </a:p>
         </p:txBody>
@@ -7649,7 +7277,7 @@
         </p:nvGraphicFramePr>
         <p:xfrm>
           <a:off x="365760" y="2011680"/>
-          <a:ext cx="11429999" cy="3200400"/>
+          <a:ext cx="11429999" cy="2560320"/>
         </p:xfrm>
         <a:graphic>
           <a:graphicData uri="http://schemas.openxmlformats.org/drawingml/2006/table">
@@ -8099,7 +7727,7 @@
                           </a:solidFill>
                           <a:latin typeface="Segoe UI"/>
                         </a:rPr>
-                        <a:t>3.00</a:t>
+                        <a:t>3.0</a:t>
                       </a:r>
                     </a:p>
                   </a:txBody>
@@ -8122,7 +7750,7 @@
                           </a:solidFill>
                           <a:latin typeface="Segoe UI"/>
                         </a:rPr>
-                        <a:t>37.96</a:t>
+                        <a:t>38.0</a:t>
                       </a:r>
                     </a:p>
                   </a:txBody>
@@ -8285,7 +7913,7 @@
                           </a:solidFill>
                           <a:latin typeface="Segoe UI"/>
                         </a:rPr>
-                        <a:t>4.62</a:t>
+                        <a:t>4.6</a:t>
                       </a:r>
                     </a:p>
                   </a:txBody>
@@ -8308,7 +7936,7 @@
                           </a:solidFill>
                           <a:latin typeface="Segoe UI"/>
                         </a:rPr>
-                        <a:t>42.54</a:t>
+                        <a:t>42.5</a:t>
                       </a:r>
                     </a:p>
                   </a:txBody>
@@ -8331,7 +7959,7 @@
                           </a:solidFill>
                           <a:latin typeface="Segoe UI"/>
                         </a:rPr>
-                        <a:t>4.10</a:t>
+                        <a:t>4.09</a:t>
                       </a:r>
                     </a:p>
                   </a:txBody>
@@ -8401,192 +8029,6 @@
                           <a:latin typeface="Segoe UI"/>
                         </a:rPr>
                         <a:t>n/a</a:t>
-                      </a:r>
-                    </a:p>
-                  </a:txBody>
-                  <a:tcPr marL="45720" marR="45720" marT="27432" marB="27432">
-                    <a:solidFill>
-                      <a:srgbClr val="1A222C"/>
-                    </a:solidFill>
-                  </a:tcPr>
-                </a:tc>
-              </a:tr>
-              <a:tr h="640080">
-                <a:tc>
-                  <a:txBody>
-                    <a:bodyPr/>
-                    <a:lstStyle/>
-                    <a:p>
-                      <a:pPr algn="l"/>
-                      <a:r>
-                        <a:rPr sz="1400" b="0">
-                          <a:solidFill>
-                            <a:srgbClr val="4FC3F7"/>
-                          </a:solidFill>
-                          <a:latin typeface="Segoe UI"/>
-                        </a:rPr>
-                        <a:t>streaming r3</a:t>
-                      </a:r>
-                    </a:p>
-                  </a:txBody>
-                  <a:tcPr marL="45720" marR="45720" marT="27432" marB="27432">
-                    <a:solidFill>
-                      <a:srgbClr val="1A222C"/>
-                    </a:solidFill>
-                  </a:tcPr>
-                </a:tc>
-                <a:tc>
-                  <a:txBody>
-                    <a:bodyPr/>
-                    <a:lstStyle/>
-                    <a:p>
-                      <a:pPr algn="ctr"/>
-                      <a:r>
-                        <a:rPr sz="1400" b="0">
-                          <a:solidFill>
-                            <a:srgbClr val="E8EDF2"/>
-                          </a:solidFill>
-                          <a:latin typeface="Segoe UI"/>
-                        </a:rPr>
-                        <a:t>-</a:t>
-                      </a:r>
-                    </a:p>
-                  </a:txBody>
-                  <a:tcPr marL="45720" marR="45720" marT="27432" marB="27432">
-                    <a:solidFill>
-                      <a:srgbClr val="1A222C"/>
-                    </a:solidFill>
-                  </a:tcPr>
-                </a:tc>
-                <a:tc>
-                  <a:txBody>
-                    <a:bodyPr/>
-                    <a:lstStyle/>
-                    <a:p>
-                      <a:pPr algn="ctr"/>
-                      <a:r>
-                        <a:rPr sz="1400" b="0">
-                          <a:solidFill>
-                            <a:srgbClr val="E8EDF2"/>
-                          </a:solidFill>
-                          <a:latin typeface="Segoe UI"/>
-                        </a:rPr>
-                        <a:t>-</a:t>
-                      </a:r>
-                    </a:p>
-                  </a:txBody>
-                  <a:tcPr marL="45720" marR="45720" marT="27432" marB="27432">
-                    <a:solidFill>
-                      <a:srgbClr val="1A222C"/>
-                    </a:solidFill>
-                  </a:tcPr>
-                </a:tc>
-                <a:tc>
-                  <a:txBody>
-                    <a:bodyPr/>
-                    <a:lstStyle/>
-                    <a:p>
-                      <a:pPr algn="ctr"/>
-                      <a:r>
-                        <a:rPr sz="1400" b="0">
-                          <a:solidFill>
-                            <a:srgbClr val="E8EDF2"/>
-                          </a:solidFill>
-                          <a:latin typeface="Segoe UI"/>
-                        </a:rPr>
-                        <a:t>-</a:t>
-                      </a:r>
-                    </a:p>
-                  </a:txBody>
-                  <a:tcPr marL="45720" marR="45720" marT="27432" marB="27432">
-                    <a:solidFill>
-                      <a:srgbClr val="1A222C"/>
-                    </a:solidFill>
-                  </a:tcPr>
-                </a:tc>
-                <a:tc>
-                  <a:txBody>
-                    <a:bodyPr/>
-                    <a:lstStyle/>
-                    <a:p>
-                      <a:pPr algn="ctr"/>
-                      <a:r>
-                        <a:rPr sz="1400" b="0">
-                          <a:solidFill>
-                            <a:srgbClr val="E8EDF2"/>
-                          </a:solidFill>
-                          <a:latin typeface="Segoe UI"/>
-                        </a:rPr>
-                        <a:t>-</a:t>
-                      </a:r>
-                    </a:p>
-                  </a:txBody>
-                  <a:tcPr marL="45720" marR="45720" marT="27432" marB="27432">
-                    <a:solidFill>
-                      <a:srgbClr val="1A222C"/>
-                    </a:solidFill>
-                  </a:tcPr>
-                </a:tc>
-                <a:tc>
-                  <a:txBody>
-                    <a:bodyPr/>
-                    <a:lstStyle/>
-                    <a:p>
-                      <a:pPr algn="ctr"/>
-                      <a:r>
-                        <a:rPr sz="1400" b="0">
-                          <a:solidFill>
-                            <a:srgbClr val="E8EDF2"/>
-                          </a:solidFill>
-                          <a:latin typeface="Segoe UI"/>
-                        </a:rPr>
-                        <a:t>-</a:t>
-                      </a:r>
-                    </a:p>
-                  </a:txBody>
-                  <a:tcPr marL="45720" marR="45720" marT="27432" marB="27432">
-                    <a:solidFill>
-                      <a:srgbClr val="1A222C"/>
-                    </a:solidFill>
-                  </a:tcPr>
-                </a:tc>
-                <a:tc>
-                  <a:txBody>
-                    <a:bodyPr/>
-                    <a:lstStyle/>
-                    <a:p>
-                      <a:pPr algn="ctr"/>
-                      <a:r>
-                        <a:rPr sz="1400" b="0">
-                          <a:solidFill>
-                            <a:srgbClr val="E8EDF2"/>
-                          </a:solidFill>
-                          <a:latin typeface="Segoe UI"/>
-                        </a:rPr>
-                        <a:t>-</a:t>
-                      </a:r>
-                    </a:p>
-                  </a:txBody>
-                  <a:tcPr marL="45720" marR="45720" marT="27432" marB="27432">
-                    <a:solidFill>
-                      <a:srgbClr val="1A222C"/>
-                    </a:solidFill>
-                  </a:tcPr>
-                </a:tc>
-                <a:tc>
-                  <a:txBody>
-                    <a:bodyPr/>
-                    <a:lstStyle/>
-                    <a:p>
-                      <a:pPr algn="ctr"/>
-                      <a:r>
-                        <a:rPr sz="1400" b="0">
-                          <a:solidFill>
-                            <a:srgbClr val="E8EDF2"/>
-                          </a:solidFill>
-                          <a:latin typeface="Segoe UI"/>
-                        </a:rPr>
-                        <a:t>-</a:t>
                       </a:r>
                     </a:p>
                   </a:txBody>

--- a/deliverables/paper_overhead_tables.pptx
+++ b/deliverables/paper_overhead_tables.pptx
@@ -3262,7 +3262,7 @@
                 </a:solidFill>
                 <a:latin typeface="Segoe UI"/>
               </a:rPr>
-              <a:t>Overlap-friendly POSIX write/read + sleep. Fidelity EXACT. walltime = WORK region.</a:t>
+              <a:t>Overlap-friendly. Fidelity EXACT. Overhead small but CONSISTENT across 3 reps (+1.1 to +1.3 s, ~0.2%).</a:t>
             </a:r>
           </a:p>
         </p:txBody>
@@ -4355,7 +4355,7 @@
                 </a:solidFill>
                 <a:latin typeface="Segoe UI"/>
               </a:rPr>
-              <a:t>Overlap-friendly POSIX write/read + sleep. Fidelity EXACT. walltime = WORK region.</a:t>
+              <a:t>Overlap-friendly. Fidelity EXACT. Overhead is BELOW run-to-run noise (~0): reps 2-3 land slightly under baseline (-1.6, -2.1 s) -- i.e. streaming is effectively free here.</a:t>
             </a:r>
           </a:p>
         </p:txBody>
@@ -5448,7 +5448,7 @@
                 </a:solidFill>
                 <a:latin typeface="Segoe UI"/>
               </a:rPr>
-              <a:t>NumPy/PyTorch, compute-bound. Fidelity EXACT. walltime = WORK region.</a:t>
+              <a:t>NumPy/PyTorch, compute-bound. Fidelity EXACT. LARGE, reproducible overhead: +137 to +140 s (+66%) across 3 reps.</a:t>
             </a:r>
           </a:p>
         </p:txBody>
@@ -6541,7 +6541,7 @@
                 </a:solidFill>
                 <a:latin typeface="Segoe UI"/>
               </a:rPr>
-              <a:t>MPI unsupported over CXI. Paced (IO_SLEEP_MS) for a comparable ~600 s wall. Fidelity EXACT (32-&gt;1 aggregated).</a:t>
+              <a:t>MPI unsupported over CXI. Paced (~600 s wall). Fidelity EXACT (32-&gt;1). Overhead below noise (~0): the one rep lands -1.7 s vs baseline -- streaming effectively free on this I/O-bound run.</a:t>
             </a:r>
           </a:p>
         </p:txBody>

--- a/deliverables/paper_overhead_tables.pptx
+++ b/deliverables/paper_overhead_tables.pptx
@@ -7262,7 +7262,7 @@
                 </a:solidFill>
                 <a:latin typeface="Segoe UI"/>
               </a:rPr>
-              <a:t>TensorFlow NPZ data-gen. Fidelity EXACT (32-&gt;1 aggregated). Wall = cold/warm-dominated -&gt; per-event cost is the metric.</a:t>
+              <a:t>TensorFlow NPZ data-gen. Fidelity EXACT (32-&gt;1). Wall = COLD-vs-WARM: baseline ran cold (TF import + FS warmup ~139 s); streaming reps ran warm (~15 s) -&gt; wall not comparable, per-event is the metric.</a:t>
             </a:r>
           </a:p>
         </p:txBody>
@@ -7277,7 +7277,7 @@
         </p:nvGraphicFramePr>
         <p:xfrm>
           <a:off x="365760" y="2011680"/>
-          <a:ext cx="11429999" cy="2560320"/>
+          <a:ext cx="11429999" cy="3200400"/>
         </p:xfrm>
         <a:graphic>
           <a:graphicData uri="http://schemas.openxmlformats.org/drawingml/2006/table">
@@ -7489,32 +7489,55 @@
                     <a:p>
                       <a:pPr algn="l"/>
                       <a:r>
-                        <a:rPr sz="1400" b="1">
+                        <a:rPr sz="1400" b="0">
                           <a:solidFill>
                             <a:srgbClr val="4FC3F7"/>
                           </a:solidFill>
                           <a:latin typeface="Segoe UI"/>
                         </a:rPr>
-                        <a:t>baseline</a:t>
-                      </a:r>
-                    </a:p>
-                  </a:txBody>
-                  <a:tcPr marL="45720" marR="45720" marT="27432" marB="27432">
-                    <a:solidFill>
-                      <a:srgbClr val="12202B"/>
-                    </a:solidFill>
-                  </a:tcPr>
-                </a:tc>
-                <a:tc>
-                  <a:txBody>
-                    <a:bodyPr/>
-                    <a:lstStyle/>
-                    <a:p>
-                      <a:pPr algn="ctr"/>
-                      <a:r>
-                        <a:rPr sz="1400" b="1">
-                          <a:solidFill>
-                            <a:srgbClr val="FFFFFF"/>
+                        <a:t>baseline (cold)</a:t>
+                      </a:r>
+                    </a:p>
+                  </a:txBody>
+                  <a:tcPr marL="45720" marR="45720" marT="27432" marB="27432">
+                    <a:solidFill>
+                      <a:srgbClr val="1A222C"/>
+                    </a:solidFill>
+                  </a:tcPr>
+                </a:tc>
+                <a:tc>
+                  <a:txBody>
+                    <a:bodyPr/>
+                    <a:lstStyle/>
+                    <a:p>
+                      <a:pPr algn="ctr"/>
+                      <a:r>
+                        <a:rPr sz="1400" b="0">
+                          <a:solidFill>
+                            <a:srgbClr val="E8EDF2"/>
+                          </a:solidFill>
+                          <a:latin typeface="Segoe UI"/>
+                        </a:rPr>
+                        <a:t>475,994</a:t>
+                      </a:r>
+                    </a:p>
+                  </a:txBody>
+                  <a:tcPr marL="45720" marR="45720" marT="27432" marB="27432">
+                    <a:solidFill>
+                      <a:srgbClr val="1A222C"/>
+                    </a:solidFill>
+                  </a:tcPr>
+                </a:tc>
+                <a:tc>
+                  <a:txBody>
+                    <a:bodyPr/>
+                    <a:lstStyle/>
+                    <a:p>
+                      <a:pPr algn="ctr"/>
+                      <a:r>
+                        <a:rPr sz="1400" b="0">
+                          <a:solidFill>
+                            <a:srgbClr val="E8EDF2"/>
                           </a:solidFill>
                           <a:latin typeface="Segoe UI"/>
                         </a:rPr>
@@ -7524,20 +7547,20 @@
                   </a:txBody>
                   <a:tcPr marL="45720" marR="45720" marT="27432" marB="27432">
                     <a:solidFill>
-                      <a:srgbClr val="12202B"/>
-                    </a:solidFill>
-                  </a:tcPr>
-                </a:tc>
-                <a:tc>
-                  <a:txBody>
-                    <a:bodyPr/>
-                    <a:lstStyle/>
-                    <a:p>
-                      <a:pPr algn="ctr"/>
-                      <a:r>
-                        <a:rPr sz="1400" b="1">
-                          <a:solidFill>
-                            <a:srgbClr val="FFFFFF"/>
+                      <a:srgbClr val="1A222C"/>
+                    </a:solidFill>
+                  </a:tcPr>
+                </a:tc>
+                <a:tc>
+                  <a:txBody>
+                    <a:bodyPr/>
+                    <a:lstStyle/>
+                    <a:p>
+                      <a:pPr algn="ctr"/>
+                      <a:r>
+                        <a:rPr sz="1400" b="0">
+                          <a:solidFill>
+                            <a:srgbClr val="E8EDF2"/>
                           </a:solidFill>
                           <a:latin typeface="Segoe UI"/>
                         </a:rPr>
@@ -7547,20 +7570,20 @@
                   </a:txBody>
                   <a:tcPr marL="45720" marR="45720" marT="27432" marB="27432">
                     <a:solidFill>
-                      <a:srgbClr val="12202B"/>
-                    </a:solidFill>
-                  </a:tcPr>
-                </a:tc>
-                <a:tc>
-                  <a:txBody>
-                    <a:bodyPr/>
-                    <a:lstStyle/>
-                    <a:p>
-                      <a:pPr algn="ctr"/>
-                      <a:r>
-                        <a:rPr sz="1400" b="1">
-                          <a:solidFill>
-                            <a:srgbClr val="FFFFFF"/>
+                      <a:srgbClr val="1A222C"/>
+                    </a:solidFill>
+                  </a:tcPr>
+                </a:tc>
+                <a:tc>
+                  <a:txBody>
+                    <a:bodyPr/>
+                    <a:lstStyle/>
+                    <a:p>
+                      <a:pPr algn="ctr"/>
+                      <a:r>
+                        <a:rPr sz="1400" b="0">
+                          <a:solidFill>
+                            <a:srgbClr val="E8EDF2"/>
                           </a:solidFill>
                           <a:latin typeface="Segoe UI"/>
                         </a:rPr>
@@ -7570,20 +7593,20 @@
                   </a:txBody>
                   <a:tcPr marL="45720" marR="45720" marT="27432" marB="27432">
                     <a:solidFill>
-                      <a:srgbClr val="12202B"/>
-                    </a:solidFill>
-                  </a:tcPr>
-                </a:tc>
-                <a:tc>
-                  <a:txBody>
-                    <a:bodyPr/>
-                    <a:lstStyle/>
-                    <a:p>
-                      <a:pPr algn="ctr"/>
-                      <a:r>
-                        <a:rPr sz="1400" b="1">
-                          <a:solidFill>
-                            <a:srgbClr val="FFFFFF"/>
+                      <a:srgbClr val="1A222C"/>
+                    </a:solidFill>
+                  </a:tcPr>
+                </a:tc>
+                <a:tc>
+                  <a:txBody>
+                    <a:bodyPr/>
+                    <a:lstStyle/>
+                    <a:p>
+                      <a:pPr algn="ctr"/>
+                      <a:r>
+                        <a:rPr sz="1400" b="0">
+                          <a:solidFill>
+                            <a:srgbClr val="E8EDF2"/>
                           </a:solidFill>
                           <a:latin typeface="Segoe UI"/>
                         </a:rPr>
@@ -7593,76 +7616,53 @@
                   </a:txBody>
                   <a:tcPr marL="45720" marR="45720" marT="27432" marB="27432">
                     <a:solidFill>
-                      <a:srgbClr val="12202B"/>
-                    </a:solidFill>
-                  </a:tcPr>
-                </a:tc>
-                <a:tc>
-                  <a:txBody>
-                    <a:bodyPr/>
-                    <a:lstStyle/>
-                    <a:p>
-                      <a:pPr algn="ctr"/>
-                      <a:r>
-                        <a:rPr sz="1400" b="1">
-                          <a:solidFill>
-                            <a:srgbClr val="FFFFFF"/>
-                          </a:solidFill>
-                          <a:latin typeface="Segoe UI"/>
-                        </a:rPr>
-                        <a:t>-</a:t>
-                      </a:r>
-                    </a:p>
-                  </a:txBody>
-                  <a:tcPr marL="45720" marR="45720" marT="27432" marB="27432">
-                    <a:solidFill>
-                      <a:srgbClr val="12202B"/>
-                    </a:solidFill>
-                  </a:tcPr>
-                </a:tc>
-                <a:tc>
-                  <a:txBody>
-                    <a:bodyPr/>
-                    <a:lstStyle/>
-                    <a:p>
-                      <a:pPr algn="ctr"/>
-                      <a:r>
-                        <a:rPr sz="1400" b="1">
-                          <a:solidFill>
-                            <a:srgbClr val="FFFFFF"/>
-                          </a:solidFill>
-                          <a:latin typeface="Segoe UI"/>
-                        </a:rPr>
-                        <a:t>n/a</a:t>
-                      </a:r>
-                    </a:p>
-                  </a:txBody>
-                  <a:tcPr marL="45720" marR="45720" marT="27432" marB="27432">
-                    <a:solidFill>
-                      <a:srgbClr val="12202B"/>
-                    </a:solidFill>
-                  </a:tcPr>
-                </a:tc>
-                <a:tc>
-                  <a:txBody>
-                    <a:bodyPr/>
-                    <a:lstStyle/>
-                    <a:p>
-                      <a:pPr algn="ctr"/>
-                      <a:r>
-                        <a:rPr sz="1400" b="1">
-                          <a:solidFill>
-                            <a:srgbClr val="FFFFFF"/>
-                          </a:solidFill>
-                          <a:latin typeface="Segoe UI"/>
-                        </a:rPr>
-                        <a:t>n/a</a:t>
-                      </a:r>
-                    </a:p>
-                  </a:txBody>
-                  <a:tcPr marL="45720" marR="45720" marT="27432" marB="27432">
-                    <a:solidFill>
-                      <a:srgbClr val="12202B"/>
+                      <a:srgbClr val="1A222C"/>
+                    </a:solidFill>
+                  </a:tcPr>
+                </a:tc>
+                <a:tc>
+                  <a:txBody>
+                    <a:bodyPr/>
+                    <a:lstStyle/>
+                    <a:p>
+                      <a:pPr algn="ctr"/>
+                      <a:r>
+                        <a:rPr sz="1400" b="0">
+                          <a:solidFill>
+                            <a:srgbClr val="E8EDF2"/>
+                          </a:solidFill>
+                          <a:latin typeface="Segoe UI"/>
+                        </a:rPr>
+                        <a:t>139.2</a:t>
+                      </a:r>
+                    </a:p>
+                  </a:txBody>
+                  <a:tcPr marL="45720" marR="45720" marT="27432" marB="27432">
+                    <a:solidFill>
+                      <a:srgbClr val="1A222C"/>
+                    </a:solidFill>
+                  </a:tcPr>
+                </a:tc>
+                <a:tc>
+                  <a:txBody>
+                    <a:bodyPr/>
+                    <a:lstStyle/>
+                    <a:p>
+                      <a:pPr algn="ctr"/>
+                      <a:r>
+                        <a:rPr sz="1400" b="0">
+                          <a:solidFill>
+                            <a:srgbClr val="E8EDF2"/>
+                          </a:solidFill>
+                          <a:latin typeface="Segoe UI"/>
+                        </a:rPr>
+                        <a:t>0.0</a:t>
+                      </a:r>
+                    </a:p>
+                  </a:txBody>
+                  <a:tcPr marL="45720" marR="45720" marT="27432" marB="27432">
+                    <a:solidFill>
+                      <a:srgbClr val="1A222C"/>
                     </a:solidFill>
                   </a:tcPr>
                 </a:tc>
@@ -7681,7 +7681,7 @@
                           </a:solidFill>
                           <a:latin typeface="Segoe UI"/>
                         </a:rPr>
-                        <a:t>streaming r1</a:t>
+                        <a:t>streaming r1 (warm)</a:t>
                       </a:r>
                     </a:p>
                   </a:txBody>
@@ -7819,30 +7819,30 @@
                           </a:solidFill>
                           <a:latin typeface="Segoe UI"/>
                         </a:rPr>
-                        <a:t>n/a</a:t>
-                      </a:r>
-                    </a:p>
-                  </a:txBody>
-                  <a:tcPr marL="45720" marR="45720" marT="27432" marB="27432">
-                    <a:solidFill>
-                      <a:srgbClr val="1A222C"/>
-                    </a:solidFill>
-                  </a:tcPr>
-                </a:tc>
-                <a:tc>
-                  <a:txBody>
-                    <a:bodyPr/>
-                    <a:lstStyle/>
-                    <a:p>
-                      <a:pPr algn="ctr"/>
-                      <a:r>
-                        <a:rPr sz="1400" b="0">
-                          <a:solidFill>
-                            <a:srgbClr val="E8EDF2"/>
-                          </a:solidFill>
-                          <a:latin typeface="Segoe UI"/>
-                        </a:rPr>
-                        <a:t>n/a</a:t>
+                        <a:t>15.0</a:t>
+                      </a:r>
+                    </a:p>
+                  </a:txBody>
+                  <a:tcPr marL="45720" marR="45720" marT="27432" marB="27432">
+                    <a:solidFill>
+                      <a:srgbClr val="1A222C"/>
+                    </a:solidFill>
+                  </a:tcPr>
+                </a:tc>
+                <a:tc>
+                  <a:txBody>
+                    <a:bodyPr/>
+                    <a:lstStyle/>
+                    <a:p>
+                      <a:pPr algn="ctr"/>
+                      <a:r>
+                        <a:rPr sz="1400" b="0">
+                          <a:solidFill>
+                            <a:srgbClr val="E8EDF2"/>
+                          </a:solidFill>
+                          <a:latin typeface="Segoe UI"/>
+                        </a:rPr>
+                        <a:t>-124</a:t>
                       </a:r>
                     </a:p>
                   </a:txBody>
@@ -7867,7 +7867,7 @@
                           </a:solidFill>
                           <a:latin typeface="Segoe UI"/>
                         </a:rPr>
-                        <a:t>streaming r2</a:t>
+                        <a:t>streaming r2 (warm)</a:t>
                       </a:r>
                     </a:p>
                   </a:txBody>
@@ -8005,30 +8005,216 @@
                           </a:solidFill>
                           <a:latin typeface="Segoe UI"/>
                         </a:rPr>
-                        <a:t>n/a</a:t>
-                      </a:r>
-                    </a:p>
-                  </a:txBody>
-                  <a:tcPr marL="45720" marR="45720" marT="27432" marB="27432">
-                    <a:solidFill>
-                      <a:srgbClr val="1A222C"/>
-                    </a:solidFill>
-                  </a:tcPr>
-                </a:tc>
-                <a:tc>
-                  <a:txBody>
-                    <a:bodyPr/>
-                    <a:lstStyle/>
-                    <a:p>
-                      <a:pPr algn="ctr"/>
-                      <a:r>
-                        <a:rPr sz="1400" b="0">
-                          <a:solidFill>
-                            <a:srgbClr val="E8EDF2"/>
-                          </a:solidFill>
-                          <a:latin typeface="Segoe UI"/>
-                        </a:rPr>
-                        <a:t>n/a</a:t>
+                        <a:t>48.3</a:t>
+                      </a:r>
+                    </a:p>
+                  </a:txBody>
+                  <a:tcPr marL="45720" marR="45720" marT="27432" marB="27432">
+                    <a:solidFill>
+                      <a:srgbClr val="1A222C"/>
+                    </a:solidFill>
+                  </a:tcPr>
+                </a:tc>
+                <a:tc>
+                  <a:txBody>
+                    <a:bodyPr/>
+                    <a:lstStyle/>
+                    <a:p>
+                      <a:pPr algn="ctr"/>
+                      <a:r>
+                        <a:rPr sz="1400" b="0">
+                          <a:solidFill>
+                            <a:srgbClr val="E8EDF2"/>
+                          </a:solidFill>
+                          <a:latin typeface="Segoe UI"/>
+                        </a:rPr>
+                        <a:t>-91</a:t>
+                      </a:r>
+                    </a:p>
+                  </a:txBody>
+                  <a:tcPr marL="45720" marR="45720" marT="27432" marB="27432">
+                    <a:solidFill>
+                      <a:srgbClr val="1A222C"/>
+                    </a:solidFill>
+                  </a:tcPr>
+                </a:tc>
+              </a:tr>
+              <a:tr h="640080">
+                <a:tc>
+                  <a:txBody>
+                    <a:bodyPr/>
+                    <a:lstStyle/>
+                    <a:p>
+                      <a:pPr algn="l"/>
+                      <a:r>
+                        <a:rPr sz="1400" b="0">
+                          <a:solidFill>
+                            <a:srgbClr val="4FC3F7"/>
+                          </a:solidFill>
+                          <a:latin typeface="Segoe UI"/>
+                        </a:rPr>
+                        <a:t>streaming r3 (warm)</a:t>
+                      </a:r>
+                    </a:p>
+                  </a:txBody>
+                  <a:tcPr marL="45720" marR="45720" marT="27432" marB="27432">
+                    <a:solidFill>
+                      <a:srgbClr val="1A222C"/>
+                    </a:solidFill>
+                  </a:tcPr>
+                </a:tc>
+                <a:tc>
+                  <a:txBody>
+                    <a:bodyPr/>
+                    <a:lstStyle/>
+                    <a:p>
+                      <a:pPr algn="ctr"/>
+                      <a:r>
+                        <a:rPr sz="1400" b="0">
+                          <a:solidFill>
+                            <a:srgbClr val="E8EDF2"/>
+                          </a:solidFill>
+                          <a:latin typeface="Segoe UI"/>
+                        </a:rPr>
+                        <a:t>475,994</a:t>
+                      </a:r>
+                    </a:p>
+                  </a:txBody>
+                  <a:tcPr marL="45720" marR="45720" marT="27432" marB="27432">
+                    <a:solidFill>
+                      <a:srgbClr val="1A222C"/>
+                    </a:solidFill>
+                  </a:tcPr>
+                </a:tc>
+                <a:tc>
+                  <a:txBody>
+                    <a:bodyPr/>
+                    <a:lstStyle/>
+                    <a:p>
+                      <a:pPr algn="ctr"/>
+                      <a:r>
+                        <a:rPr sz="1400" b="0">
+                          <a:solidFill>
+                            <a:srgbClr val="E8EDF2"/>
+                          </a:solidFill>
+                          <a:latin typeface="Segoe UI"/>
+                        </a:rPr>
+                        <a:t>3.0</a:t>
+                      </a:r>
+                    </a:p>
+                  </a:txBody>
+                  <a:tcPr marL="45720" marR="45720" marT="27432" marB="27432">
+                    <a:solidFill>
+                      <a:srgbClr val="1A222C"/>
+                    </a:solidFill>
+                  </a:tcPr>
+                </a:tc>
+                <a:tc>
+                  <a:txBody>
+                    <a:bodyPr/>
+                    <a:lstStyle/>
+                    <a:p>
+                      <a:pPr algn="ctr"/>
+                      <a:r>
+                        <a:rPr sz="1400" b="0">
+                          <a:solidFill>
+                            <a:srgbClr val="E8EDF2"/>
+                          </a:solidFill>
+                          <a:latin typeface="Segoe UI"/>
+                        </a:rPr>
+                        <a:t>38.0</a:t>
+                      </a:r>
+                    </a:p>
+                  </a:txBody>
+                  <a:tcPr marL="45720" marR="45720" marT="27432" marB="27432">
+                    <a:solidFill>
+                      <a:srgbClr val="1A222C"/>
+                    </a:solidFill>
+                  </a:tcPr>
+                </a:tc>
+                <a:tc>
+                  <a:txBody>
+                    <a:bodyPr/>
+                    <a:lstStyle/>
+                    <a:p>
+                      <a:pPr algn="ctr"/>
+                      <a:r>
+                        <a:rPr sz="1400" b="0">
+                          <a:solidFill>
+                            <a:srgbClr val="E8EDF2"/>
+                          </a:solidFill>
+                          <a:latin typeface="Segoe UI"/>
+                        </a:rPr>
+                        <a:t>3.25</a:t>
+                      </a:r>
+                    </a:p>
+                  </a:txBody>
+                  <a:tcPr marL="45720" marR="45720" marT="27432" marB="27432">
+                    <a:solidFill>
+                      <a:srgbClr val="1A222C"/>
+                    </a:solidFill>
+                  </a:tcPr>
+                </a:tc>
+                <a:tc>
+                  <a:txBody>
+                    <a:bodyPr/>
+                    <a:lstStyle/>
+                    <a:p>
+                      <a:pPr algn="ctr"/>
+                      <a:r>
+                        <a:rPr sz="1400" b="0">
+                          <a:solidFill>
+                            <a:srgbClr val="E8EDF2"/>
+                          </a:solidFill>
+                          <a:latin typeface="Segoe UI"/>
+                        </a:rPr>
+                        <a:t>0.004</a:t>
+                      </a:r>
+                    </a:p>
+                  </a:txBody>
+                  <a:tcPr marL="45720" marR="45720" marT="27432" marB="27432">
+                    <a:solidFill>
+                      <a:srgbClr val="1A222C"/>
+                    </a:solidFill>
+                  </a:tcPr>
+                </a:tc>
+                <a:tc>
+                  <a:txBody>
+                    <a:bodyPr/>
+                    <a:lstStyle/>
+                    <a:p>
+                      <a:pPr algn="ctr"/>
+                      <a:r>
+                        <a:rPr sz="1400" b="0">
+                          <a:solidFill>
+                            <a:srgbClr val="E8EDF2"/>
+                          </a:solidFill>
+                          <a:latin typeface="Segoe UI"/>
+                        </a:rPr>
+                        <a:t>15.3</a:t>
+                      </a:r>
+                    </a:p>
+                  </a:txBody>
+                  <a:tcPr marL="45720" marR="45720" marT="27432" marB="27432">
+                    <a:solidFill>
+                      <a:srgbClr val="1A222C"/>
+                    </a:solidFill>
+                  </a:tcPr>
+                </a:tc>
+                <a:tc>
+                  <a:txBody>
+                    <a:bodyPr/>
+                    <a:lstStyle/>
+                    <a:p>
+                      <a:pPr algn="ctr"/>
+                      <a:r>
+                        <a:rPr sz="1400" b="0">
+                          <a:solidFill>
+                            <a:srgbClr val="E8EDF2"/>
+                          </a:solidFill>
+                          <a:latin typeface="Segoe UI"/>
+                        </a:rPr>
+                        <a:t>-124</a:t>
                       </a:r>
                     </a:p>
                   </a:txBody>
